--- a/docs/flujos_bot_kinesiologia.pptx
+++ b/docs/flujos_bot_kinesiologia.pptx
@@ -14,9 +14,10 @@
     <p:sldId id="262" r:id="rId8"/>
     <p:sldId id="263" r:id="rId9"/>
     <p:sldId id="264" r:id="rId10"/>
+    <p:sldId id="265" r:id="rId11"/>
   </p:sldIdLst>
   <p:notesMasterIdLst>
-    <p:notesMasterId r:id="rId11"/>
+    <p:notesMasterId r:id="rId12"/>
   </p:notesMasterIdLst>
   <p:sldSz cx="12192000" cy="6858000"/>
   <p:notesSz cx="6858000" cy="12192000"/>
@@ -534,6 +535,94 @@
             <a:fld id="{F7021451-1387-4CA6-816F-3879F97B5CBC}" type="slidenum">
               <a:rPr lang="en-US"/>
               <a:t>1</a:t>
+            </a:fld>
+            <a:endParaRPr lang="en-US"/>
+          </a:p>
+        </p:txBody>
+      </p:sp>
+    </p:spTree>
+    <p:extLst>
+      <p:ext uri="{BB962C8B-B14F-4D97-AF65-F5344CB8AC3E}">
+        <p14:creationId xmlns:p14="http://schemas.microsoft.com/office/powerpoint/2010/main" val="1024086991"/>
+      </p:ext>
+    </p:extLst>
+  </p:cSld>
+  <p:clrMapOvr>
+    <a:masterClrMapping/>
+  </p:clrMapOvr>
+</p:notes>
+</file>
+
+<file path=ppt/notesSlides/notesSlide10.xml><?xml version="1.0" encoding="utf-8"?>
+<p:notes xmlns:a="http://schemas.openxmlformats.org/drawingml/2006/main" xmlns:r="http://schemas.openxmlformats.org/officeDocument/2006/relationships" xmlns:p="http://schemas.openxmlformats.org/presentationml/2006/main">
+  <p:cSld>
+    <p:spTree>
+      <p:nvGrpSpPr>
+        <p:cNvPr id="1" name=""/>
+        <p:cNvGrpSpPr/>
+        <p:nvPr/>
+      </p:nvGrpSpPr>
+      <p:grpSpPr>
+        <a:xfrm>
+          <a:off x="0" y="0"/>
+          <a:ext cx="0" cy="0"/>
+          <a:chOff x="0" y="0"/>
+          <a:chExt cx="0" cy="0"/>
+        </a:xfrm>
+      </p:grpSpPr>
+      <p:sp>
+        <p:nvSpPr>
+          <p:cNvPr id="2" name="Slide Image Placeholder 1"/>
+          <p:cNvSpPr>
+            <a:spLocks noGrp="1" noRot="1" noChangeAspect="1"/>
+          </p:cNvSpPr>
+          <p:nvPr>
+            <p:ph type="sldImg"/>
+          </p:nvPr>
+        </p:nvSpPr>
+        <p:spPr/>
+      </p:sp>
+      <p:sp>
+        <p:nvSpPr>
+          <p:cNvPr id="3" name="Notes Placeholder 2"/>
+          <p:cNvSpPr>
+            <a:spLocks noGrp="1"/>
+          </p:cNvSpPr>
+          <p:nvPr>
+            <p:ph type="body" idx="1"/>
+          </p:nvPr>
+        </p:nvSpPr>
+        <p:spPr/>
+        <p:txBody>
+          <a:bodyPr/>
+          <a:lstStyle/>
+          <a:p>
+            <a:r>
+              <a:rPr lang="en-US" dirty="0"/>
+              <a:t/>
+            </a:r>
+            <a:endParaRPr lang="en-US" dirty="0"/>
+          </a:p>
+        </p:txBody>
+      </p:sp>
+      <p:sp>
+        <p:nvSpPr>
+          <p:cNvPr id="4" name="Slide Number Placeholder 3"/>
+          <p:cNvSpPr>
+            <a:spLocks noGrp="1"/>
+          </p:cNvSpPr>
+          <p:nvPr>
+            <p:ph type="sldNum" sz="quarter" idx="10"/>
+          </p:nvPr>
+        </p:nvSpPr>
+        <p:spPr/>
+        <p:txBody>
+          <a:bodyPr/>
+          <a:lstStyle/>
+          <a:p>
+            <a:fld id="{F7021451-1387-4CA6-816F-3879F97B5CBC}" type="slidenum">
+              <a:rPr lang="en-US"/>
+              <a:t>10</a:t>
             </a:fld>
             <a:endParaRPr lang="en-US"/>
           </a:p>
@@ -1781,6 +1870,536 @@
 </p:sld>
 </file>
 
+<file path=ppt/slides/slide10.xml><?xml version="1.0" encoding="utf-8"?>
+<p:sld xmlns:a="http://schemas.openxmlformats.org/drawingml/2006/main" xmlns:r="http://schemas.openxmlformats.org/officeDocument/2006/relationships" xmlns:p="http://schemas.openxmlformats.org/presentationml/2006/main">
+  <p:cSld name="Slide 10">
+    <p:bg>
+      <p:bgPr>
+        <a:solidFill>
+          <a:srgbClr val="0B3438"/>
+        </a:solidFill>
+      </p:bgPr>
+    </p:bg>
+    <p:spTree>
+      <p:nvGrpSpPr>
+        <p:cNvPr id="1" name=""/>
+        <p:cNvGrpSpPr/>
+        <p:nvPr/>
+      </p:nvGrpSpPr>
+      <p:grpSpPr>
+        <a:xfrm>
+          <a:off x="0" y="0"/>
+          <a:ext cx="0" cy="0"/>
+          <a:chOff x="0" y="0"/>
+          <a:chExt cx="0" cy="0"/>
+        </a:xfrm>
+      </p:grpSpPr>
+      <p:sp>
+        <p:nvSpPr>
+          <p:cNvPr id="2" name="Text 0"/>
+          <p:cNvSpPr txBox="1"/>
+          <p:nvPr/>
+        </p:nvSpPr>
+        <p:spPr>
+          <a:xfrm>
+            <a:off x="548640" y="548640"/>
+            <a:ext cx="7315200" cy="274320"/>
+          </a:xfrm>
+          <a:prstGeom prst="rect">
+            <a:avLst/>
+          </a:prstGeom>
+          <a:noFill/>
+          <a:ln/>
+        </p:spPr>
+        <p:txBody>
+          <a:bodyPr wrap="square" lIns="0" tIns="0" rIns="0" bIns="0" rtlCol="0" anchor="ctr"/>
+          <a:lstStyle/>
+          <a:p>
+            <a:pPr indent="0" marL="0">
+              <a:buNone/>
+            </a:pPr>
+            <a:r>
+              <a:rPr lang="en-US" sz="1200" b="1" spc="100" kern="0" dirty="0">
+                <a:solidFill>
+                  <a:srgbClr val="02C39A"/>
+                </a:solidFill>
+                <a:latin typeface="Calibri" pitchFamily="34" charset="0"/>
+                <a:ea typeface="Calibri" pitchFamily="34" charset="-122"/>
+                <a:cs typeface="Calibri" pitchFamily="34" charset="-120"/>
+              </a:rPr>
+              <a:t>PARA REVISAR JUNTOS</a:t>
+            </a:r>
+            <a:endParaRPr lang="en-US" sz="1200" dirty="0"/>
+          </a:p>
+        </p:txBody>
+      </p:sp>
+      <p:sp>
+        <p:nvSpPr>
+          <p:cNvPr id="3" name="Text 1"/>
+          <p:cNvSpPr txBox="1"/>
+          <p:nvPr/>
+        </p:nvSpPr>
+        <p:spPr>
+          <a:xfrm>
+            <a:off x="548640" y="822960"/>
+            <a:ext cx="9144000" cy="640080"/>
+          </a:xfrm>
+          <a:prstGeom prst="rect">
+            <a:avLst/>
+          </a:prstGeom>
+          <a:noFill/>
+          <a:ln/>
+        </p:spPr>
+        <p:txBody>
+          <a:bodyPr wrap="square" lIns="0" tIns="0" rIns="0" bIns="0" rtlCol="0" anchor="ctr"/>
+          <a:lstStyle/>
+          <a:p>
+            <a:pPr indent="0" marL="0">
+              <a:buNone/>
+            </a:pPr>
+            <a:r>
+              <a:rPr lang="en-US" sz="3200" b="1" dirty="0">
+                <a:solidFill>
+                  <a:srgbClr val="FFFFFF"/>
+                </a:solidFill>
+                <a:latin typeface="Cambria" pitchFamily="34" charset="0"/>
+                <a:ea typeface="Cambria" pitchFamily="34" charset="-122"/>
+                <a:cs typeface="Cambria" pitchFamily="34" charset="-120"/>
+              </a:rPr>
+              <a:t>Próximos pasos</a:t>
+            </a:r>
+            <a:endParaRPr lang="en-US" sz="3200" dirty="0"/>
+          </a:p>
+        </p:txBody>
+      </p:sp>
+      <p:sp>
+        <p:nvSpPr>
+          <p:cNvPr id="4" name="Shape 2"/>
+          <p:cNvSpPr/>
+          <p:nvPr/>
+        </p:nvSpPr>
+        <p:spPr>
+          <a:xfrm>
+            <a:off x="548640" y="1920240"/>
+            <a:ext cx="457200" cy="457200"/>
+          </a:xfrm>
+          <a:prstGeom prst="roundRect">
+            <a:avLst>
+              <a:gd name="adj" fmla="val 20000"/>
+            </a:avLst>
+          </a:prstGeom>
+          <a:solidFill>
+            <a:srgbClr val="028090"/>
+          </a:solidFill>
+          <a:ln w="12700">
+            <a:solidFill>
+              <a:srgbClr val="028090"/>
+            </a:solidFill>
+            <a:prstDash val="solid"/>
+          </a:ln>
+        </p:spPr>
+      </p:sp>
+      <p:sp>
+        <p:nvSpPr>
+          <p:cNvPr id="5" name="Text 3"/>
+          <p:cNvSpPr txBox="1"/>
+          <p:nvPr/>
+        </p:nvSpPr>
+        <p:spPr>
+          <a:xfrm>
+            <a:off x="1234440" y="1865376"/>
+            <a:ext cx="9601200" cy="365760"/>
+          </a:xfrm>
+          <a:prstGeom prst="rect">
+            <a:avLst/>
+          </a:prstGeom>
+          <a:noFill/>
+          <a:ln/>
+        </p:spPr>
+        <p:txBody>
+          <a:bodyPr wrap="square" lIns="0" tIns="0" rIns="0" bIns="0" rtlCol="0" anchor="ctr"/>
+          <a:lstStyle/>
+          <a:p>
+            <a:pPr indent="0" marL="0">
+              <a:buNone/>
+            </a:pPr>
+            <a:r>
+              <a:rPr lang="en-US" sz="1700" b="1" dirty="0">
+                <a:solidFill>
+                  <a:srgbClr val="FFFFFF"/>
+                </a:solidFill>
+                <a:latin typeface="Calibri" pitchFamily="34" charset="0"/>
+                <a:ea typeface="Calibri" pitchFamily="34" charset="-122"/>
+                <a:cs typeface="Calibri" pitchFamily="34" charset="-120"/>
+              </a:rPr>
+              <a:t>Relato de la orden médica</a:t>
+            </a:r>
+            <a:endParaRPr lang="en-US" sz="1700" dirty="0"/>
+          </a:p>
+        </p:txBody>
+      </p:sp>
+      <p:sp>
+        <p:nvSpPr>
+          <p:cNvPr id="6" name="Text 4"/>
+          <p:cNvSpPr txBox="1"/>
+          <p:nvPr/>
+        </p:nvSpPr>
+        <p:spPr>
+          <a:xfrm>
+            <a:off x="1234440" y="2212848"/>
+            <a:ext cx="9601200" cy="365760"/>
+          </a:xfrm>
+          <a:prstGeom prst="rect">
+            <a:avLst/>
+          </a:prstGeom>
+          <a:noFill/>
+          <a:ln/>
+        </p:spPr>
+        <p:txBody>
+          <a:bodyPr wrap="square" lIns="0" tIns="0" rIns="0" bIns="0" rtlCol="0" anchor="ctr"/>
+          <a:lstStyle/>
+          <a:p>
+            <a:pPr indent="0" marL="0">
+              <a:buNone/>
+            </a:pPr>
+            <a:r>
+              <a:rPr lang="en-US" sz="1300" dirty="0">
+                <a:solidFill>
+                  <a:srgbClr val="9FC9C8"/>
+                </a:solidFill>
+                <a:latin typeface="Calibri" pitchFamily="34" charset="0"/>
+                <a:ea typeface="Calibri" pitchFamily="34" charset="-122"/>
+                <a:cs typeface="Calibri" pitchFamily="34" charset="-120"/>
+              </a:rPr>
+              <a:t>Revisar dónde se guarda y cómo lo ve Felipe en el panel</a:t>
+            </a:r>
+            <a:endParaRPr lang="en-US" sz="1300" dirty="0"/>
+          </a:p>
+        </p:txBody>
+      </p:sp>
+      <p:sp>
+        <p:nvSpPr>
+          <p:cNvPr id="7" name="Shape 5"/>
+          <p:cNvSpPr/>
+          <p:nvPr/>
+        </p:nvSpPr>
+        <p:spPr>
+          <a:xfrm>
+            <a:off x="548640" y="2971800"/>
+            <a:ext cx="457200" cy="457200"/>
+          </a:xfrm>
+          <a:prstGeom prst="roundRect">
+            <a:avLst>
+              <a:gd name="adj" fmla="val 20000"/>
+            </a:avLst>
+          </a:prstGeom>
+          <a:solidFill>
+            <a:srgbClr val="028090"/>
+          </a:solidFill>
+          <a:ln w="12700">
+            <a:solidFill>
+              <a:srgbClr val="028090"/>
+            </a:solidFill>
+            <a:prstDash val="solid"/>
+          </a:ln>
+        </p:spPr>
+      </p:sp>
+      <p:sp>
+        <p:nvSpPr>
+          <p:cNvPr id="8" name="Text 6"/>
+          <p:cNvSpPr txBox="1"/>
+          <p:nvPr/>
+        </p:nvSpPr>
+        <p:spPr>
+          <a:xfrm>
+            <a:off x="1234440" y="2916936"/>
+            <a:ext cx="9601200" cy="365760"/>
+          </a:xfrm>
+          <a:prstGeom prst="rect">
+            <a:avLst/>
+          </a:prstGeom>
+          <a:noFill/>
+          <a:ln/>
+        </p:spPr>
+        <p:txBody>
+          <a:bodyPr wrap="square" lIns="0" tIns="0" rIns="0" bIns="0" rtlCol="0" anchor="ctr"/>
+          <a:lstStyle/>
+          <a:p>
+            <a:pPr indent="0" marL="0">
+              <a:buNone/>
+            </a:pPr>
+            <a:r>
+              <a:rPr lang="en-US" sz="1700" b="1" dirty="0">
+                <a:solidFill>
+                  <a:srgbClr val="FFFFFF"/>
+                </a:solidFill>
+                <a:latin typeface="Calibri" pitchFamily="34" charset="0"/>
+                <a:ea typeface="Calibri" pitchFamily="34" charset="-122"/>
+                <a:cs typeface="Calibri" pitchFamily="34" charset="-120"/>
+              </a:rPr>
+              <a:t>Casos límite</a:t>
+            </a:r>
+            <a:endParaRPr lang="en-US" sz="1700" dirty="0"/>
+          </a:p>
+        </p:txBody>
+      </p:sp>
+      <p:sp>
+        <p:nvSpPr>
+          <p:cNvPr id="9" name="Text 7"/>
+          <p:cNvSpPr txBox="1"/>
+          <p:nvPr/>
+        </p:nvSpPr>
+        <p:spPr>
+          <a:xfrm>
+            <a:off x="1234440" y="3264408"/>
+            <a:ext cx="9601200" cy="365760"/>
+          </a:xfrm>
+          <a:prstGeom prst="rect">
+            <a:avLst/>
+          </a:prstGeom>
+          <a:noFill/>
+          <a:ln/>
+        </p:spPr>
+        <p:txBody>
+          <a:bodyPr wrap="square" lIns="0" tIns="0" rIns="0" bIns="0" rtlCol="0" anchor="ctr"/>
+          <a:lstStyle/>
+          <a:p>
+            <a:pPr indent="0" marL="0">
+              <a:buNone/>
+            </a:pPr>
+            <a:r>
+              <a:rPr lang="en-US" sz="1300" dirty="0">
+                <a:solidFill>
+                  <a:srgbClr val="9FC9C8"/>
+                </a:solidFill>
+                <a:latin typeface="Calibri" pitchFamily="34" charset="0"/>
+                <a:ea typeface="Calibri" pitchFamily="34" charset="-122"/>
+                <a:cs typeface="Calibri" pitchFamily="34" charset="-120"/>
+              </a:rPr>
+              <a:t>Qué hacer si el paciente no reconoce ninguna zona ni diagnóstico</a:t>
+            </a:r>
+            <a:endParaRPr lang="en-US" sz="1300" dirty="0"/>
+          </a:p>
+        </p:txBody>
+      </p:sp>
+      <p:sp>
+        <p:nvSpPr>
+          <p:cNvPr id="10" name="Shape 8"/>
+          <p:cNvSpPr/>
+          <p:nvPr/>
+        </p:nvSpPr>
+        <p:spPr>
+          <a:xfrm>
+            <a:off x="548640" y="4023360"/>
+            <a:ext cx="457200" cy="457200"/>
+          </a:xfrm>
+          <a:prstGeom prst="roundRect">
+            <a:avLst>
+              <a:gd name="adj" fmla="val 20000"/>
+            </a:avLst>
+          </a:prstGeom>
+          <a:solidFill>
+            <a:srgbClr val="028090"/>
+          </a:solidFill>
+          <a:ln w="12700">
+            <a:solidFill>
+              <a:srgbClr val="028090"/>
+            </a:solidFill>
+            <a:prstDash val="solid"/>
+          </a:ln>
+        </p:spPr>
+      </p:sp>
+      <p:sp>
+        <p:nvSpPr>
+          <p:cNvPr id="11" name="Text 9"/>
+          <p:cNvSpPr txBox="1"/>
+          <p:nvPr/>
+        </p:nvSpPr>
+        <p:spPr>
+          <a:xfrm>
+            <a:off x="1234440" y="3968496"/>
+            <a:ext cx="9601200" cy="365760"/>
+          </a:xfrm>
+          <a:prstGeom prst="rect">
+            <a:avLst/>
+          </a:prstGeom>
+          <a:noFill/>
+          <a:ln/>
+        </p:spPr>
+        <p:txBody>
+          <a:bodyPr wrap="square" lIns="0" tIns="0" rIns="0" bIns="0" rtlCol="0" anchor="ctr"/>
+          <a:lstStyle/>
+          <a:p>
+            <a:pPr indent="0" marL="0">
+              <a:buNone/>
+            </a:pPr>
+            <a:r>
+              <a:rPr lang="en-US" sz="1700" b="1" dirty="0">
+                <a:solidFill>
+                  <a:srgbClr val="FFFFFF"/>
+                </a:solidFill>
+                <a:latin typeface="Calibri" pitchFamily="34" charset="0"/>
+                <a:ea typeface="Calibri" pitchFamily="34" charset="-122"/>
+                <a:cs typeface="Calibri" pitchFamily="34" charset="-120"/>
+              </a:rPr>
+              <a:t>Previsión y agenda</a:t>
+            </a:r>
+            <a:endParaRPr lang="en-US" sz="1700" dirty="0"/>
+          </a:p>
+        </p:txBody>
+      </p:sp>
+      <p:sp>
+        <p:nvSpPr>
+          <p:cNvPr id="12" name="Text 10"/>
+          <p:cNvSpPr txBox="1"/>
+          <p:nvPr/>
+        </p:nvSpPr>
+        <p:spPr>
+          <a:xfrm>
+            <a:off x="1234440" y="4315968"/>
+            <a:ext cx="9601200" cy="365760"/>
+          </a:xfrm>
+          <a:prstGeom prst="rect">
+            <a:avLst/>
+          </a:prstGeom>
+          <a:noFill/>
+          <a:ln/>
+        </p:spPr>
+        <p:txBody>
+          <a:bodyPr wrap="square" lIns="0" tIns="0" rIns="0" bIns="0" rtlCol="0" anchor="ctr"/>
+          <a:lstStyle/>
+          <a:p>
+            <a:pPr indent="0" marL="0">
+              <a:buNone/>
+            </a:pPr>
+            <a:r>
+              <a:rPr lang="en-US" sz="1300" dirty="0">
+                <a:solidFill>
+                  <a:srgbClr val="9FC9C8"/>
+                </a:solidFill>
+                <a:latin typeface="Calibri" pitchFamily="34" charset="0"/>
+                <a:ea typeface="Calibri" pitchFamily="34" charset="-122"/>
+                <a:cs typeface="Calibri" pitchFamily="34" charset="-120"/>
+              </a:rPr>
+              <a:t>Validar que la oferta de agendar tras el precio no se salte pasos</a:t>
+            </a:r>
+            <a:endParaRPr lang="en-US" sz="1300" dirty="0"/>
+          </a:p>
+        </p:txBody>
+      </p:sp>
+      <p:sp>
+        <p:nvSpPr>
+          <p:cNvPr id="13" name="Shape 11"/>
+          <p:cNvSpPr/>
+          <p:nvPr/>
+        </p:nvSpPr>
+        <p:spPr>
+          <a:xfrm>
+            <a:off x="548640" y="5074920"/>
+            <a:ext cx="457200" cy="457200"/>
+          </a:xfrm>
+          <a:prstGeom prst="roundRect">
+            <a:avLst>
+              <a:gd name="adj" fmla="val 20000"/>
+            </a:avLst>
+          </a:prstGeom>
+          <a:solidFill>
+            <a:srgbClr val="028090"/>
+          </a:solidFill>
+          <a:ln w="12700">
+            <a:solidFill>
+              <a:srgbClr val="028090"/>
+            </a:solidFill>
+            <a:prstDash val="solid"/>
+          </a:ln>
+        </p:spPr>
+      </p:sp>
+      <p:sp>
+        <p:nvSpPr>
+          <p:cNvPr id="14" name="Text 12"/>
+          <p:cNvSpPr txBox="1"/>
+          <p:nvPr/>
+        </p:nvSpPr>
+        <p:spPr>
+          <a:xfrm>
+            <a:off x="1234440" y="5020056"/>
+            <a:ext cx="9601200" cy="365760"/>
+          </a:xfrm>
+          <a:prstGeom prst="rect">
+            <a:avLst/>
+          </a:prstGeom>
+          <a:noFill/>
+          <a:ln/>
+        </p:spPr>
+        <p:txBody>
+          <a:bodyPr wrap="square" lIns="0" tIns="0" rIns="0" bIns="0" rtlCol="0" anchor="ctr"/>
+          <a:lstStyle/>
+          <a:p>
+            <a:pPr indent="0" marL="0">
+              <a:buNone/>
+            </a:pPr>
+            <a:r>
+              <a:rPr lang="en-US" sz="1700" b="1" dirty="0">
+                <a:solidFill>
+                  <a:srgbClr val="FFFFFF"/>
+                </a:solidFill>
+                <a:latin typeface="Calibri" pitchFamily="34" charset="0"/>
+                <a:ea typeface="Calibri" pitchFamily="34" charset="-122"/>
+                <a:cs typeface="Calibri" pitchFamily="34" charset="-120"/>
+              </a:rPr>
+              <a:t>Prueba en vivo</a:t>
+            </a:r>
+            <a:endParaRPr lang="en-US" sz="1700" dirty="0"/>
+          </a:p>
+        </p:txBody>
+      </p:sp>
+      <p:sp>
+        <p:nvSpPr>
+          <p:cNvPr id="15" name="Text 13"/>
+          <p:cNvSpPr txBox="1"/>
+          <p:nvPr/>
+        </p:nvSpPr>
+        <p:spPr>
+          <a:xfrm>
+            <a:off x="1234440" y="5367528"/>
+            <a:ext cx="9601200" cy="365760"/>
+          </a:xfrm>
+          <a:prstGeom prst="rect">
+            <a:avLst/>
+          </a:prstGeom>
+          <a:noFill/>
+          <a:ln/>
+        </p:spPr>
+        <p:txBody>
+          <a:bodyPr wrap="square" lIns="0" tIns="0" rIns="0" bIns="0" rtlCol="0" anchor="ctr"/>
+          <a:lstStyle/>
+          <a:p>
+            <a:pPr indent="0" marL="0">
+              <a:buNone/>
+            </a:pPr>
+            <a:r>
+              <a:rPr lang="en-US" sz="1300" dirty="0">
+                <a:solidFill>
+                  <a:srgbClr val="9FC9C8"/>
+                </a:solidFill>
+                <a:latin typeface="Calibri" pitchFamily="34" charset="0"/>
+                <a:ea typeface="Calibri" pitchFamily="34" charset="-122"/>
+                <a:cs typeface="Calibri" pitchFamily="34" charset="-120"/>
+              </a:rPr>
+              <a:t>Correr el flujo completo por WhatsApp con un número nuevo</a:t>
+            </a:r>
+            <a:endParaRPr lang="en-US" sz="1300" dirty="0"/>
+          </a:p>
+        </p:txBody>
+      </p:sp>
+    </p:spTree>
+  </p:cSld>
+  <p:clrMapOvr>
+    <a:masterClrMapping/>
+  </p:clrMapOvr>
+</p:sld>
+</file>
+
 <file path=ppt/slides/slide2.xml><?xml version="1.0" encoding="utf-8"?>
 <p:sld xmlns:a="http://schemas.openxmlformats.org/drawingml/2006/main" xmlns:r="http://schemas.openxmlformats.org/officeDocument/2006/relationships" xmlns:p="http://schemas.openxmlformats.org/presentationml/2006/main">
   <p:cSld name="Slide 2">
@@ -3039,8 +3658,8 @@
         </p:nvSpPr>
         <p:spPr>
           <a:xfrm>
-            <a:off x="6263640" y="384048"/>
-            <a:ext cx="5349240" cy="6309360"/>
+            <a:off x="6263640" y="365760"/>
+            <a:ext cx="5349240" cy="6355080"/>
           </a:xfrm>
           <a:prstGeom prst="roundRect">
             <a:avLst>
@@ -3066,7 +3685,7 @@
         </p:nvSpPr>
         <p:spPr>
           <a:xfrm>
-            <a:off x="6537960" y="786384"/>
+            <a:off x="6537960" y="694944"/>
             <a:ext cx="4800600" cy="384048"/>
           </a:xfrm>
           <a:prstGeom prst="roundRect">
@@ -3093,7 +3712,7 @@
         </p:nvSpPr>
         <p:spPr>
           <a:xfrm>
-            <a:off x="6684264" y="786384"/>
+            <a:off x="6684264" y="694944"/>
             <a:ext cx="4507992" cy="384048"/>
           </a:xfrm>
           <a:prstGeom prst="rect">
@@ -3113,7 +3732,7 @@
               <a:buNone/>
             </a:pPr>
             <a:r>
-              <a:rPr lang="en-US" sz="1050" dirty="0">
+              <a:rPr lang="en-US" sz="950" dirty="0">
                 <a:solidFill>
                   <a:srgbClr val="1B2A2F"/>
                 </a:solidFill>
@@ -3123,7 +3742,7 @@
               </a:rPr>
               <a:t>Hola</a:t>
             </a:r>
-            <a:endParaRPr lang="en-US" sz="1050" dirty="0"/>
+            <a:endParaRPr lang="en-US" sz="950" dirty="0"/>
           </a:p>
         </p:txBody>
       </p:sp>
@@ -3135,7 +3754,7 @@
         </p:nvSpPr>
         <p:spPr>
           <a:xfrm>
-            <a:off x="6537960" y="612648"/>
+            <a:off x="6537960" y="521208"/>
             <a:ext cx="4800600" cy="155448"/>
           </a:xfrm>
           <a:prstGeom prst="rect">
@@ -3174,7 +3793,7 @@
         </p:nvSpPr>
         <p:spPr>
           <a:xfrm>
-            <a:off x="6537960" y="1453896"/>
+            <a:off x="6537960" y="1298448"/>
             <a:ext cx="4800600" cy="384048"/>
           </a:xfrm>
           <a:prstGeom prst="roundRect">
@@ -3201,7 +3820,7 @@
         </p:nvSpPr>
         <p:spPr>
           <a:xfrm>
-            <a:off x="6684264" y="1453896"/>
+            <a:off x="6684264" y="1298448"/>
             <a:ext cx="4507992" cy="384048"/>
           </a:xfrm>
           <a:prstGeom prst="rect">
@@ -3221,7 +3840,7 @@
               <a:buNone/>
             </a:pPr>
             <a:r>
-              <a:rPr lang="en-US" sz="1050" dirty="0">
+              <a:rPr lang="en-US" sz="950" dirty="0">
                 <a:solidFill>
                   <a:srgbClr val="FFFFFF"/>
                 </a:solidFill>
@@ -3231,7 +3850,7 @@
               </a:rPr>
               <a:t>¡Hola! No tengo tu registro todavía. ¿Cuál es tu nombre y apellido?</a:t>
             </a:r>
-            <a:endParaRPr lang="en-US" sz="1050" dirty="0"/>
+            <a:endParaRPr lang="en-US" sz="950" dirty="0"/>
           </a:p>
         </p:txBody>
       </p:sp>
@@ -3243,7 +3862,7 @@
         </p:nvSpPr>
         <p:spPr>
           <a:xfrm>
-            <a:off x="6537960" y="1280160"/>
+            <a:off x="6537960" y="1124712"/>
             <a:ext cx="4800600" cy="155448"/>
           </a:xfrm>
           <a:prstGeom prst="rect">
@@ -3282,7 +3901,7 @@
         </p:nvSpPr>
         <p:spPr>
           <a:xfrm>
-            <a:off x="6537960" y="2121408"/>
+            <a:off x="6537960" y="1901952"/>
             <a:ext cx="4800600" cy="384048"/>
           </a:xfrm>
           <a:prstGeom prst="roundRect">
@@ -3309,7 +3928,7 @@
         </p:nvSpPr>
         <p:spPr>
           <a:xfrm>
-            <a:off x="6684264" y="2121408"/>
+            <a:off x="6684264" y="1901952"/>
             <a:ext cx="4507992" cy="384048"/>
           </a:xfrm>
           <a:prstGeom prst="rect">
@@ -3329,7 +3948,7 @@
               <a:buNone/>
             </a:pPr>
             <a:r>
-              <a:rPr lang="en-US" sz="1050" dirty="0">
+              <a:rPr lang="en-US" sz="950" dirty="0">
                 <a:solidFill>
                   <a:srgbClr val="1B2A2F"/>
                 </a:solidFill>
@@ -3339,7 +3958,7 @@
               </a:rPr>
               <a:t>María Soto</a:t>
             </a:r>
-            <a:endParaRPr lang="en-US" sz="1050" dirty="0"/>
+            <a:endParaRPr lang="en-US" sz="950" dirty="0"/>
           </a:p>
         </p:txBody>
       </p:sp>
@@ -3351,7 +3970,7 @@
         </p:nvSpPr>
         <p:spPr>
           <a:xfrm>
-            <a:off x="6537960" y="1947672"/>
+            <a:off x="6537960" y="1728216"/>
             <a:ext cx="4800600" cy="155448"/>
           </a:xfrm>
           <a:prstGeom prst="rect">
@@ -3390,7 +4009,7 @@
         </p:nvSpPr>
         <p:spPr>
           <a:xfrm>
-            <a:off x="6537960" y="2788920"/>
+            <a:off x="6537960" y="2505456"/>
             <a:ext cx="4800600" cy="566928"/>
           </a:xfrm>
           <a:prstGeom prst="roundRect">
@@ -3417,7 +4036,7 @@
         </p:nvSpPr>
         <p:spPr>
           <a:xfrm>
-            <a:off x="6684264" y="2788920"/>
+            <a:off x="6684264" y="2505456"/>
             <a:ext cx="4507992" cy="566928"/>
           </a:xfrm>
           <a:prstGeom prst="rect">
@@ -3437,7 +4056,7 @@
               <a:buNone/>
             </a:pPr>
             <a:r>
-              <a:rPr lang="en-US" sz="1050" dirty="0">
+              <a:rPr lang="en-US" sz="950" dirty="0">
                 <a:solidFill>
                   <a:srgbClr val="FFFFFF"/>
                 </a:solidFill>
@@ -3447,7 +4066,7 @@
               </a:rPr>
               <a:t>Listo, María. Ya te registré.</a:t>
             </a:r>
-            <a:endParaRPr lang="en-US" sz="1050" dirty="0"/>
+            <a:endParaRPr lang="en-US" sz="950" dirty="0"/>
           </a:p>
           <a:p>
             <a:pPr algn="l" indent="0" marL="0">
@@ -3457,7 +4076,7 @@
               <a:buNone/>
             </a:pPr>
             <a:r>
-              <a:rPr lang="en-US" sz="1050" dirty="0">
+              <a:rPr lang="en-US" sz="950" dirty="0">
                 <a:solidFill>
                   <a:srgbClr val="FFFFFF"/>
                 </a:solidFill>
@@ -3467,7 +4086,7 @@
               </a:rPr>
               <a:t>¿Cuál es tu RUT?</a:t>
             </a:r>
-            <a:endParaRPr lang="en-US" sz="1050" dirty="0"/>
+            <a:endParaRPr lang="en-US" sz="950" dirty="0"/>
           </a:p>
         </p:txBody>
       </p:sp>
@@ -3479,7 +4098,7 @@
         </p:nvSpPr>
         <p:spPr>
           <a:xfrm>
-            <a:off x="6537960" y="2615184"/>
+            <a:off x="6537960" y="2331720"/>
             <a:ext cx="4800600" cy="155448"/>
           </a:xfrm>
           <a:prstGeom prst="rect">
@@ -3518,7 +4137,7 @@
         </p:nvSpPr>
         <p:spPr>
           <a:xfrm>
-            <a:off x="6537960" y="3639312"/>
+            <a:off x="6537960" y="3291840"/>
             <a:ext cx="4800600" cy="384048"/>
           </a:xfrm>
           <a:prstGeom prst="roundRect">
@@ -3545,7 +4164,7 @@
         </p:nvSpPr>
         <p:spPr>
           <a:xfrm>
-            <a:off x="6684264" y="3639312"/>
+            <a:off x="6684264" y="3291840"/>
             <a:ext cx="4507992" cy="384048"/>
           </a:xfrm>
           <a:prstGeom prst="rect">
@@ -3565,7 +4184,7 @@
               <a:buNone/>
             </a:pPr>
             <a:r>
-              <a:rPr lang="en-US" sz="1050" dirty="0">
+              <a:rPr lang="en-US" sz="950" dirty="0">
                 <a:solidFill>
                   <a:srgbClr val="1B2A2F"/>
                 </a:solidFill>
@@ -3575,7 +4194,7 @@
               </a:rPr>
               <a:t>11.222.333-4</a:t>
             </a:r>
-            <a:endParaRPr lang="en-US" sz="1050" dirty="0"/>
+            <a:endParaRPr lang="en-US" sz="950" dirty="0"/>
           </a:p>
         </p:txBody>
       </p:sp>
@@ -3587,7 +4206,7 @@
         </p:nvSpPr>
         <p:spPr>
           <a:xfrm>
-            <a:off x="6537960" y="3465576"/>
+            <a:off x="6537960" y="3118104"/>
             <a:ext cx="4800600" cy="155448"/>
           </a:xfrm>
           <a:prstGeom prst="rect">
@@ -3626,12 +4245,12 @@
         </p:nvSpPr>
         <p:spPr>
           <a:xfrm>
-            <a:off x="6537960" y="4306824"/>
-            <a:ext cx="4800600" cy="384048"/>
+            <a:off x="6537960" y="3895344"/>
+            <a:ext cx="4800600" cy="566928"/>
           </a:xfrm>
           <a:prstGeom prst="roundRect">
             <a:avLst>
-              <a:gd name="adj" fmla="val 23810"/>
+              <a:gd name="adj" fmla="val 16129"/>
             </a:avLst>
           </a:prstGeom>
           <a:solidFill>
@@ -3653,8 +4272,8 @@
         </p:nvSpPr>
         <p:spPr>
           <a:xfrm>
-            <a:off x="6684264" y="4306824"/>
-            <a:ext cx="4507992" cy="384048"/>
+            <a:off x="6684264" y="3895344"/>
+            <a:ext cx="4507992" cy="566928"/>
           </a:xfrm>
           <a:prstGeom prst="rect">
             <a:avLst/>
@@ -3673,7 +4292,7 @@
               <a:buNone/>
             </a:pPr>
             <a:r>
-              <a:rPr lang="en-US" sz="1050" dirty="0">
+              <a:rPr lang="en-US" sz="950" dirty="0">
                 <a:solidFill>
                   <a:srgbClr val="FFFFFF"/>
                 </a:solidFill>
@@ -3681,9 +4300,9 @@
                 <a:ea typeface="Calibri" pitchFamily="34" charset="-122"/>
                 <a:cs typeface="Calibri" pitchFamily="34" charset="-120"/>
               </a:rPr>
-              <a:t>¿Cuál es tu peso? (opcional, puedes responder "no")</a:t>
-            </a:r>
-            <a:endParaRPr lang="en-US" sz="1050" dirty="0"/>
+              <a:t>Gracias por la información. ¿Cuál es tu peso? (opcional, puedes decir "no")</a:t>
+            </a:r>
+            <a:endParaRPr lang="en-US" sz="950" dirty="0"/>
           </a:p>
         </p:txBody>
       </p:sp>
@@ -3695,7 +4314,7 @@
         </p:nvSpPr>
         <p:spPr>
           <a:xfrm>
-            <a:off x="6537960" y="4133088"/>
+            <a:off x="6537960" y="3721608"/>
             <a:ext cx="4800600" cy="155448"/>
           </a:xfrm>
           <a:prstGeom prst="rect">
@@ -3734,7 +4353,7 @@
         </p:nvSpPr>
         <p:spPr>
           <a:xfrm>
-            <a:off x="6537960" y="4974336"/>
+            <a:off x="6537960" y="4681728"/>
             <a:ext cx="4800600" cy="384048"/>
           </a:xfrm>
           <a:prstGeom prst="roundRect">
@@ -3761,7 +4380,7 @@
         </p:nvSpPr>
         <p:spPr>
           <a:xfrm>
-            <a:off x="6684264" y="4974336"/>
+            <a:off x="6684264" y="4681728"/>
             <a:ext cx="4507992" cy="384048"/>
           </a:xfrm>
           <a:prstGeom prst="rect">
@@ -3781,7 +4400,7 @@
               <a:buNone/>
             </a:pPr>
             <a:r>
-              <a:rPr lang="en-US" sz="1050" dirty="0">
+              <a:rPr lang="en-US" sz="950" dirty="0">
                 <a:solidFill>
                   <a:srgbClr val="1B2A2F"/>
                 </a:solidFill>
@@ -3791,7 +4410,7 @@
               </a:rPr>
               <a:t>68</a:t>
             </a:r>
-            <a:endParaRPr lang="en-US" sz="1050" dirty="0"/>
+            <a:endParaRPr lang="en-US" sz="950" dirty="0"/>
           </a:p>
         </p:txBody>
       </p:sp>
@@ -3803,7 +4422,7 @@
         </p:nvSpPr>
         <p:spPr>
           <a:xfrm>
-            <a:off x="6537960" y="4800600"/>
+            <a:off x="6537960" y="4507992"/>
             <a:ext cx="4800600" cy="155448"/>
           </a:xfrm>
           <a:prstGeom prst="rect">
@@ -3842,7 +4461,7 @@
         </p:nvSpPr>
         <p:spPr>
           <a:xfrm>
-            <a:off x="6537960" y="5641848"/>
+            <a:off x="6537960" y="5285232"/>
             <a:ext cx="4800600" cy="384048"/>
           </a:xfrm>
           <a:prstGeom prst="roundRect">
@@ -3869,7 +4488,7 @@
         </p:nvSpPr>
         <p:spPr>
           <a:xfrm>
-            <a:off x="6684264" y="5641848"/>
+            <a:off x="6684264" y="5285232"/>
             <a:ext cx="4507992" cy="384048"/>
           </a:xfrm>
           <a:prstGeom prst="rect">
@@ -3889,7 +4508,7 @@
               <a:buNone/>
             </a:pPr>
             <a:r>
-              <a:rPr lang="en-US" sz="1050" dirty="0">
+              <a:rPr lang="en-US" sz="950" dirty="0">
                 <a:solidFill>
                   <a:srgbClr val="FFFFFF"/>
                 </a:solidFill>
@@ -3897,9 +4516,9 @@
                 <a:ea typeface="Calibri" pitchFamily="34" charset="-122"/>
                 <a:cs typeface="Calibri" pitchFamily="34" charset="-120"/>
               </a:rPr>
-              <a:t>¿Cuál es tu altura? (opcional)</a:t>
-            </a:r>
-            <a:endParaRPr lang="en-US" sz="1050" dirty="0"/>
+              <a:t>Gracias por la información. ¿Cuál es tu altura? (opcional)</a:t>
+            </a:r>
+            <a:endParaRPr lang="en-US" sz="950" dirty="0"/>
           </a:p>
         </p:txBody>
       </p:sp>
@@ -3911,7 +4530,7 @@
         </p:nvSpPr>
         <p:spPr>
           <a:xfrm>
-            <a:off x="6537960" y="5468112"/>
+            <a:off x="6537960" y="5111496"/>
             <a:ext cx="4800600" cy="155448"/>
           </a:xfrm>
           <a:prstGeom prst="rect">
@@ -3950,7 +4569,7 @@
         </p:nvSpPr>
         <p:spPr>
           <a:xfrm>
-            <a:off x="6537960" y="6309360"/>
+            <a:off x="6537960" y="5888736"/>
             <a:ext cx="4800600" cy="384048"/>
           </a:xfrm>
           <a:prstGeom prst="roundRect">
@@ -3977,7 +4596,7 @@
         </p:nvSpPr>
         <p:spPr>
           <a:xfrm>
-            <a:off x="6684264" y="6309360"/>
+            <a:off x="6684264" y="5888736"/>
             <a:ext cx="4507992" cy="384048"/>
           </a:xfrm>
           <a:prstGeom prst="rect">
@@ -3997,7 +4616,7 @@
               <a:buNone/>
             </a:pPr>
             <a:r>
-              <a:rPr lang="en-US" sz="1050" dirty="0">
+              <a:rPr lang="en-US" sz="950" dirty="0">
                 <a:solidFill>
                   <a:srgbClr val="1B2A2F"/>
                 </a:solidFill>
@@ -4007,7 +4626,7 @@
               </a:rPr>
               <a:t>1.65</a:t>
             </a:r>
-            <a:endParaRPr lang="en-US" sz="1050" dirty="0"/>
+            <a:endParaRPr lang="en-US" sz="950" dirty="0"/>
           </a:p>
         </p:txBody>
       </p:sp>
@@ -4019,7 +4638,7 @@
         </p:nvSpPr>
         <p:spPr>
           <a:xfrm>
-            <a:off x="6537960" y="6135624"/>
+            <a:off x="6537960" y="5715000"/>
             <a:ext cx="4800600" cy="155448"/>
           </a:xfrm>
           <a:prstGeom prst="rect">
@@ -4087,6 +4706,35 @@
                 <a:cs typeface="Calibri" pitchFamily="34" charset="-120"/>
               </a:rPr>
               <a:t>Al escribir “Hola” desde un número sin ficha, el bot pide en orden: nombre y apellido, luego RUT (obligatorio), y por último peso y altura (opcionales — el paciente puede responder “no” para saltarlos).</a:t>
+            </a:r>
+            <a:endParaRPr lang="en-US" sz="1400" dirty="0"/>
+          </a:p>
+          <a:p>
+            <a:pPr algn="l" indent="0" marL="0">
+              <a:lnSpc>
+                <a:spcPct val="135000"/>
+              </a:lnSpc>
+              <a:buNone/>
+            </a:pPr>
+            <a:endParaRPr lang="en-US" sz="1400" dirty="0"/>
+          </a:p>
+          <a:p>
+            <a:pPr algn="l" indent="0" marL="0">
+              <a:lnSpc>
+                <a:spcPct val="135000"/>
+              </a:lnSpc>
+              <a:buNone/>
+            </a:pPr>
+            <a:r>
+              <a:rPr lang="en-US" sz="1400" dirty="0">
+                <a:solidFill>
+                  <a:srgbClr val="5C6E70"/>
+                </a:solidFill>
+                <a:latin typeface="Calibri" pitchFamily="34" charset="0"/>
+                <a:ea typeface="Calibri" pitchFamily="34" charset="-122"/>
+                <a:cs typeface="Calibri" pitchFamily="34" charset="-120"/>
+              </a:rPr>
+              <a:t>Cada vez que el paciente entrega un dato, el bot agradece antes de seguir con la siguiente pregunta.</a:t>
             </a:r>
             <a:endParaRPr lang="en-US" sz="1400" dirty="0"/>
           </a:p>
@@ -4278,8 +4926,8 @@
         </p:nvSpPr>
         <p:spPr>
           <a:xfrm>
-            <a:off x="6263640" y="384048"/>
-            <a:ext cx="5349240" cy="6309360"/>
+            <a:off x="6263640" y="365760"/>
+            <a:ext cx="5349240" cy="6355080"/>
           </a:xfrm>
           <a:prstGeom prst="roundRect">
             <a:avLst>
@@ -4305,7 +4953,7 @@
         </p:nvSpPr>
         <p:spPr>
           <a:xfrm>
-            <a:off x="6537960" y="786384"/>
+            <a:off x="6537960" y="694944"/>
             <a:ext cx="4800600" cy="384048"/>
           </a:xfrm>
           <a:prstGeom prst="roundRect">
@@ -4332,7 +4980,7 @@
         </p:nvSpPr>
         <p:spPr>
           <a:xfrm>
-            <a:off x="6684264" y="786384"/>
+            <a:off x="6684264" y="694944"/>
             <a:ext cx="4507992" cy="384048"/>
           </a:xfrm>
           <a:prstGeom prst="rect">
@@ -4360,7 +5008,7 @@
                 <a:ea typeface="Calibri" pitchFamily="34" charset="-122"/>
                 <a:cs typeface="Calibri" pitchFamily="34" charset="-120"/>
               </a:rPr>
-              <a:t>¿En qué zona tienes la lesión?</a:t>
+              <a:t>Gracias por la información. ¿En qué zona tienes la lesión?</a:t>
             </a:r>
             <a:endParaRPr lang="en-US" sz="1150" dirty="0"/>
           </a:p>
@@ -4374,7 +5022,7 @@
         </p:nvSpPr>
         <p:spPr>
           <a:xfrm>
-            <a:off x="6537960" y="612648"/>
+            <a:off x="6537960" y="521208"/>
             <a:ext cx="4800600" cy="155448"/>
           </a:xfrm>
           <a:prstGeom prst="rect">
@@ -4413,7 +5061,7 @@
         </p:nvSpPr>
         <p:spPr>
           <a:xfrm>
-            <a:off x="6537960" y="1453896"/>
+            <a:off x="6537960" y="1298448"/>
             <a:ext cx="4800600" cy="384048"/>
           </a:xfrm>
           <a:prstGeom prst="roundRect">
@@ -4440,7 +5088,7 @@
         </p:nvSpPr>
         <p:spPr>
           <a:xfrm>
-            <a:off x="6684264" y="1453896"/>
+            <a:off x="6684264" y="1298448"/>
             <a:ext cx="4507992" cy="384048"/>
           </a:xfrm>
           <a:prstGeom prst="rect">
@@ -4482,7 +5130,7 @@
         </p:nvSpPr>
         <p:spPr>
           <a:xfrm>
-            <a:off x="6537960" y="1280160"/>
+            <a:off x="6537960" y="1124712"/>
             <a:ext cx="4800600" cy="155448"/>
           </a:xfrm>
           <a:prstGeom prst="rect">
@@ -4521,12 +5169,12 @@
         </p:nvSpPr>
         <p:spPr>
           <a:xfrm>
-            <a:off x="6537960" y="2121408"/>
-            <a:ext cx="4800600" cy="1298448"/>
+            <a:off x="6537960" y="1901952"/>
+            <a:ext cx="4800600" cy="1664208"/>
           </a:xfrm>
           <a:prstGeom prst="roundRect">
             <a:avLst>
-              <a:gd name="adj" fmla="val 7042"/>
+              <a:gd name="adj" fmla="val 5495"/>
             </a:avLst>
           </a:prstGeom>
           <a:solidFill>
@@ -4548,8 +5196,8 @@
         </p:nvSpPr>
         <p:spPr>
           <a:xfrm>
-            <a:off x="6684264" y="2121408"/>
-            <a:ext cx="4507992" cy="1298448"/>
+            <a:off x="6684264" y="1901952"/>
+            <a:ext cx="4507992" cy="1664208"/>
           </a:xfrm>
           <a:prstGeom prst="rect">
             <a:avLst/>
@@ -4576,7 +5224,7 @@
                 <a:ea typeface="Calibri" pitchFamily="34" charset="-122"/>
                 <a:cs typeface="Calibri" pitchFamily="34" charset="-120"/>
               </a:rPr>
-              <a:t>1. Condromalacia rotuliana</a:t>
+              <a:t>Gracias por la información.</a:t>
             </a:r>
             <a:endParaRPr lang="en-US" sz="1150" dirty="0"/>
           </a:p>
@@ -4587,17 +5235,6 @@
               </a:lnSpc>
               <a:buNone/>
             </a:pPr>
-            <a:r>
-              <a:rPr lang="en-US" sz="1150" dirty="0">
-                <a:solidFill>
-                  <a:srgbClr val="FFFFFF"/>
-                </a:solidFill>
-                <a:latin typeface="Calibri" pitchFamily="34" charset="0"/>
-                <a:ea typeface="Calibri" pitchFamily="34" charset="-122"/>
-                <a:cs typeface="Calibri" pitchFamily="34" charset="-120"/>
-              </a:rPr>
-              <a:t>2. Meniscopatía / Esguince de rodilla</a:t>
-            </a:r>
             <a:endParaRPr lang="en-US" sz="1150" dirty="0"/>
           </a:p>
           <a:p>
@@ -4616,7 +5253,7 @@
                 <a:ea typeface="Calibri" pitchFamily="34" charset="-122"/>
                 <a:cs typeface="Calibri" pitchFamily="34" charset="-120"/>
               </a:rPr>
-              <a:t>3. Post-cirugía de rodilla</a:t>
+              <a:t>1. Condromalacia rotuliana</a:t>
             </a:r>
             <a:endParaRPr lang="en-US" sz="1150" dirty="0"/>
           </a:p>
@@ -4636,7 +5273,7 @@
                 <a:ea typeface="Calibri" pitchFamily="34" charset="-122"/>
                 <a:cs typeface="Calibri" pitchFamily="34" charset="-120"/>
               </a:rPr>
-              <a:t>4. Tendinitis pata de ganso</a:t>
+              <a:t>2. Meniscopatía / Esguince de rodilla</a:t>
             </a:r>
             <a:endParaRPr lang="en-US" sz="1150" dirty="0"/>
           </a:p>
@@ -4647,6 +5284,17 @@
               </a:lnSpc>
               <a:buNone/>
             </a:pPr>
+            <a:r>
+              <a:rPr lang="en-US" sz="1150" dirty="0">
+                <a:solidFill>
+                  <a:srgbClr val="FFFFFF"/>
+                </a:solidFill>
+                <a:latin typeface="Calibri" pitchFamily="34" charset="0"/>
+                <a:ea typeface="Calibri" pitchFamily="34" charset="-122"/>
+                <a:cs typeface="Calibri" pitchFamily="34" charset="-120"/>
+              </a:rPr>
+              <a:t>3. Post-cirugía de rodilla</a:t>
+            </a:r>
             <a:endParaRPr lang="en-US" sz="1150" dirty="0"/>
           </a:p>
           <a:p>
@@ -4665,6 +5313,35 @@
                 <a:ea typeface="Calibri" pitchFamily="34" charset="-122"/>
                 <a:cs typeface="Calibri" pitchFamily="34" charset="-120"/>
               </a:rPr>
+              <a:t>4. Tendinitis pata de ganso</a:t>
+            </a:r>
+            <a:endParaRPr lang="en-US" sz="1150" dirty="0"/>
+          </a:p>
+          <a:p>
+            <a:pPr algn="l" indent="0" marL="0">
+              <a:lnSpc>
+                <a:spcPct val="105000"/>
+              </a:lnSpc>
+              <a:buNone/>
+            </a:pPr>
+            <a:endParaRPr lang="en-US" sz="1150" dirty="0"/>
+          </a:p>
+          <a:p>
+            <a:pPr algn="l" indent="0" marL="0">
+              <a:lnSpc>
+                <a:spcPct val="105000"/>
+              </a:lnSpc>
+              <a:buNone/>
+            </a:pPr>
+            <a:r>
+              <a:rPr lang="en-US" sz="1150" dirty="0">
+                <a:solidFill>
+                  <a:srgbClr val="FFFFFF"/>
+                </a:solidFill>
+                <a:latin typeface="Calibri" pitchFamily="34" charset="0"/>
+                <a:ea typeface="Calibri" pitchFamily="34" charset="-122"/>
+                <a:cs typeface="Calibri" pitchFamily="34" charset="-120"/>
+              </a:rPr>
               <a:t>Responde con el número.</a:t>
             </a:r>
             <a:endParaRPr lang="en-US" sz="1150" dirty="0"/>
@@ -4679,7 +5356,7 @@
         </p:nvSpPr>
         <p:spPr>
           <a:xfrm>
-            <a:off x="6537960" y="1947672"/>
+            <a:off x="6537960" y="1728216"/>
             <a:ext cx="4800600" cy="155448"/>
           </a:xfrm>
           <a:prstGeom prst="rect">
@@ -4718,7 +5395,7 @@
         </p:nvSpPr>
         <p:spPr>
           <a:xfrm>
-            <a:off x="6537960" y="3703320"/>
+            <a:off x="6537960" y="3785616"/>
             <a:ext cx="4800600" cy="384048"/>
           </a:xfrm>
           <a:prstGeom prst="roundRect">
@@ -4745,7 +5422,7 @@
         </p:nvSpPr>
         <p:spPr>
           <a:xfrm>
-            <a:off x="6684264" y="3703320"/>
+            <a:off x="6684264" y="3785616"/>
             <a:ext cx="4507992" cy="384048"/>
           </a:xfrm>
           <a:prstGeom prst="rect">
@@ -4787,7 +5464,7 @@
         </p:nvSpPr>
         <p:spPr>
           <a:xfrm>
-            <a:off x="6537960" y="3529584"/>
+            <a:off x="6537960" y="3611880"/>
             <a:ext cx="4800600" cy="155448"/>
           </a:xfrm>
           <a:prstGeom prst="rect">
@@ -4826,7 +5503,7 @@
         </p:nvSpPr>
         <p:spPr>
           <a:xfrm>
-            <a:off x="6537960" y="4370832"/>
+            <a:off x="6537960" y="4389120"/>
             <a:ext cx="4800600" cy="384048"/>
           </a:xfrm>
           <a:prstGeom prst="roundRect">
@@ -4853,7 +5530,7 @@
         </p:nvSpPr>
         <p:spPr>
           <a:xfrm>
-            <a:off x="6684264" y="4370832"/>
+            <a:off x="6684264" y="4389120"/>
             <a:ext cx="4507992" cy="384048"/>
           </a:xfrm>
           <a:prstGeom prst="rect">
@@ -4895,7 +5572,7 @@
         </p:nvSpPr>
         <p:spPr>
           <a:xfrm>
-            <a:off x="6537960" y="4197096"/>
+            <a:off x="6537960" y="4215384"/>
             <a:ext cx="4800600" cy="155448"/>
           </a:xfrm>
           <a:prstGeom prst="rect">
@@ -4934,7 +5611,7 @@
         </p:nvSpPr>
         <p:spPr>
           <a:xfrm>
-            <a:off x="6537960" y="5038344"/>
+            <a:off x="6537960" y="4992624"/>
             <a:ext cx="4800600" cy="384048"/>
           </a:xfrm>
           <a:prstGeom prst="roundRect">
@@ -4961,7 +5638,7 @@
         </p:nvSpPr>
         <p:spPr>
           <a:xfrm>
-            <a:off x="6684264" y="5038344"/>
+            <a:off x="6684264" y="4992624"/>
             <a:ext cx="4507992" cy="384048"/>
           </a:xfrm>
           <a:prstGeom prst="rect">
@@ -5003,7 +5680,7 @@
         </p:nvSpPr>
         <p:spPr>
           <a:xfrm>
-            <a:off x="6537960" y="4864608"/>
+            <a:off x="6537960" y="4818888"/>
             <a:ext cx="4800600" cy="155448"/>
           </a:xfrm>
           <a:prstGeom prst="rect">
@@ -5070,7 +5747,7 @@
                 <a:ea typeface="Calibri" pitchFamily="34" charset="-122"/>
                 <a:cs typeface="Calibri" pitchFamily="34" charset="-120"/>
               </a:rPr>
-              <a:t>Terminado el registro, el bot pregunta en qué zona del cuerpo está la lesión y muestra los diagnósticos de esa zona como un menú numerado.</a:t>
+              <a:t>Terminado el registro, el bot agradece, pregunta en qué zona del cuerpo está la lesión y muestra los diagnósticos de esa zona como un menú numerado.</a:t>
             </a:r>
             <a:endParaRPr lang="en-US" sz="1400" dirty="0"/>
           </a:p>
@@ -5248,7 +5925,7 @@
                 <a:ea typeface="Cambria" pitchFamily="34" charset="-122"/>
                 <a:cs typeface="Cambria" pitchFamily="34" charset="-120"/>
               </a:rPr>
-              <a:t>Ficha creada con ejercicios</a:t>
+              <a:t>Diagnóstico de la orden médica</a:t>
             </a:r>
             <a:endParaRPr lang="en-US" sz="2800" dirty="0"/>
           </a:p>
@@ -5262,8 +5939,8 @@
         </p:nvSpPr>
         <p:spPr>
           <a:xfrm>
-            <a:off x="6263640" y="384048"/>
-            <a:ext cx="5349240" cy="6309360"/>
+            <a:off x="6263640" y="365760"/>
+            <a:ext cx="5349240" cy="6355080"/>
           </a:xfrm>
           <a:prstGeom prst="roundRect">
             <a:avLst>
@@ -5289,12 +5966,12 @@
         </p:nvSpPr>
         <p:spPr>
           <a:xfrm>
-            <a:off x="6537960" y="786384"/>
-            <a:ext cx="4800600" cy="932688"/>
+            <a:off x="6537960" y="694944"/>
+            <a:ext cx="4800600" cy="566928"/>
           </a:xfrm>
           <a:prstGeom prst="roundRect">
             <a:avLst>
-              <a:gd name="adj" fmla="val 9804"/>
+              <a:gd name="adj" fmla="val 16129"/>
             </a:avLst>
           </a:prstGeom>
           <a:solidFill>
@@ -5316,8 +5993,8 @@
         </p:nvSpPr>
         <p:spPr>
           <a:xfrm>
-            <a:off x="6684264" y="786384"/>
-            <a:ext cx="4507992" cy="932688"/>
+            <a:off x="6684264" y="694944"/>
+            <a:ext cx="4507992" cy="566928"/>
           </a:xfrm>
           <a:prstGeom prst="rect">
             <a:avLst/>
@@ -5344,39 +6021,10 @@
                 <a:ea typeface="Calibri" pitchFamily="34" charset="-122"/>
                 <a:cs typeface="Calibri" pitchFamily="34" charset="-120"/>
               </a:rPr>
-              <a:t>Listo, ficha creada por Condromalacia rotuliana (10 sesiones). Incluye 3 ejercicios que te iré enviando para que hagas en casa.</a:t>
+              <a:t>Escríbeme el diagnóstico tal como aparece en tu orden médica, y cuéntame un poco qué te pasó.</a:t>
             </a:r>
             <a:endParaRPr lang="en-US" sz="1150" dirty="0"/>
           </a:p>
-          <a:p>
-            <a:pPr algn="l" indent="0" marL="0">
-              <a:lnSpc>
-                <a:spcPct val="105000"/>
-              </a:lnSpc>
-              <a:buNone/>
-            </a:pPr>
-            <a:endParaRPr lang="en-US" sz="1150" dirty="0"/>
-          </a:p>
-          <a:p>
-            <a:pPr algn="l" indent="0" marL="0">
-              <a:lnSpc>
-                <a:spcPct val="105000"/>
-              </a:lnSpc>
-              <a:buNone/>
-            </a:pPr>
-            <a:r>
-              <a:rPr lang="en-US" sz="1150" dirty="0">
-                <a:solidFill>
-                  <a:srgbClr val="FFFFFF"/>
-                </a:solidFill>
-                <a:latin typeface="Calibri" pitchFamily="34" charset="0"/>
-                <a:ea typeface="Calibri" pitchFamily="34" charset="-122"/>
-                <a:cs typeface="Calibri" pitchFamily="34" charset="-120"/>
-              </a:rPr>
-              <a:t>¿Por fonasa? Así te paso los precios.</a:t>
-            </a:r>
-            <a:endParaRPr lang="en-US" sz="1150" dirty="0"/>
-          </a:p>
         </p:txBody>
       </p:sp>
       <p:sp>
@@ -5387,7 +6035,7 @@
         </p:nvSpPr>
         <p:spPr>
           <a:xfrm>
-            <a:off x="6537960" y="612648"/>
+            <a:off x="6537960" y="521208"/>
             <a:ext cx="4800600" cy="155448"/>
           </a:xfrm>
           <a:prstGeom prst="rect">
@@ -5426,7 +6074,7 @@
         </p:nvSpPr>
         <p:spPr>
           <a:xfrm>
-            <a:off x="6537960" y="2002536"/>
+            <a:off x="6537960" y="1481328"/>
             <a:ext cx="4800600" cy="384048"/>
           </a:xfrm>
           <a:prstGeom prst="roundRect">
@@ -5453,7 +6101,7 @@
         </p:nvSpPr>
         <p:spPr>
           <a:xfrm>
-            <a:off x="6684264" y="2002536"/>
+            <a:off x="6684264" y="1481328"/>
             <a:ext cx="4507992" cy="384048"/>
           </a:xfrm>
           <a:prstGeom prst="rect">
@@ -5481,7 +6129,7 @@
                 <a:ea typeface="Calibri" pitchFamily="34" charset="-122"/>
                 <a:cs typeface="Calibri" pitchFamily="34" charset="-120"/>
               </a:rPr>
-              <a:t>Sí</a:t>
+              <a:t>Tendinitis De Quervain. Me caí hace una semana y apoyé la mano.</a:t>
             </a:r>
             <a:endParaRPr lang="en-US" sz="1150" dirty="0"/>
           </a:p>
@@ -5495,7 +6143,7 @@
         </p:nvSpPr>
         <p:spPr>
           <a:xfrm>
-            <a:off x="6537960" y="1828800"/>
+            <a:off x="6537960" y="1307592"/>
             <a:ext cx="4800600" cy="155448"/>
           </a:xfrm>
           <a:prstGeom prst="rect">
@@ -5528,283 +6176,7 @@
       </p:sp>
       <p:sp>
         <p:nvSpPr>
-          <p:cNvPr id="11" name="Shape 9"/>
-          <p:cNvSpPr/>
-          <p:nvPr/>
-        </p:nvSpPr>
-        <p:spPr>
-          <a:xfrm>
-            <a:off x="6537960" y="2670048"/>
-            <a:ext cx="4800600" cy="384048"/>
-          </a:xfrm>
-          <a:prstGeom prst="roundRect">
-            <a:avLst>
-              <a:gd name="adj" fmla="val 23810"/>
-            </a:avLst>
-          </a:prstGeom>
-          <a:solidFill>
-            <a:srgbClr val="F1F5F4"/>
-          </a:solidFill>
-          <a:ln w="9525">
-            <a:solidFill>
-              <a:srgbClr val="D7E1E0"/>
-            </a:solidFill>
-            <a:prstDash val="solid"/>
-          </a:ln>
-        </p:spPr>
-      </p:sp>
-      <p:sp>
-        <p:nvSpPr>
-          <p:cNvPr id="12" name="Text 10"/>
-          <p:cNvSpPr txBox="1"/>
-          <p:nvPr/>
-        </p:nvSpPr>
-        <p:spPr>
-          <a:xfrm>
-            <a:off x="6684264" y="2670048"/>
-            <a:ext cx="4507992" cy="384048"/>
-          </a:xfrm>
-          <a:prstGeom prst="rect">
-            <a:avLst/>
-          </a:prstGeom>
-          <a:noFill/>
-          <a:ln/>
-        </p:spPr>
-        <p:txBody>
-          <a:bodyPr wrap="square" lIns="0" tIns="0" rIns="0" bIns="0" rtlCol="0" anchor="ctr"/>
-          <a:lstStyle/>
-          <a:p>
-            <a:pPr algn="l" indent="0" marL="0">
-              <a:lnSpc>
-                <a:spcPct val="105000"/>
-              </a:lnSpc>
-              <a:buNone/>
-            </a:pPr>
-            <a:r>
-              <a:rPr lang="en-US" sz="1150" dirty="0">
-                <a:solidFill>
-                  <a:srgbClr val="1B2A2F"/>
-                </a:solidFill>
-                <a:latin typeface="Calibri" pitchFamily="34" charset="0"/>
-                <a:ea typeface="Calibri" pitchFamily="34" charset="-122"/>
-                <a:cs typeface="Calibri" pitchFamily="34" charset="-120"/>
-              </a:rPr>
-              <a:t>¿Qué ejercicios me tocan?</a:t>
-            </a:r>
-            <a:endParaRPr lang="en-US" sz="1150" dirty="0"/>
-          </a:p>
-        </p:txBody>
-      </p:sp>
-      <p:sp>
-        <p:nvSpPr>
-          <p:cNvPr id="13" name="Text 11"/>
-          <p:cNvSpPr txBox="1"/>
-          <p:nvPr/>
-        </p:nvSpPr>
-        <p:spPr>
-          <a:xfrm>
-            <a:off x="6537960" y="2496312"/>
-            <a:ext cx="4800600" cy="155448"/>
-          </a:xfrm>
-          <a:prstGeom prst="rect">
-            <a:avLst/>
-          </a:prstGeom>
-          <a:noFill/>
-          <a:ln/>
-        </p:spPr>
-        <p:txBody>
-          <a:bodyPr wrap="square" lIns="0" tIns="0" rIns="0" bIns="0" rtlCol="0" anchor="ctr"/>
-          <a:lstStyle/>
-          <a:p>
-            <a:pPr algn="r" indent="0" marL="0">
-              <a:buNone/>
-            </a:pPr>
-            <a:r>
-              <a:rPr lang="en-US" sz="850" dirty="0">
-                <a:solidFill>
-                  <a:srgbClr val="5C6E70"/>
-                </a:solidFill>
-                <a:latin typeface="Calibri" pitchFamily="34" charset="0"/>
-                <a:ea typeface="Calibri" pitchFamily="34" charset="-122"/>
-                <a:cs typeface="Calibri" pitchFamily="34" charset="-120"/>
-              </a:rPr>
-              <a:t>Paciente</a:t>
-            </a:r>
-            <a:endParaRPr lang="en-US" sz="850" dirty="0"/>
-          </a:p>
-        </p:txBody>
-      </p:sp>
-      <p:sp>
-        <p:nvSpPr>
-          <p:cNvPr id="14" name="Shape 12"/>
-          <p:cNvSpPr/>
-          <p:nvPr/>
-        </p:nvSpPr>
-        <p:spPr>
-          <a:xfrm>
-            <a:off x="6537960" y="3337560"/>
-            <a:ext cx="4800600" cy="932688"/>
-          </a:xfrm>
-          <a:prstGeom prst="roundRect">
-            <a:avLst>
-              <a:gd name="adj" fmla="val 9804"/>
-            </a:avLst>
-          </a:prstGeom>
-          <a:solidFill>
-            <a:srgbClr val="028090"/>
-          </a:solidFill>
-          <a:ln w="12700">
-            <a:solidFill>
-              <a:srgbClr val="028090"/>
-            </a:solidFill>
-            <a:prstDash val="solid"/>
-          </a:ln>
-        </p:spPr>
-      </p:sp>
-      <p:sp>
-        <p:nvSpPr>
-          <p:cNvPr id="15" name="Text 13"/>
-          <p:cNvSpPr txBox="1"/>
-          <p:nvPr/>
-        </p:nvSpPr>
-        <p:spPr>
-          <a:xfrm>
-            <a:off x="6684264" y="3337560"/>
-            <a:ext cx="4507992" cy="932688"/>
-          </a:xfrm>
-          <a:prstGeom prst="rect">
-            <a:avLst/>
-          </a:prstGeom>
-          <a:noFill/>
-          <a:ln/>
-        </p:spPr>
-        <p:txBody>
-          <a:bodyPr wrap="square" lIns="0" tIns="0" rIns="0" bIns="0" rtlCol="0" anchor="ctr"/>
-          <a:lstStyle/>
-          <a:p>
-            <a:pPr algn="l" indent="0" marL="0">
-              <a:lnSpc>
-                <a:spcPct val="105000"/>
-              </a:lnSpc>
-              <a:buNone/>
-            </a:pPr>
-            <a:r>
-              <a:rPr lang="en-US" sz="1150" dirty="0">
-                <a:solidFill>
-                  <a:srgbClr val="FFFFFF"/>
-                </a:solidFill>
-                <a:latin typeface="Calibri" pitchFamily="34" charset="0"/>
-                <a:ea typeface="Calibri" pitchFamily="34" charset="-122"/>
-                <a:cs typeface="Calibri" pitchFamily="34" charset="-120"/>
-              </a:rPr>
-              <a:t>1. Extensión de rodilla en silla (quad set)</a:t>
-            </a:r>
-            <a:endParaRPr lang="en-US" sz="1150" dirty="0"/>
-          </a:p>
-          <a:p>
-            <a:pPr algn="l" indent="0" marL="0">
-              <a:lnSpc>
-                <a:spcPct val="105000"/>
-              </a:lnSpc>
-              <a:buNone/>
-            </a:pPr>
-            <a:r>
-              <a:rPr lang="en-US" sz="1150" dirty="0">
-                <a:solidFill>
-                  <a:srgbClr val="FFFFFF"/>
-                </a:solidFill>
-                <a:latin typeface="Calibri" pitchFamily="34" charset="0"/>
-                <a:ea typeface="Calibri" pitchFamily="34" charset="-122"/>
-                <a:cs typeface="Calibri" pitchFamily="34" charset="-120"/>
-              </a:rPr>
-              <a:t>2. Step up (subida al escalón)</a:t>
-            </a:r>
-            <a:endParaRPr lang="en-US" sz="1150" dirty="0"/>
-          </a:p>
-          <a:p>
-            <a:pPr algn="l" indent="0" marL="0">
-              <a:lnSpc>
-                <a:spcPct val="105000"/>
-              </a:lnSpc>
-              <a:buNone/>
-            </a:pPr>
-            <a:r>
-              <a:rPr lang="en-US" sz="1150" dirty="0">
-                <a:solidFill>
-                  <a:srgbClr val="FFFFFF"/>
-                </a:solidFill>
-                <a:latin typeface="Calibri" pitchFamily="34" charset="0"/>
-                <a:ea typeface="Calibri" pitchFamily="34" charset="-122"/>
-                <a:cs typeface="Calibri" pitchFamily="34" charset="-120"/>
-              </a:rPr>
-              <a:t>3. Isquiotibiales con banda en prono</a:t>
-            </a:r>
-            <a:endParaRPr lang="en-US" sz="1150" dirty="0"/>
-          </a:p>
-          <a:p>
-            <a:pPr algn="l" indent="0" marL="0">
-              <a:lnSpc>
-                <a:spcPct val="105000"/>
-              </a:lnSpc>
-              <a:buNone/>
-            </a:pPr>
-            <a:r>
-              <a:rPr lang="en-US" sz="1150" dirty="0">
-                <a:solidFill>
-                  <a:srgbClr val="FFFFFF"/>
-                </a:solidFill>
-                <a:latin typeface="Calibri" pitchFamily="34" charset="0"/>
-                <a:ea typeface="Calibri" pitchFamily="34" charset="-122"/>
-                <a:cs typeface="Calibri" pitchFamily="34" charset="-120"/>
-              </a:rPr>
-              <a:t>[link de video en cada uno]</a:t>
-            </a:r>
-            <a:endParaRPr lang="en-US" sz="1150" dirty="0"/>
-          </a:p>
-        </p:txBody>
-      </p:sp>
-      <p:sp>
-        <p:nvSpPr>
-          <p:cNvPr id="16" name="Text 14"/>
-          <p:cNvSpPr txBox="1"/>
-          <p:nvPr/>
-        </p:nvSpPr>
-        <p:spPr>
-          <a:xfrm>
-            <a:off x="6537960" y="3163824"/>
-            <a:ext cx="4800600" cy="155448"/>
-          </a:xfrm>
-          <a:prstGeom prst="rect">
-            <a:avLst/>
-          </a:prstGeom>
-          <a:noFill/>
-          <a:ln/>
-        </p:spPr>
-        <p:txBody>
-          <a:bodyPr wrap="square" lIns="0" tIns="0" rIns="0" bIns="0" rtlCol="0" anchor="ctr"/>
-          <a:lstStyle/>
-          <a:p>
-            <a:pPr algn="l" indent="0" marL="0">
-              <a:buNone/>
-            </a:pPr>
-            <a:r>
-              <a:rPr lang="en-US" sz="850" dirty="0">
-                <a:solidFill>
-                  <a:srgbClr val="5C6E70"/>
-                </a:solidFill>
-                <a:latin typeface="Calibri" pitchFamily="34" charset="0"/>
-                <a:ea typeface="Calibri" pitchFamily="34" charset="-122"/>
-                <a:cs typeface="Calibri" pitchFamily="34" charset="-120"/>
-              </a:rPr>
-              <a:t>Bot</a:t>
-            </a:r>
-            <a:endParaRPr lang="en-US" sz="850" dirty="0"/>
-          </a:p>
-        </p:txBody>
-      </p:sp>
-      <p:sp>
-        <p:nvSpPr>
-          <p:cNvPr id="17" name="Text 15"/>
+          <p:cNvPr id="11" name="Text 9"/>
           <p:cNvSpPr txBox="1"/>
           <p:nvPr/>
         </p:nvSpPr>
@@ -5838,7 +6210,7 @@
                 <a:ea typeface="Calibri" pitchFamily="34" charset="-122"/>
                 <a:cs typeface="Calibri" pitchFamily="34" charset="-120"/>
               </a:rPr>
-              <a:t>Al confirmar el diagnóstico, el bot revisa que no haya una ficha activa duplicada, crea la ficha y menciona cuántos ejercicios trae asociados.</a:t>
+              <a:t>Antes de crear la ficha, el bot le pide al paciente que escriba el diagnóstico tal como aparece en su orden médica y que cuente brevemente qué le pasó.</a:t>
             </a:r>
             <a:endParaRPr lang="en-US" sz="1400" dirty="0"/>
           </a:p>
@@ -5867,7 +6239,7 @@
                 <a:ea typeface="Calibri" pitchFamily="34" charset="-122"/>
                 <a:cs typeface="Calibri" pitchFamily="34" charset="-120"/>
               </a:rPr>
-              <a:t>Más adelante el paciente puede pedir su rutina en cualquier momento y el bot responde con el video de cada ejercicio.</a:t>
+              <a:t>Ese relato queda guardado como observación de la ficha, disponible para Felipe.</a:t>
             </a:r>
             <a:endParaRPr lang="en-US" sz="1400" dirty="0"/>
           </a:p>
@@ -5875,7 +6247,7 @@
       </p:sp>
       <p:sp>
         <p:nvSpPr>
-          <p:cNvPr id="18" name="Text 16"/>
+          <p:cNvPr id="12" name="Text 10"/>
           <p:cNvSpPr txBox="1"/>
           <p:nvPr/>
         </p:nvSpPr>
@@ -5906,7 +6278,7 @@
                 <a:ea typeface="Calibri" pitchFamily="34" charset="-122"/>
                 <a:cs typeface="Calibri" pitchFamily="34" charset="-120"/>
               </a:rPr>
-              <a:t>Fuente: activities-service, catálogo diagnóstico ↔ ejercicios</a:t>
+              <a:t>Se guarda como fic_observacion en la ficha</a:t>
             </a:r>
             <a:endParaRPr lang="en-US" sz="1050" dirty="0"/>
           </a:p>
@@ -5971,13 +6343,13 @@
             <a:r>
               <a:rPr lang="en-US" sz="1200" b="1" spc="100" kern="0" dirty="0">
                 <a:solidFill>
-                  <a:srgbClr val="028090"/>
-                </a:solidFill>
-                <a:latin typeface="Calibri" pitchFamily="34" charset="0"/>
-                <a:ea typeface="Calibri" pitchFamily="34" charset="-122"/>
-                <a:cs typeface="Calibri" pitchFamily="34" charset="-120"/>
-              </a:rPr>
-              <a:t>AGENDA</a:t>
+                  <a:srgbClr val="00A896"/>
+                </a:solidFill>
+                <a:latin typeface="Calibri" pitchFamily="34" charset="0"/>
+                <a:ea typeface="Calibri" pitchFamily="34" charset="-122"/>
+                <a:cs typeface="Calibri" pitchFamily="34" charset="-120"/>
+              </a:rPr>
+              <a:t>REGISTRO Y FICHA</a:t>
             </a:r>
             <a:endParaRPr lang="en-US" sz="1200" dirty="0"/>
           </a:p>
@@ -5992,7 +6364,7 @@
         <p:spPr>
           <a:xfrm>
             <a:off x="548640" y="640080"/>
-            <a:ext cx="10058400" cy="548640"/>
+            <a:ext cx="6949440" cy="548640"/>
           </a:xfrm>
           <a:prstGeom prst="rect">
             <a:avLst/>
@@ -6016,7 +6388,7 @@
                 <a:ea typeface="Cambria" pitchFamily="34" charset="-122"/>
                 <a:cs typeface="Cambria" pitchFamily="34" charset="-120"/>
               </a:rPr>
-              <a:t>Agendar, reagendar y cancelar</a:t>
+              <a:t>Ficha creada con ejercicios</a:t>
             </a:r>
             <a:endParaRPr lang="en-US" sz="2800" dirty="0"/>
           </a:p>
@@ -6030,12 +6402,39 @@
         </p:nvSpPr>
         <p:spPr>
           <a:xfrm>
-            <a:off x="548640" y="1371600"/>
-            <a:ext cx="3429000" cy="384048"/>
+            <a:off x="6263640" y="365760"/>
+            <a:ext cx="5349240" cy="6355080"/>
           </a:xfrm>
           <a:prstGeom prst="roundRect">
             <a:avLst>
-              <a:gd name="adj" fmla="val 19048"/>
+              <a:gd name="adj" fmla="val 2393"/>
+            </a:avLst>
+          </a:prstGeom>
+          <a:solidFill>
+            <a:srgbClr val="F1F7F6"/>
+          </a:solidFill>
+          <a:ln w="12700">
+            <a:solidFill>
+              <a:srgbClr val="F1F7F6"/>
+            </a:solidFill>
+            <a:prstDash val="solid"/>
+          </a:ln>
+        </p:spPr>
+      </p:sp>
+      <p:sp>
+        <p:nvSpPr>
+          <p:cNvPr id="5" name="Shape 3"/>
+          <p:cNvSpPr/>
+          <p:nvPr/>
+        </p:nvSpPr>
+        <p:spPr>
+          <a:xfrm>
+            <a:off x="6537960" y="694944"/>
+            <a:ext cx="4800600" cy="1664208"/>
+          </a:xfrm>
+          <a:prstGeom prst="roundRect">
+            <a:avLst>
+              <a:gd name="adj" fmla="val 5495"/>
             </a:avLst>
           </a:prstGeom>
           <a:solidFill>
@@ -6051,30 +6450,33 @@
       </p:sp>
       <p:sp>
         <p:nvSpPr>
-          <p:cNvPr id="5" name="Text 3"/>
-          <p:cNvSpPr txBox="1"/>
-          <p:nvPr/>
-        </p:nvSpPr>
-        <p:spPr>
-          <a:xfrm>
-            <a:off x="548640" y="1371600"/>
-            <a:ext cx="3429000" cy="384048"/>
-          </a:xfrm>
-          <a:prstGeom prst="rect">
-            <a:avLst/>
-          </a:prstGeom>
-          <a:noFill/>
-          <a:ln/>
-        </p:spPr>
-        <p:txBody>
-          <a:bodyPr wrap="square" lIns="0" tIns="0" rIns="0" bIns="0" rtlCol="0" anchor="ctr"/>
-          <a:lstStyle/>
-          <a:p>
-            <a:pPr algn="ctr" indent="0" marL="0">
-              <a:buNone/>
-            </a:pPr>
-            <a:r>
-              <a:rPr lang="en-US" sz="1300" b="1" dirty="0">
+          <p:cNvPr id="6" name="Text 4"/>
+          <p:cNvSpPr txBox="1"/>
+          <p:nvPr/>
+        </p:nvSpPr>
+        <p:spPr>
+          <a:xfrm>
+            <a:off x="6684264" y="694944"/>
+            <a:ext cx="4507992" cy="1664208"/>
+          </a:xfrm>
+          <a:prstGeom prst="rect">
+            <a:avLst/>
+          </a:prstGeom>
+          <a:noFill/>
+          <a:ln/>
+        </p:spPr>
+        <p:txBody>
+          <a:bodyPr wrap="square" lIns="0" tIns="0" rIns="0" bIns="0" rtlCol="0" anchor="ctr"/>
+          <a:lstStyle/>
+          <a:p>
+            <a:pPr algn="l" indent="0" marL="0">
+              <a:lnSpc>
+                <a:spcPct val="105000"/>
+              </a:lnSpc>
+              <a:buNone/>
+            </a:pPr>
+            <a:r>
+              <a:rPr lang="en-US" sz="1150" dirty="0">
                 <a:solidFill>
                   <a:srgbClr val="FFFFFF"/>
                 </a:solidFill>
@@ -6082,49 +6484,148 @@
                 <a:ea typeface="Calibri" pitchFamily="34" charset="-122"/>
                 <a:cs typeface="Calibri" pitchFamily="34" charset="-120"/>
               </a:rPr>
-              <a:t>Agendar hora</a:t>
-            </a:r>
-            <a:endParaRPr lang="en-US" sz="1300" dirty="0"/>
-          </a:p>
-        </p:txBody>
-      </p:sp>
-      <p:sp>
-        <p:nvSpPr>
-          <p:cNvPr id="6" name="Shape 4"/>
+              <a:t>Gracias por la información.</a:t>
+            </a:r>
+            <a:endParaRPr lang="en-US" sz="1150" dirty="0"/>
+          </a:p>
+          <a:p>
+            <a:pPr algn="l" indent="0" marL="0">
+              <a:lnSpc>
+                <a:spcPct val="105000"/>
+              </a:lnSpc>
+              <a:buNone/>
+            </a:pPr>
+            <a:endParaRPr lang="en-US" sz="1150" dirty="0"/>
+          </a:p>
+          <a:p>
+            <a:pPr algn="l" indent="0" marL="0">
+              <a:lnSpc>
+                <a:spcPct val="105000"/>
+              </a:lnSpc>
+              <a:buNone/>
+            </a:pPr>
+            <a:r>
+              <a:rPr lang="en-US" sz="1150" dirty="0">
+                <a:solidFill>
+                  <a:srgbClr val="FFFFFF"/>
+                </a:solidFill>
+                <a:latin typeface="Calibri" pitchFamily="34" charset="0"/>
+                <a:ea typeface="Calibri" pitchFamily="34" charset="-122"/>
+                <a:cs typeface="Calibri" pitchFamily="34" charset="-120"/>
+              </a:rPr>
+              <a:t>Cuando agendes tu primera sesión, no olvides traer tu orden médica.</a:t>
+            </a:r>
+            <a:endParaRPr lang="en-US" sz="1150" dirty="0"/>
+          </a:p>
+          <a:p>
+            <a:pPr algn="l" indent="0" marL="0">
+              <a:lnSpc>
+                <a:spcPct val="105000"/>
+              </a:lnSpc>
+              <a:buNone/>
+            </a:pPr>
+            <a:endParaRPr lang="en-US" sz="1150" dirty="0"/>
+          </a:p>
+          <a:p>
+            <a:pPr algn="l" indent="0" marL="0">
+              <a:lnSpc>
+                <a:spcPct val="105000"/>
+              </a:lnSpc>
+              <a:buNone/>
+            </a:pPr>
+            <a:r>
+              <a:rPr lang="en-US" sz="1150" dirty="0">
+                <a:solidFill>
+                  <a:srgbClr val="FFFFFF"/>
+                </a:solidFill>
+                <a:latin typeface="Calibri" pitchFamily="34" charset="0"/>
+                <a:ea typeface="Calibri" pitchFamily="34" charset="-122"/>
+                <a:cs typeface="Calibri" pitchFamily="34" charset="-120"/>
+              </a:rPr>
+              <a:t>Listo, ficha creada por Condromalacia rotuliana (10 sesiones). Incluye 3 ejercicios que te iré enviando para que hagas en casa.</a:t>
+            </a:r>
+            <a:endParaRPr lang="en-US" sz="1150" dirty="0"/>
+          </a:p>
+          <a:p>
+            <a:pPr algn="l" indent="0" marL="0">
+              <a:lnSpc>
+                <a:spcPct val="105000"/>
+              </a:lnSpc>
+              <a:buNone/>
+            </a:pPr>
+            <a:endParaRPr lang="en-US" sz="1150" dirty="0"/>
+          </a:p>
+          <a:p>
+            <a:pPr algn="l" indent="0" marL="0">
+              <a:lnSpc>
+                <a:spcPct val="105000"/>
+              </a:lnSpc>
+              <a:buNone/>
+            </a:pPr>
+            <a:r>
+              <a:rPr lang="en-US" sz="1150" dirty="0">
+                <a:solidFill>
+                  <a:srgbClr val="FFFFFF"/>
+                </a:solidFill>
+                <a:latin typeface="Calibri" pitchFamily="34" charset="0"/>
+                <a:ea typeface="Calibri" pitchFamily="34" charset="-122"/>
+                <a:cs typeface="Calibri" pitchFamily="34" charset="-120"/>
+              </a:rPr>
+              <a:t>¿Por fonasa? Así te paso los precios.</a:t>
+            </a:r>
+            <a:endParaRPr lang="en-US" sz="1150" dirty="0"/>
+          </a:p>
+        </p:txBody>
+      </p:sp>
+      <p:sp>
+        <p:nvSpPr>
+          <p:cNvPr id="7" name="Text 5"/>
+          <p:cNvSpPr txBox="1"/>
+          <p:nvPr/>
+        </p:nvSpPr>
+        <p:spPr>
+          <a:xfrm>
+            <a:off x="6537960" y="521208"/>
+            <a:ext cx="4800600" cy="155448"/>
+          </a:xfrm>
+          <a:prstGeom prst="rect">
+            <a:avLst/>
+          </a:prstGeom>
+          <a:noFill/>
+          <a:ln/>
+        </p:spPr>
+        <p:txBody>
+          <a:bodyPr wrap="square" lIns="0" tIns="0" rIns="0" bIns="0" rtlCol="0" anchor="ctr"/>
+          <a:lstStyle/>
+          <a:p>
+            <a:pPr algn="l" indent="0" marL="0">
+              <a:buNone/>
+            </a:pPr>
+            <a:r>
+              <a:rPr lang="en-US" sz="850" dirty="0">
+                <a:solidFill>
+                  <a:srgbClr val="5C6E70"/>
+                </a:solidFill>
+                <a:latin typeface="Calibri" pitchFamily="34" charset="0"/>
+                <a:ea typeface="Calibri" pitchFamily="34" charset="-122"/>
+                <a:cs typeface="Calibri" pitchFamily="34" charset="-120"/>
+              </a:rPr>
+              <a:t>Bot</a:t>
+            </a:r>
+            <a:endParaRPr lang="en-US" sz="850" dirty="0"/>
+          </a:p>
+        </p:txBody>
+      </p:sp>
+      <p:sp>
+        <p:nvSpPr>
+          <p:cNvPr id="8" name="Shape 6"/>
           <p:cNvSpPr/>
           <p:nvPr/>
         </p:nvSpPr>
         <p:spPr>
           <a:xfrm>
-            <a:off x="548640" y="1828800"/>
-            <a:ext cx="3429000" cy="4709160"/>
-          </a:xfrm>
-          <a:prstGeom prst="roundRect">
-            <a:avLst>
-              <a:gd name="adj" fmla="val 3733"/>
-            </a:avLst>
-          </a:prstGeom>
-          <a:solidFill>
-            <a:srgbClr val="F1F7F6"/>
-          </a:solidFill>
-          <a:ln w="12700">
-            <a:solidFill>
-              <a:srgbClr val="F1F7F6"/>
-            </a:solidFill>
-            <a:prstDash val="solid"/>
-          </a:ln>
-        </p:spPr>
-      </p:sp>
-      <p:sp>
-        <p:nvSpPr>
-          <p:cNvPr id="7" name="Shape 5"/>
-          <p:cNvSpPr/>
-          <p:nvPr/>
-        </p:nvSpPr>
-        <p:spPr>
-          <a:xfrm>
-            <a:off x="777240" y="2157984"/>
-            <a:ext cx="2971800" cy="384048"/>
+            <a:off x="6537960" y="2578608"/>
+            <a:ext cx="4800600" cy="384048"/>
           </a:xfrm>
           <a:prstGeom prst="roundRect">
             <a:avLst>
@@ -6144,14 +6645,14 @@
       </p:sp>
       <p:sp>
         <p:nvSpPr>
-          <p:cNvPr id="8" name="Text 6"/>
-          <p:cNvSpPr txBox="1"/>
-          <p:nvPr/>
-        </p:nvSpPr>
-        <p:spPr>
-          <a:xfrm>
-            <a:off x="923544" y="2157984"/>
-            <a:ext cx="2679192" cy="384048"/>
+          <p:cNvPr id="9" name="Text 7"/>
+          <p:cNvSpPr txBox="1"/>
+          <p:nvPr/>
+        </p:nvSpPr>
+        <p:spPr>
+          <a:xfrm>
+            <a:off x="6684264" y="2578608"/>
+            <a:ext cx="4507992" cy="384048"/>
           </a:xfrm>
           <a:prstGeom prst="rect">
             <a:avLst/>
@@ -6170,7 +6671,7 @@
               <a:buNone/>
             </a:pPr>
             <a:r>
-              <a:rPr lang="en-US" sz="1000" dirty="0">
+              <a:rPr lang="en-US" sz="1150" dirty="0">
                 <a:solidFill>
                   <a:srgbClr val="1B2A2F"/>
                 </a:solidFill>
@@ -6178,22 +6679,22 @@
                 <a:ea typeface="Calibri" pitchFamily="34" charset="-122"/>
                 <a:cs typeface="Calibri" pitchFamily="34" charset="-120"/>
               </a:rPr>
-              <a:t>Quiero agendar una hora</a:t>
-            </a:r>
-            <a:endParaRPr lang="en-US" sz="1000" dirty="0"/>
-          </a:p>
-        </p:txBody>
-      </p:sp>
-      <p:sp>
-        <p:nvSpPr>
-          <p:cNvPr id="9" name="Text 7"/>
-          <p:cNvSpPr txBox="1"/>
-          <p:nvPr/>
-        </p:nvSpPr>
-        <p:spPr>
-          <a:xfrm>
-            <a:off x="777240" y="1984248"/>
-            <a:ext cx="2971800" cy="155448"/>
+              <a:t>Sí</a:t>
+            </a:r>
+            <a:endParaRPr lang="en-US" sz="1150" dirty="0"/>
+          </a:p>
+        </p:txBody>
+      </p:sp>
+      <p:sp>
+        <p:nvSpPr>
+          <p:cNvPr id="10" name="Text 8"/>
+          <p:cNvSpPr txBox="1"/>
+          <p:nvPr/>
+        </p:nvSpPr>
+        <p:spPr>
+          <a:xfrm>
+            <a:off x="6537960" y="2404872"/>
+            <a:ext cx="4800600" cy="155448"/>
           </a:xfrm>
           <a:prstGeom prst="rect">
             <a:avLst/>
@@ -6225,18 +6726,126 @@
       </p:sp>
       <p:sp>
         <p:nvSpPr>
-          <p:cNvPr id="10" name="Shape 8"/>
+          <p:cNvPr id="11" name="Shape 9"/>
           <p:cNvSpPr/>
           <p:nvPr/>
         </p:nvSpPr>
         <p:spPr>
           <a:xfrm>
-            <a:off x="777240" y="2788920"/>
-            <a:ext cx="2971800" cy="384048"/>
+            <a:off x="6537960" y="3182112"/>
+            <a:ext cx="4800600" cy="384048"/>
           </a:xfrm>
           <a:prstGeom prst="roundRect">
             <a:avLst>
               <a:gd name="adj" fmla="val 23810"/>
+            </a:avLst>
+          </a:prstGeom>
+          <a:solidFill>
+            <a:srgbClr val="F1F5F4"/>
+          </a:solidFill>
+          <a:ln w="9525">
+            <a:solidFill>
+              <a:srgbClr val="D7E1E0"/>
+            </a:solidFill>
+            <a:prstDash val="solid"/>
+          </a:ln>
+        </p:spPr>
+      </p:sp>
+      <p:sp>
+        <p:nvSpPr>
+          <p:cNvPr id="12" name="Text 10"/>
+          <p:cNvSpPr txBox="1"/>
+          <p:nvPr/>
+        </p:nvSpPr>
+        <p:spPr>
+          <a:xfrm>
+            <a:off x="6684264" y="3182112"/>
+            <a:ext cx="4507992" cy="384048"/>
+          </a:xfrm>
+          <a:prstGeom prst="rect">
+            <a:avLst/>
+          </a:prstGeom>
+          <a:noFill/>
+          <a:ln/>
+        </p:spPr>
+        <p:txBody>
+          <a:bodyPr wrap="square" lIns="0" tIns="0" rIns="0" bIns="0" rtlCol="0" anchor="ctr"/>
+          <a:lstStyle/>
+          <a:p>
+            <a:pPr algn="l" indent="0" marL="0">
+              <a:lnSpc>
+                <a:spcPct val="105000"/>
+              </a:lnSpc>
+              <a:buNone/>
+            </a:pPr>
+            <a:r>
+              <a:rPr lang="en-US" sz="1150" dirty="0">
+                <a:solidFill>
+                  <a:srgbClr val="1B2A2F"/>
+                </a:solidFill>
+                <a:latin typeface="Calibri" pitchFamily="34" charset="0"/>
+                <a:ea typeface="Calibri" pitchFamily="34" charset="-122"/>
+                <a:cs typeface="Calibri" pitchFamily="34" charset="-120"/>
+              </a:rPr>
+              <a:t>¿Qué ejercicios me tocan?</a:t>
+            </a:r>
+            <a:endParaRPr lang="en-US" sz="1150" dirty="0"/>
+          </a:p>
+        </p:txBody>
+      </p:sp>
+      <p:sp>
+        <p:nvSpPr>
+          <p:cNvPr id="13" name="Text 11"/>
+          <p:cNvSpPr txBox="1"/>
+          <p:nvPr/>
+        </p:nvSpPr>
+        <p:spPr>
+          <a:xfrm>
+            <a:off x="6537960" y="3008376"/>
+            <a:ext cx="4800600" cy="155448"/>
+          </a:xfrm>
+          <a:prstGeom prst="rect">
+            <a:avLst/>
+          </a:prstGeom>
+          <a:noFill/>
+          <a:ln/>
+        </p:spPr>
+        <p:txBody>
+          <a:bodyPr wrap="square" lIns="0" tIns="0" rIns="0" bIns="0" rtlCol="0" anchor="ctr"/>
+          <a:lstStyle/>
+          <a:p>
+            <a:pPr algn="r" indent="0" marL="0">
+              <a:buNone/>
+            </a:pPr>
+            <a:r>
+              <a:rPr lang="en-US" sz="850" dirty="0">
+                <a:solidFill>
+                  <a:srgbClr val="5C6E70"/>
+                </a:solidFill>
+                <a:latin typeface="Calibri" pitchFamily="34" charset="0"/>
+                <a:ea typeface="Calibri" pitchFamily="34" charset="-122"/>
+                <a:cs typeface="Calibri" pitchFamily="34" charset="-120"/>
+              </a:rPr>
+              <a:t>Paciente</a:t>
+            </a:r>
+            <a:endParaRPr lang="en-US" sz="850" dirty="0"/>
+          </a:p>
+        </p:txBody>
+      </p:sp>
+      <p:sp>
+        <p:nvSpPr>
+          <p:cNvPr id="14" name="Shape 12"/>
+          <p:cNvSpPr/>
+          <p:nvPr/>
+        </p:nvSpPr>
+        <p:spPr>
+          <a:xfrm>
+            <a:off x="6537960" y="3785616"/>
+            <a:ext cx="4800600" cy="932688"/>
+          </a:xfrm>
+          <a:prstGeom prst="roundRect">
+            <a:avLst>
+              <a:gd name="adj" fmla="val 9804"/>
             </a:avLst>
           </a:prstGeom>
           <a:solidFill>
@@ -6252,14 +6861,14 @@
       </p:sp>
       <p:sp>
         <p:nvSpPr>
-          <p:cNvPr id="11" name="Text 9"/>
-          <p:cNvSpPr txBox="1"/>
-          <p:nvPr/>
-        </p:nvSpPr>
-        <p:spPr>
-          <a:xfrm>
-            <a:off x="923544" y="2788920"/>
-            <a:ext cx="2679192" cy="384048"/>
+          <p:cNvPr id="15" name="Text 13"/>
+          <p:cNvSpPr txBox="1"/>
+          <p:nvPr/>
+        </p:nvSpPr>
+        <p:spPr>
+          <a:xfrm>
+            <a:off x="6684264" y="3785616"/>
+            <a:ext cx="4507992" cy="932688"/>
           </a:xfrm>
           <a:prstGeom prst="rect">
             <a:avLst/>
@@ -6278,7 +6887,7 @@
               <a:buNone/>
             </a:pPr>
             <a:r>
-              <a:rPr lang="en-US" sz="1000" dirty="0">
+              <a:rPr lang="en-US" sz="1150" dirty="0">
                 <a:solidFill>
                   <a:srgbClr val="FFFFFF"/>
                 </a:solidFill>
@@ -6286,98 +6895,10 @@
                 <a:ea typeface="Calibri" pitchFamily="34" charset="-122"/>
                 <a:cs typeface="Calibri" pitchFamily="34" charset="-120"/>
               </a:rPr>
-              <a:t>¿Qué día y hora te acomoda?</a:t>
-            </a:r>
-            <a:endParaRPr lang="en-US" sz="1000" dirty="0"/>
-          </a:p>
-        </p:txBody>
-      </p:sp>
-      <p:sp>
-        <p:nvSpPr>
-          <p:cNvPr id="12" name="Text 10"/>
-          <p:cNvSpPr txBox="1"/>
-          <p:nvPr/>
-        </p:nvSpPr>
-        <p:spPr>
-          <a:xfrm>
-            <a:off x="777240" y="2615184"/>
-            <a:ext cx="2971800" cy="155448"/>
-          </a:xfrm>
-          <a:prstGeom prst="rect">
-            <a:avLst/>
-          </a:prstGeom>
-          <a:noFill/>
-          <a:ln/>
-        </p:spPr>
-        <p:txBody>
-          <a:bodyPr wrap="square" lIns="0" tIns="0" rIns="0" bIns="0" rtlCol="0" anchor="ctr"/>
-          <a:lstStyle/>
-          <a:p>
-            <a:pPr algn="l" indent="0" marL="0">
-              <a:buNone/>
-            </a:pPr>
-            <a:r>
-              <a:rPr lang="en-US" sz="850" dirty="0">
-                <a:solidFill>
-                  <a:srgbClr val="5C6E70"/>
-                </a:solidFill>
-                <a:latin typeface="Calibri" pitchFamily="34" charset="0"/>
-                <a:ea typeface="Calibri" pitchFamily="34" charset="-122"/>
-                <a:cs typeface="Calibri" pitchFamily="34" charset="-120"/>
-              </a:rPr>
-              <a:t>Bot</a:t>
-            </a:r>
-            <a:endParaRPr lang="en-US" sz="850" dirty="0"/>
-          </a:p>
-        </p:txBody>
-      </p:sp>
-      <p:sp>
-        <p:nvSpPr>
-          <p:cNvPr id="13" name="Shape 11"/>
-          <p:cNvSpPr/>
-          <p:nvPr/>
-        </p:nvSpPr>
-        <p:spPr>
-          <a:xfrm>
-            <a:off x="777240" y="3419856"/>
-            <a:ext cx="2971800" cy="384048"/>
-          </a:xfrm>
-          <a:prstGeom prst="roundRect">
-            <a:avLst>
-              <a:gd name="adj" fmla="val 23810"/>
-            </a:avLst>
-          </a:prstGeom>
-          <a:solidFill>
-            <a:srgbClr val="F1F5F4"/>
-          </a:solidFill>
-          <a:ln w="9525">
-            <a:solidFill>
-              <a:srgbClr val="D7E1E0"/>
-            </a:solidFill>
-            <a:prstDash val="solid"/>
-          </a:ln>
-        </p:spPr>
-      </p:sp>
-      <p:sp>
-        <p:nvSpPr>
-          <p:cNvPr id="14" name="Text 12"/>
-          <p:cNvSpPr txBox="1"/>
-          <p:nvPr/>
-        </p:nvSpPr>
-        <p:spPr>
-          <a:xfrm>
-            <a:off x="923544" y="3419856"/>
-            <a:ext cx="2679192" cy="384048"/>
-          </a:xfrm>
-          <a:prstGeom prst="rect">
-            <a:avLst/>
-          </a:prstGeom>
-          <a:noFill/>
-          <a:ln/>
-        </p:spPr>
-        <p:txBody>
-          <a:bodyPr wrap="square" lIns="0" tIns="0" rIns="0" bIns="0" rtlCol="0" anchor="ctr"/>
-          <a:lstStyle/>
+              <a:t>1. Extensión de rodilla en silla (quad set)</a:t>
+            </a:r>
+            <a:endParaRPr lang="en-US" sz="1150" dirty="0"/>
+          </a:p>
           <a:p>
             <a:pPr algn="l" indent="0" marL="0">
               <a:lnSpc>
@@ -6386,106 +6907,18 @@
               <a:buNone/>
             </a:pPr>
             <a:r>
-              <a:rPr lang="en-US" sz="1000" dirty="0">
-                <a:solidFill>
-                  <a:srgbClr val="1B2A2F"/>
-                </a:solidFill>
-                <a:latin typeface="Calibri" pitchFamily="34" charset="0"/>
-                <a:ea typeface="Calibri" pitchFamily="34" charset="-122"/>
-                <a:cs typeface="Calibri" pitchFamily="34" charset="-120"/>
-              </a:rPr>
-              <a:t>Lunes a las 10am</a:t>
-            </a:r>
-            <a:endParaRPr lang="en-US" sz="1000" dirty="0"/>
-          </a:p>
-        </p:txBody>
-      </p:sp>
-      <p:sp>
-        <p:nvSpPr>
-          <p:cNvPr id="15" name="Text 13"/>
-          <p:cNvSpPr txBox="1"/>
-          <p:nvPr/>
-        </p:nvSpPr>
-        <p:spPr>
-          <a:xfrm>
-            <a:off x="777240" y="3246120"/>
-            <a:ext cx="2971800" cy="155448"/>
-          </a:xfrm>
-          <a:prstGeom prst="rect">
-            <a:avLst/>
-          </a:prstGeom>
-          <a:noFill/>
-          <a:ln/>
-        </p:spPr>
-        <p:txBody>
-          <a:bodyPr wrap="square" lIns="0" tIns="0" rIns="0" bIns="0" rtlCol="0" anchor="ctr"/>
-          <a:lstStyle/>
-          <a:p>
-            <a:pPr algn="r" indent="0" marL="0">
-              <a:buNone/>
-            </a:pPr>
-            <a:r>
-              <a:rPr lang="en-US" sz="850" dirty="0">
-                <a:solidFill>
-                  <a:srgbClr val="5C6E70"/>
-                </a:solidFill>
-                <a:latin typeface="Calibri" pitchFamily="34" charset="0"/>
-                <a:ea typeface="Calibri" pitchFamily="34" charset="-122"/>
-                <a:cs typeface="Calibri" pitchFamily="34" charset="-120"/>
-              </a:rPr>
-              <a:t>Paciente</a:t>
-            </a:r>
-            <a:endParaRPr lang="en-US" sz="850" dirty="0"/>
-          </a:p>
-        </p:txBody>
-      </p:sp>
-      <p:sp>
-        <p:nvSpPr>
-          <p:cNvPr id="16" name="Shape 14"/>
-          <p:cNvSpPr/>
-          <p:nvPr/>
-        </p:nvSpPr>
-        <p:spPr>
-          <a:xfrm>
-            <a:off x="777240" y="4050792"/>
-            <a:ext cx="2971800" cy="384048"/>
-          </a:xfrm>
-          <a:prstGeom prst="roundRect">
-            <a:avLst>
-              <a:gd name="adj" fmla="val 23810"/>
-            </a:avLst>
-          </a:prstGeom>
-          <a:solidFill>
-            <a:srgbClr val="028090"/>
-          </a:solidFill>
-          <a:ln w="12700">
-            <a:solidFill>
-              <a:srgbClr val="028090"/>
-            </a:solidFill>
-            <a:prstDash val="solid"/>
-          </a:ln>
-        </p:spPr>
-      </p:sp>
-      <p:sp>
-        <p:nvSpPr>
-          <p:cNvPr id="17" name="Text 15"/>
-          <p:cNvSpPr txBox="1"/>
-          <p:nvPr/>
-        </p:nvSpPr>
-        <p:spPr>
-          <a:xfrm>
-            <a:off x="923544" y="4050792"/>
-            <a:ext cx="2679192" cy="384048"/>
-          </a:xfrm>
-          <a:prstGeom prst="rect">
-            <a:avLst/>
-          </a:prstGeom>
-          <a:noFill/>
-          <a:ln/>
-        </p:spPr>
-        <p:txBody>
-          <a:bodyPr wrap="square" lIns="0" tIns="0" rIns="0" bIns="0" rtlCol="0" anchor="ctr"/>
-          <a:lstStyle/>
+              <a:rPr lang="en-US" sz="1150" dirty="0">
+                <a:solidFill>
+                  <a:srgbClr val="FFFFFF"/>
+                </a:solidFill>
+                <a:latin typeface="Calibri" pitchFamily="34" charset="0"/>
+                <a:ea typeface="Calibri" pitchFamily="34" charset="-122"/>
+                <a:cs typeface="Calibri" pitchFamily="34" charset="-120"/>
+              </a:rPr>
+              <a:t>2. Step up (subida al escalón)</a:t>
+            </a:r>
+            <a:endParaRPr lang="en-US" sz="1150" dirty="0"/>
+          </a:p>
           <a:p>
             <a:pPr algn="l" indent="0" marL="0">
               <a:lnSpc>
@@ -6494,7 +6927,7 @@
               <a:buNone/>
             </a:pPr>
             <a:r>
-              <a:rPr lang="en-US" sz="1000" dirty="0">
+              <a:rPr lang="en-US" sz="1150" dirty="0">
                 <a:solidFill>
                   <a:srgbClr val="FFFFFF"/>
                 </a:solidFill>
@@ -6502,98 +6935,10 @@
                 <a:ea typeface="Calibri" pitchFamily="34" charset="-122"/>
                 <a:cs typeface="Calibri" pitchFamily="34" charset="-120"/>
               </a:rPr>
-              <a:t>Confirmo: lunes 10:00. ¿Está bien?</a:t>
-            </a:r>
-            <a:endParaRPr lang="en-US" sz="1000" dirty="0"/>
-          </a:p>
-        </p:txBody>
-      </p:sp>
-      <p:sp>
-        <p:nvSpPr>
-          <p:cNvPr id="18" name="Text 16"/>
-          <p:cNvSpPr txBox="1"/>
-          <p:nvPr/>
-        </p:nvSpPr>
-        <p:spPr>
-          <a:xfrm>
-            <a:off x="777240" y="3877056"/>
-            <a:ext cx="2971800" cy="155448"/>
-          </a:xfrm>
-          <a:prstGeom prst="rect">
-            <a:avLst/>
-          </a:prstGeom>
-          <a:noFill/>
-          <a:ln/>
-        </p:spPr>
-        <p:txBody>
-          <a:bodyPr wrap="square" lIns="0" tIns="0" rIns="0" bIns="0" rtlCol="0" anchor="ctr"/>
-          <a:lstStyle/>
-          <a:p>
-            <a:pPr algn="l" indent="0" marL="0">
-              <a:buNone/>
-            </a:pPr>
-            <a:r>
-              <a:rPr lang="en-US" sz="850" dirty="0">
-                <a:solidFill>
-                  <a:srgbClr val="5C6E70"/>
-                </a:solidFill>
-                <a:latin typeface="Calibri" pitchFamily="34" charset="0"/>
-                <a:ea typeface="Calibri" pitchFamily="34" charset="-122"/>
-                <a:cs typeface="Calibri" pitchFamily="34" charset="-120"/>
-              </a:rPr>
-              <a:t>Bot</a:t>
-            </a:r>
-            <a:endParaRPr lang="en-US" sz="850" dirty="0"/>
-          </a:p>
-        </p:txBody>
-      </p:sp>
-      <p:sp>
-        <p:nvSpPr>
-          <p:cNvPr id="19" name="Shape 17"/>
-          <p:cNvSpPr/>
-          <p:nvPr/>
-        </p:nvSpPr>
-        <p:spPr>
-          <a:xfrm>
-            <a:off x="777240" y="4681728"/>
-            <a:ext cx="2971800" cy="384048"/>
-          </a:xfrm>
-          <a:prstGeom prst="roundRect">
-            <a:avLst>
-              <a:gd name="adj" fmla="val 23810"/>
-            </a:avLst>
-          </a:prstGeom>
-          <a:solidFill>
-            <a:srgbClr val="F1F5F4"/>
-          </a:solidFill>
-          <a:ln w="9525">
-            <a:solidFill>
-              <a:srgbClr val="D7E1E0"/>
-            </a:solidFill>
-            <a:prstDash val="solid"/>
-          </a:ln>
-        </p:spPr>
-      </p:sp>
-      <p:sp>
-        <p:nvSpPr>
-          <p:cNvPr id="20" name="Text 18"/>
-          <p:cNvSpPr txBox="1"/>
-          <p:nvPr/>
-        </p:nvSpPr>
-        <p:spPr>
-          <a:xfrm>
-            <a:off x="923544" y="4681728"/>
-            <a:ext cx="2679192" cy="384048"/>
-          </a:xfrm>
-          <a:prstGeom prst="rect">
-            <a:avLst/>
-          </a:prstGeom>
-          <a:noFill/>
-          <a:ln/>
-        </p:spPr>
-        <p:txBody>
-          <a:bodyPr wrap="square" lIns="0" tIns="0" rIns="0" bIns="0" rtlCol="0" anchor="ctr"/>
-          <a:lstStyle/>
+              <a:t>3. Isquiotibiales con banda en prono</a:t>
+            </a:r>
+            <a:endParaRPr lang="en-US" sz="1150" dirty="0"/>
+          </a:p>
           <a:p>
             <a:pPr algn="l" indent="0" marL="0">
               <a:lnSpc>
@@ -6602,42 +6947,42 @@
               <a:buNone/>
             </a:pPr>
             <a:r>
-              <a:rPr lang="en-US" sz="1000" dirty="0">
-                <a:solidFill>
-                  <a:srgbClr val="1B2A2F"/>
-                </a:solidFill>
-                <a:latin typeface="Calibri" pitchFamily="34" charset="0"/>
-                <a:ea typeface="Calibri" pitchFamily="34" charset="-122"/>
-                <a:cs typeface="Calibri" pitchFamily="34" charset="-120"/>
-              </a:rPr>
-              <a:t>Sí</a:t>
-            </a:r>
-            <a:endParaRPr lang="en-US" sz="1000" dirty="0"/>
-          </a:p>
-        </p:txBody>
-      </p:sp>
-      <p:sp>
-        <p:nvSpPr>
-          <p:cNvPr id="21" name="Text 19"/>
-          <p:cNvSpPr txBox="1"/>
-          <p:nvPr/>
-        </p:nvSpPr>
-        <p:spPr>
-          <a:xfrm>
-            <a:off x="777240" y="4507992"/>
-            <a:ext cx="2971800" cy="155448"/>
-          </a:xfrm>
-          <a:prstGeom prst="rect">
-            <a:avLst/>
-          </a:prstGeom>
-          <a:noFill/>
-          <a:ln/>
-        </p:spPr>
-        <p:txBody>
-          <a:bodyPr wrap="square" lIns="0" tIns="0" rIns="0" bIns="0" rtlCol="0" anchor="ctr"/>
-          <a:lstStyle/>
-          <a:p>
-            <a:pPr algn="r" indent="0" marL="0">
+              <a:rPr lang="en-US" sz="1150" dirty="0">
+                <a:solidFill>
+                  <a:srgbClr val="FFFFFF"/>
+                </a:solidFill>
+                <a:latin typeface="Calibri" pitchFamily="34" charset="0"/>
+                <a:ea typeface="Calibri" pitchFamily="34" charset="-122"/>
+                <a:cs typeface="Calibri" pitchFamily="34" charset="-120"/>
+              </a:rPr>
+              <a:t>[link de video en cada uno]</a:t>
+            </a:r>
+            <a:endParaRPr lang="en-US" sz="1150" dirty="0"/>
+          </a:p>
+        </p:txBody>
+      </p:sp>
+      <p:sp>
+        <p:nvSpPr>
+          <p:cNvPr id="16" name="Text 14"/>
+          <p:cNvSpPr txBox="1"/>
+          <p:nvPr/>
+        </p:nvSpPr>
+        <p:spPr>
+          <a:xfrm>
+            <a:off x="6537960" y="3611880"/>
+            <a:ext cx="4800600" cy="155448"/>
+          </a:xfrm>
+          <a:prstGeom prst="rect">
+            <a:avLst/>
+          </a:prstGeom>
+          <a:noFill/>
+          <a:ln/>
+        </p:spPr>
+        <p:txBody>
+          <a:bodyPr wrap="square" lIns="0" tIns="0" rIns="0" bIns="0" rtlCol="0" anchor="ctr"/>
+          <a:lstStyle/>
+          <a:p>
+            <a:pPr algn="l" indent="0" marL="0">
               <a:buNone/>
             </a:pPr>
             <a:r>
@@ -6649,7 +6994,7 @@
                 <a:ea typeface="Calibri" pitchFamily="34" charset="-122"/>
                 <a:cs typeface="Calibri" pitchFamily="34" charset="-120"/>
               </a:rPr>
-              <a:t>Paciente</a:t>
+              <a:t>Bot</a:t>
             </a:r>
             <a:endParaRPr lang="en-US" sz="850" dirty="0"/>
           </a:p>
@@ -6657,99 +7002,33 @@
       </p:sp>
       <p:sp>
         <p:nvSpPr>
-          <p:cNvPr id="22" name="Shape 20"/>
-          <p:cNvSpPr/>
-          <p:nvPr/>
-        </p:nvSpPr>
-        <p:spPr>
-          <a:xfrm>
-            <a:off x="777240" y="5312664"/>
-            <a:ext cx="2971800" cy="384048"/>
-          </a:xfrm>
-          <a:prstGeom prst="roundRect">
-            <a:avLst>
-              <a:gd name="adj" fmla="val 23810"/>
-            </a:avLst>
-          </a:prstGeom>
-          <a:solidFill>
-            <a:srgbClr val="028090"/>
-          </a:solidFill>
-          <a:ln w="12700">
-            <a:solidFill>
-              <a:srgbClr val="028090"/>
-            </a:solidFill>
-            <a:prstDash val="solid"/>
-          </a:ln>
-        </p:spPr>
-      </p:sp>
-      <p:sp>
-        <p:nvSpPr>
-          <p:cNvPr id="23" name="Text 21"/>
-          <p:cNvSpPr txBox="1"/>
-          <p:nvPr/>
-        </p:nvSpPr>
-        <p:spPr>
-          <a:xfrm>
-            <a:off x="923544" y="5312664"/>
-            <a:ext cx="2679192" cy="384048"/>
-          </a:xfrm>
-          <a:prstGeom prst="rect">
-            <a:avLst/>
-          </a:prstGeom>
-          <a:noFill/>
-          <a:ln/>
-        </p:spPr>
-        <p:txBody>
-          <a:bodyPr wrap="square" lIns="0" tIns="0" rIns="0" bIns="0" rtlCol="0" anchor="ctr"/>
+          <p:cNvPr id="17" name="Text 15"/>
+          <p:cNvSpPr txBox="1"/>
+          <p:nvPr/>
+        </p:nvSpPr>
+        <p:spPr>
+          <a:xfrm>
+            <a:off x="548640" y="1417320"/>
+            <a:ext cx="5394960" cy="4206240"/>
+          </a:xfrm>
+          <a:prstGeom prst="rect">
+            <a:avLst/>
+          </a:prstGeom>
+          <a:noFill/>
+          <a:ln/>
+        </p:spPr>
+        <p:txBody>
+          <a:bodyPr wrap="square" lIns="0" tIns="0" rIns="0" bIns="0" rtlCol="0" anchor="t"/>
           <a:lstStyle/>
           <a:p>
             <a:pPr algn="l" indent="0" marL="0">
               <a:lnSpc>
-                <a:spcPct val="105000"/>
+                <a:spcPct val="135000"/>
               </a:lnSpc>
               <a:buNone/>
             </a:pPr>
             <a:r>
-              <a:rPr lang="en-US" sz="1000" dirty="0">
-                <a:solidFill>
-                  <a:srgbClr val="FFFFFF"/>
-                </a:solidFill>
-                <a:latin typeface="Calibri" pitchFamily="34" charset="0"/>
-                <a:ea typeface="Calibri" pitchFamily="34" charset="-122"/>
-                <a:cs typeface="Calibri" pitchFamily="34" charset="-120"/>
-              </a:rPr>
-              <a:t>Listo, quedas agendado/a.</a:t>
-            </a:r>
-            <a:endParaRPr lang="en-US" sz="1000" dirty="0"/>
-          </a:p>
-        </p:txBody>
-      </p:sp>
-      <p:sp>
-        <p:nvSpPr>
-          <p:cNvPr id="24" name="Text 22"/>
-          <p:cNvSpPr txBox="1"/>
-          <p:nvPr/>
-        </p:nvSpPr>
-        <p:spPr>
-          <a:xfrm>
-            <a:off x="777240" y="5138928"/>
-            <a:ext cx="2971800" cy="155448"/>
-          </a:xfrm>
-          <a:prstGeom prst="rect">
-            <a:avLst/>
-          </a:prstGeom>
-          <a:noFill/>
-          <a:ln/>
-        </p:spPr>
-        <p:txBody>
-          <a:bodyPr wrap="square" lIns="0" tIns="0" rIns="0" bIns="0" rtlCol="0" anchor="ctr"/>
-          <a:lstStyle/>
-          <a:p>
-            <a:pPr algn="l" indent="0" marL="0">
-              <a:buNone/>
-            </a:pPr>
-            <a:r>
-              <a:rPr lang="en-US" sz="850" dirty="0">
+              <a:rPr lang="en-US" sz="1400" dirty="0">
                 <a:solidFill>
                   <a:srgbClr val="5C6E70"/>
                 </a:solidFill>
@@ -6757,308 +7036,28 @@
                 <a:ea typeface="Calibri" pitchFamily="34" charset="-122"/>
                 <a:cs typeface="Calibri" pitchFamily="34" charset="-120"/>
               </a:rPr>
-              <a:t>Bot</a:t>
-            </a:r>
-            <a:endParaRPr lang="en-US" sz="850" dirty="0"/>
-          </a:p>
-        </p:txBody>
-      </p:sp>
-      <p:sp>
-        <p:nvSpPr>
-          <p:cNvPr id="25" name="Shape 23"/>
-          <p:cNvSpPr/>
-          <p:nvPr/>
-        </p:nvSpPr>
-        <p:spPr>
-          <a:xfrm>
-            <a:off x="4434840" y="1371600"/>
-            <a:ext cx="3429000" cy="384048"/>
-          </a:xfrm>
-          <a:prstGeom prst="roundRect">
-            <a:avLst>
-              <a:gd name="adj" fmla="val 19048"/>
-            </a:avLst>
-          </a:prstGeom>
-          <a:solidFill>
-            <a:srgbClr val="028090"/>
-          </a:solidFill>
-          <a:ln w="12700">
-            <a:solidFill>
-              <a:srgbClr val="028090"/>
-            </a:solidFill>
-            <a:prstDash val="solid"/>
-          </a:ln>
-        </p:spPr>
-      </p:sp>
-      <p:sp>
-        <p:nvSpPr>
-          <p:cNvPr id="26" name="Text 24"/>
-          <p:cNvSpPr txBox="1"/>
-          <p:nvPr/>
-        </p:nvSpPr>
-        <p:spPr>
-          <a:xfrm>
-            <a:off x="4434840" y="1371600"/>
-            <a:ext cx="3429000" cy="384048"/>
-          </a:xfrm>
-          <a:prstGeom prst="rect">
-            <a:avLst/>
-          </a:prstGeom>
-          <a:noFill/>
-          <a:ln/>
-        </p:spPr>
-        <p:txBody>
-          <a:bodyPr wrap="square" lIns="0" tIns="0" rIns="0" bIns="0" rtlCol="0" anchor="ctr"/>
-          <a:lstStyle/>
-          <a:p>
-            <a:pPr algn="ctr" indent="0" marL="0">
-              <a:buNone/>
-            </a:pPr>
-            <a:r>
-              <a:rPr lang="en-US" sz="1300" b="1" dirty="0">
-                <a:solidFill>
-                  <a:srgbClr val="FFFFFF"/>
-                </a:solidFill>
-                <a:latin typeface="Calibri" pitchFamily="34" charset="0"/>
-                <a:ea typeface="Calibri" pitchFamily="34" charset="-122"/>
-                <a:cs typeface="Calibri" pitchFamily="34" charset="-120"/>
-              </a:rPr>
-              <a:t>Reagendar</a:t>
-            </a:r>
-            <a:endParaRPr lang="en-US" sz="1300" dirty="0"/>
-          </a:p>
-        </p:txBody>
-      </p:sp>
-      <p:sp>
-        <p:nvSpPr>
-          <p:cNvPr id="27" name="Shape 25"/>
-          <p:cNvSpPr/>
-          <p:nvPr/>
-        </p:nvSpPr>
-        <p:spPr>
-          <a:xfrm>
-            <a:off x="4434840" y="1828800"/>
-            <a:ext cx="3429000" cy="4709160"/>
-          </a:xfrm>
-          <a:prstGeom prst="roundRect">
-            <a:avLst>
-              <a:gd name="adj" fmla="val 3733"/>
-            </a:avLst>
-          </a:prstGeom>
-          <a:solidFill>
-            <a:srgbClr val="F1F7F6"/>
-          </a:solidFill>
-          <a:ln w="12700">
-            <a:solidFill>
-              <a:srgbClr val="F1F7F6"/>
-            </a:solidFill>
-            <a:prstDash val="solid"/>
-          </a:ln>
-        </p:spPr>
-      </p:sp>
-      <p:sp>
-        <p:nvSpPr>
-          <p:cNvPr id="28" name="Shape 26"/>
-          <p:cNvSpPr/>
-          <p:nvPr/>
-        </p:nvSpPr>
-        <p:spPr>
-          <a:xfrm>
-            <a:off x="4663440" y="2157984"/>
-            <a:ext cx="2971800" cy="384048"/>
-          </a:xfrm>
-          <a:prstGeom prst="roundRect">
-            <a:avLst>
-              <a:gd name="adj" fmla="val 23810"/>
-            </a:avLst>
-          </a:prstGeom>
-          <a:solidFill>
-            <a:srgbClr val="F1F5F4"/>
-          </a:solidFill>
-          <a:ln w="9525">
-            <a:solidFill>
-              <a:srgbClr val="D7E1E0"/>
-            </a:solidFill>
-            <a:prstDash val="solid"/>
-          </a:ln>
-        </p:spPr>
-      </p:sp>
-      <p:sp>
-        <p:nvSpPr>
-          <p:cNvPr id="29" name="Text 27"/>
-          <p:cNvSpPr txBox="1"/>
-          <p:nvPr/>
-        </p:nvSpPr>
-        <p:spPr>
-          <a:xfrm>
-            <a:off x="4809744" y="2157984"/>
-            <a:ext cx="2679192" cy="384048"/>
-          </a:xfrm>
-          <a:prstGeom prst="rect">
-            <a:avLst/>
-          </a:prstGeom>
-          <a:noFill/>
-          <a:ln/>
-        </p:spPr>
-        <p:txBody>
-          <a:bodyPr wrap="square" lIns="0" tIns="0" rIns="0" bIns="0" rtlCol="0" anchor="ctr"/>
-          <a:lstStyle/>
+              <a:t>Con el relato ya recibido, el bot revisa que no haya una ficha activa duplicada, crea la ficha, recuerda traer la orden médica a la primera sesión y menciona cuántos ejercicios trae asociados.</a:t>
+            </a:r>
+            <a:endParaRPr lang="en-US" sz="1400" dirty="0"/>
+          </a:p>
           <a:p>
             <a:pPr algn="l" indent="0" marL="0">
               <a:lnSpc>
-                <a:spcPct val="105000"/>
+                <a:spcPct val="135000"/>
               </a:lnSpc>
               <a:buNone/>
             </a:pPr>
-            <a:r>
-              <a:rPr lang="en-US" sz="1000" dirty="0">
-                <a:solidFill>
-                  <a:srgbClr val="1B2A2F"/>
-                </a:solidFill>
-                <a:latin typeface="Calibri" pitchFamily="34" charset="0"/>
-                <a:ea typeface="Calibri" pitchFamily="34" charset="-122"/>
-                <a:cs typeface="Calibri" pitchFamily="34" charset="-120"/>
-              </a:rPr>
-              <a:t>Necesito cambiar mi hora</a:t>
-            </a:r>
-            <a:endParaRPr lang="en-US" sz="1000" dirty="0"/>
-          </a:p>
-        </p:txBody>
-      </p:sp>
-      <p:sp>
-        <p:nvSpPr>
-          <p:cNvPr id="30" name="Text 28"/>
-          <p:cNvSpPr txBox="1"/>
-          <p:nvPr/>
-        </p:nvSpPr>
-        <p:spPr>
-          <a:xfrm>
-            <a:off x="4663440" y="1984248"/>
-            <a:ext cx="2971800" cy="155448"/>
-          </a:xfrm>
-          <a:prstGeom prst="rect">
-            <a:avLst/>
-          </a:prstGeom>
-          <a:noFill/>
-          <a:ln/>
-        </p:spPr>
-        <p:txBody>
-          <a:bodyPr wrap="square" lIns="0" tIns="0" rIns="0" bIns="0" rtlCol="0" anchor="ctr"/>
-          <a:lstStyle/>
-          <a:p>
-            <a:pPr algn="r" indent="0" marL="0">
-              <a:buNone/>
-            </a:pPr>
-            <a:r>
-              <a:rPr lang="en-US" sz="850" dirty="0">
-                <a:solidFill>
-                  <a:srgbClr val="5C6E70"/>
-                </a:solidFill>
-                <a:latin typeface="Calibri" pitchFamily="34" charset="0"/>
-                <a:ea typeface="Calibri" pitchFamily="34" charset="-122"/>
-                <a:cs typeface="Calibri" pitchFamily="34" charset="-120"/>
-              </a:rPr>
-              <a:t>Paciente</a:t>
-            </a:r>
-            <a:endParaRPr lang="en-US" sz="850" dirty="0"/>
-          </a:p>
-        </p:txBody>
-      </p:sp>
-      <p:sp>
-        <p:nvSpPr>
-          <p:cNvPr id="31" name="Shape 29"/>
-          <p:cNvSpPr/>
-          <p:nvPr/>
-        </p:nvSpPr>
-        <p:spPr>
-          <a:xfrm>
-            <a:off x="4663440" y="2788920"/>
-            <a:ext cx="2971800" cy="566928"/>
-          </a:xfrm>
-          <a:prstGeom prst="roundRect">
-            <a:avLst>
-              <a:gd name="adj" fmla="val 16129"/>
-            </a:avLst>
-          </a:prstGeom>
-          <a:solidFill>
-            <a:srgbClr val="028090"/>
-          </a:solidFill>
-          <a:ln w="12700">
-            <a:solidFill>
-              <a:srgbClr val="028090"/>
-            </a:solidFill>
-            <a:prstDash val="solid"/>
-          </a:ln>
-        </p:spPr>
-      </p:sp>
-      <p:sp>
-        <p:nvSpPr>
-          <p:cNvPr id="32" name="Text 30"/>
-          <p:cNvSpPr txBox="1"/>
-          <p:nvPr/>
-        </p:nvSpPr>
-        <p:spPr>
-          <a:xfrm>
-            <a:off x="4809744" y="2788920"/>
-            <a:ext cx="2679192" cy="566928"/>
-          </a:xfrm>
-          <a:prstGeom prst="rect">
-            <a:avLst/>
-          </a:prstGeom>
-          <a:noFill/>
-          <a:ln/>
-        </p:spPr>
-        <p:txBody>
-          <a:bodyPr wrap="square" lIns="0" tIns="0" rIns="0" bIns="0" rtlCol="0" anchor="ctr"/>
-          <a:lstStyle/>
+            <a:endParaRPr lang="en-US" sz="1400" dirty="0"/>
+          </a:p>
           <a:p>
             <a:pPr algn="l" indent="0" marL="0">
               <a:lnSpc>
-                <a:spcPct val="105000"/>
+                <a:spcPct val="135000"/>
               </a:lnSpc>
               <a:buNone/>
             </a:pPr>
             <a:r>
-              <a:rPr lang="en-US" sz="1000" dirty="0">
-                <a:solidFill>
-                  <a:srgbClr val="FFFFFF"/>
-                </a:solidFill>
-                <a:latin typeface="Calibri" pitchFamily="34" charset="0"/>
-                <a:ea typeface="Calibri" pitchFamily="34" charset="-122"/>
-                <a:cs typeface="Calibri" pitchFamily="34" charset="-120"/>
-              </a:rPr>
-              <a:t>Tienes cita el jueves 15:00. ¿Para cuándo la cambio?</a:t>
-            </a:r>
-            <a:endParaRPr lang="en-US" sz="1000" dirty="0"/>
-          </a:p>
-        </p:txBody>
-      </p:sp>
-      <p:sp>
-        <p:nvSpPr>
-          <p:cNvPr id="33" name="Text 31"/>
-          <p:cNvSpPr txBox="1"/>
-          <p:nvPr/>
-        </p:nvSpPr>
-        <p:spPr>
-          <a:xfrm>
-            <a:off x="4663440" y="2615184"/>
-            <a:ext cx="2971800" cy="155448"/>
-          </a:xfrm>
-          <a:prstGeom prst="rect">
-            <a:avLst/>
-          </a:prstGeom>
-          <a:noFill/>
-          <a:ln/>
-        </p:spPr>
-        <p:txBody>
-          <a:bodyPr wrap="square" lIns="0" tIns="0" rIns="0" bIns="0" rtlCol="0" anchor="ctr"/>
-          <a:lstStyle/>
-          <a:p>
-            <a:pPr algn="l" indent="0" marL="0">
-              <a:buNone/>
-            </a:pPr>
-            <a:r>
-              <a:rPr lang="en-US" sz="850" dirty="0">
+              <a:rPr lang="en-US" sz="1400" dirty="0">
                 <a:solidFill>
                   <a:srgbClr val="5C6E70"/>
                 </a:solidFill>
@@ -7066,107 +7065,38 @@
                 <a:ea typeface="Calibri" pitchFamily="34" charset="-122"/>
                 <a:cs typeface="Calibri" pitchFamily="34" charset="-120"/>
               </a:rPr>
-              <a:t>Bot</a:t>
-            </a:r>
-            <a:endParaRPr lang="en-US" sz="850" dirty="0"/>
-          </a:p>
-        </p:txBody>
-      </p:sp>
-      <p:sp>
-        <p:nvSpPr>
-          <p:cNvPr id="34" name="Shape 32"/>
-          <p:cNvSpPr/>
-          <p:nvPr/>
-        </p:nvSpPr>
-        <p:spPr>
-          <a:xfrm>
-            <a:off x="4663440" y="3602736"/>
-            <a:ext cx="2971800" cy="384048"/>
-          </a:xfrm>
-          <a:prstGeom prst="roundRect">
-            <a:avLst>
-              <a:gd name="adj" fmla="val 23810"/>
-            </a:avLst>
-          </a:prstGeom>
-          <a:solidFill>
-            <a:srgbClr val="F1F5F4"/>
-          </a:solidFill>
-          <a:ln w="9525">
-            <a:solidFill>
-              <a:srgbClr val="D7E1E0"/>
-            </a:solidFill>
-            <a:prstDash val="solid"/>
-          </a:ln>
-        </p:spPr>
-      </p:sp>
-      <p:sp>
-        <p:nvSpPr>
-          <p:cNvPr id="35" name="Text 33"/>
-          <p:cNvSpPr txBox="1"/>
-          <p:nvPr/>
-        </p:nvSpPr>
-        <p:spPr>
-          <a:xfrm>
-            <a:off x="4809744" y="3602736"/>
-            <a:ext cx="2679192" cy="384048"/>
-          </a:xfrm>
-          <a:prstGeom prst="rect">
-            <a:avLst/>
-          </a:prstGeom>
-          <a:noFill/>
-          <a:ln/>
-        </p:spPr>
-        <p:txBody>
-          <a:bodyPr wrap="square" lIns="0" tIns="0" rIns="0" bIns="0" rtlCol="0" anchor="ctr"/>
-          <a:lstStyle/>
-          <a:p>
-            <a:pPr algn="l" indent="0" marL="0">
-              <a:lnSpc>
-                <a:spcPct val="105000"/>
-              </a:lnSpc>
-              <a:buNone/>
-            </a:pPr>
-            <a:r>
-              <a:rPr lang="en-US" sz="1000" dirty="0">
-                <a:solidFill>
-                  <a:srgbClr val="1B2A2F"/>
-                </a:solidFill>
-                <a:latin typeface="Calibri" pitchFamily="34" charset="0"/>
-                <a:ea typeface="Calibri" pitchFamily="34" charset="-122"/>
-                <a:cs typeface="Calibri" pitchFamily="34" charset="-120"/>
-              </a:rPr>
-              <a:t>Miércoles 11am</a:t>
-            </a:r>
-            <a:endParaRPr lang="en-US" sz="1000" dirty="0"/>
-          </a:p>
-        </p:txBody>
-      </p:sp>
-      <p:sp>
-        <p:nvSpPr>
-          <p:cNvPr id="36" name="Text 34"/>
-          <p:cNvSpPr txBox="1"/>
-          <p:nvPr/>
-        </p:nvSpPr>
-        <p:spPr>
-          <a:xfrm>
-            <a:off x="4663440" y="3429000"/>
-            <a:ext cx="2971800" cy="155448"/>
-          </a:xfrm>
-          <a:prstGeom prst="rect">
-            <a:avLst/>
-          </a:prstGeom>
-          <a:noFill/>
-          <a:ln/>
-        </p:spPr>
-        <p:txBody>
-          <a:bodyPr wrap="square" lIns="0" tIns="0" rIns="0" bIns="0" rtlCol="0" anchor="ctr"/>
-          <a:lstStyle/>
-          <a:p>
-            <a:pPr algn="r" indent="0" marL="0">
-              <a:buNone/>
-            </a:pPr>
-            <a:r>
-              <a:rPr lang="en-US" sz="850" dirty="0">
+              <a:t>Más adelante el paciente puede pedir su rutina en cualquier momento y el bot responde con el video de cada ejercicio.</a:t>
+            </a:r>
+            <a:endParaRPr lang="en-US" sz="1400" dirty="0"/>
+          </a:p>
+        </p:txBody>
+      </p:sp>
+      <p:sp>
+        <p:nvSpPr>
+          <p:cNvPr id="18" name="Text 16"/>
+          <p:cNvSpPr txBox="1"/>
+          <p:nvPr/>
+        </p:nvSpPr>
+        <p:spPr>
+          <a:xfrm>
+            <a:off x="548640" y="6355080"/>
+            <a:ext cx="5394960" cy="320040"/>
+          </a:xfrm>
+          <a:prstGeom prst="rect">
+            <a:avLst/>
+          </a:prstGeom>
+          <a:noFill/>
+          <a:ln/>
+        </p:spPr>
+        <p:txBody>
+          <a:bodyPr wrap="square" lIns="0" tIns="0" rIns="0" bIns="0" rtlCol="0" anchor="ctr"/>
+          <a:lstStyle/>
+          <a:p>
+            <a:pPr indent="0" marL="0">
+              <a:buNone/>
+            </a:pPr>
+            <a:r>
+              <a:rPr lang="en-US" sz="1050" i="1" dirty="0">
                 <a:solidFill>
                   <a:srgbClr val="5C6E70"/>
                 </a:solidFill>
@@ -7174,858 +7104,9 @@
                 <a:ea typeface="Calibri" pitchFamily="34" charset="-122"/>
                 <a:cs typeface="Calibri" pitchFamily="34" charset="-120"/>
               </a:rPr>
-              <a:t>Paciente</a:t>
-            </a:r>
-            <a:endParaRPr lang="en-US" sz="850" dirty="0"/>
-          </a:p>
-        </p:txBody>
-      </p:sp>
-      <p:sp>
-        <p:nvSpPr>
-          <p:cNvPr id="37" name="Shape 35"/>
-          <p:cNvSpPr/>
-          <p:nvPr/>
-        </p:nvSpPr>
-        <p:spPr>
-          <a:xfrm>
-            <a:off x="4663440" y="4233672"/>
-            <a:ext cx="2971800" cy="566928"/>
-          </a:xfrm>
-          <a:prstGeom prst="roundRect">
-            <a:avLst>
-              <a:gd name="adj" fmla="val 16129"/>
-            </a:avLst>
-          </a:prstGeom>
-          <a:solidFill>
-            <a:srgbClr val="028090"/>
-          </a:solidFill>
-          <a:ln w="12700">
-            <a:solidFill>
-              <a:srgbClr val="028090"/>
-            </a:solidFill>
-            <a:prstDash val="solid"/>
-          </a:ln>
-        </p:spPr>
-      </p:sp>
-      <p:sp>
-        <p:nvSpPr>
-          <p:cNvPr id="38" name="Text 36"/>
-          <p:cNvSpPr txBox="1"/>
-          <p:nvPr/>
-        </p:nvSpPr>
-        <p:spPr>
-          <a:xfrm>
-            <a:off x="4809744" y="4233672"/>
-            <a:ext cx="2679192" cy="566928"/>
-          </a:xfrm>
-          <a:prstGeom prst="rect">
-            <a:avLst/>
-          </a:prstGeom>
-          <a:noFill/>
-          <a:ln/>
-        </p:spPr>
-        <p:txBody>
-          <a:bodyPr wrap="square" lIns="0" tIns="0" rIns="0" bIns="0" rtlCol="0" anchor="ctr"/>
-          <a:lstStyle/>
-          <a:p>
-            <a:pPr algn="l" indent="0" marL="0">
-              <a:lnSpc>
-                <a:spcPct val="105000"/>
-              </a:lnSpc>
-              <a:buNone/>
-            </a:pPr>
-            <a:r>
-              <a:rPr lang="en-US" sz="1000" dirty="0">
-                <a:solidFill>
-                  <a:srgbClr val="FFFFFF"/>
-                </a:solidFill>
-                <a:latin typeface="Calibri" pitchFamily="34" charset="0"/>
-                <a:ea typeface="Calibri" pitchFamily="34" charset="-122"/>
-                <a:cs typeface="Calibri" pitchFamily="34" charset="-120"/>
-              </a:rPr>
-              <a:t>Confirmo el cambio a miércoles 11:00. ¿Correcto?</a:t>
-            </a:r>
-            <a:endParaRPr lang="en-US" sz="1000" dirty="0"/>
-          </a:p>
-        </p:txBody>
-      </p:sp>
-      <p:sp>
-        <p:nvSpPr>
-          <p:cNvPr id="39" name="Text 37"/>
-          <p:cNvSpPr txBox="1"/>
-          <p:nvPr/>
-        </p:nvSpPr>
-        <p:spPr>
-          <a:xfrm>
-            <a:off x="4663440" y="4059936"/>
-            <a:ext cx="2971800" cy="155448"/>
-          </a:xfrm>
-          <a:prstGeom prst="rect">
-            <a:avLst/>
-          </a:prstGeom>
-          <a:noFill/>
-          <a:ln/>
-        </p:spPr>
-        <p:txBody>
-          <a:bodyPr wrap="square" lIns="0" tIns="0" rIns="0" bIns="0" rtlCol="0" anchor="ctr"/>
-          <a:lstStyle/>
-          <a:p>
-            <a:pPr algn="l" indent="0" marL="0">
-              <a:buNone/>
-            </a:pPr>
-            <a:r>
-              <a:rPr lang="en-US" sz="850" dirty="0">
-                <a:solidFill>
-                  <a:srgbClr val="5C6E70"/>
-                </a:solidFill>
-                <a:latin typeface="Calibri" pitchFamily="34" charset="0"/>
-                <a:ea typeface="Calibri" pitchFamily="34" charset="-122"/>
-                <a:cs typeface="Calibri" pitchFamily="34" charset="-120"/>
-              </a:rPr>
-              <a:t>Bot</a:t>
-            </a:r>
-            <a:endParaRPr lang="en-US" sz="850" dirty="0"/>
-          </a:p>
-        </p:txBody>
-      </p:sp>
-      <p:sp>
-        <p:nvSpPr>
-          <p:cNvPr id="40" name="Shape 38"/>
-          <p:cNvSpPr/>
-          <p:nvPr/>
-        </p:nvSpPr>
-        <p:spPr>
-          <a:xfrm>
-            <a:off x="4663440" y="5047488"/>
-            <a:ext cx="2971800" cy="384048"/>
-          </a:xfrm>
-          <a:prstGeom prst="roundRect">
-            <a:avLst>
-              <a:gd name="adj" fmla="val 23810"/>
-            </a:avLst>
-          </a:prstGeom>
-          <a:solidFill>
-            <a:srgbClr val="F1F5F4"/>
-          </a:solidFill>
-          <a:ln w="9525">
-            <a:solidFill>
-              <a:srgbClr val="D7E1E0"/>
-            </a:solidFill>
-            <a:prstDash val="solid"/>
-          </a:ln>
-        </p:spPr>
-      </p:sp>
-      <p:sp>
-        <p:nvSpPr>
-          <p:cNvPr id="41" name="Text 39"/>
-          <p:cNvSpPr txBox="1"/>
-          <p:nvPr/>
-        </p:nvSpPr>
-        <p:spPr>
-          <a:xfrm>
-            <a:off x="4809744" y="5047488"/>
-            <a:ext cx="2679192" cy="384048"/>
-          </a:xfrm>
-          <a:prstGeom prst="rect">
-            <a:avLst/>
-          </a:prstGeom>
-          <a:noFill/>
-          <a:ln/>
-        </p:spPr>
-        <p:txBody>
-          <a:bodyPr wrap="square" lIns="0" tIns="0" rIns="0" bIns="0" rtlCol="0" anchor="ctr"/>
-          <a:lstStyle/>
-          <a:p>
-            <a:pPr algn="l" indent="0" marL="0">
-              <a:lnSpc>
-                <a:spcPct val="105000"/>
-              </a:lnSpc>
-              <a:buNone/>
-            </a:pPr>
-            <a:r>
-              <a:rPr lang="en-US" sz="1000" dirty="0">
-                <a:solidFill>
-                  <a:srgbClr val="1B2A2F"/>
-                </a:solidFill>
-                <a:latin typeface="Calibri" pitchFamily="34" charset="0"/>
-                <a:ea typeface="Calibri" pitchFamily="34" charset="-122"/>
-                <a:cs typeface="Calibri" pitchFamily="34" charset="-120"/>
-              </a:rPr>
-              <a:t>Sí</a:t>
-            </a:r>
-            <a:endParaRPr lang="en-US" sz="1000" dirty="0"/>
-          </a:p>
-        </p:txBody>
-      </p:sp>
-      <p:sp>
-        <p:nvSpPr>
-          <p:cNvPr id="42" name="Text 40"/>
-          <p:cNvSpPr txBox="1"/>
-          <p:nvPr/>
-        </p:nvSpPr>
-        <p:spPr>
-          <a:xfrm>
-            <a:off x="4663440" y="4873752"/>
-            <a:ext cx="2971800" cy="155448"/>
-          </a:xfrm>
-          <a:prstGeom prst="rect">
-            <a:avLst/>
-          </a:prstGeom>
-          <a:noFill/>
-          <a:ln/>
-        </p:spPr>
-        <p:txBody>
-          <a:bodyPr wrap="square" lIns="0" tIns="0" rIns="0" bIns="0" rtlCol="0" anchor="ctr"/>
-          <a:lstStyle/>
-          <a:p>
-            <a:pPr algn="r" indent="0" marL="0">
-              <a:buNone/>
-            </a:pPr>
-            <a:r>
-              <a:rPr lang="en-US" sz="850" dirty="0">
-                <a:solidFill>
-                  <a:srgbClr val="5C6E70"/>
-                </a:solidFill>
-                <a:latin typeface="Calibri" pitchFamily="34" charset="0"/>
-                <a:ea typeface="Calibri" pitchFamily="34" charset="-122"/>
-                <a:cs typeface="Calibri" pitchFamily="34" charset="-120"/>
-              </a:rPr>
-              <a:t>Paciente</a:t>
-            </a:r>
-            <a:endParaRPr lang="en-US" sz="850" dirty="0"/>
-          </a:p>
-        </p:txBody>
-      </p:sp>
-      <p:sp>
-        <p:nvSpPr>
-          <p:cNvPr id="43" name="Shape 41"/>
-          <p:cNvSpPr/>
-          <p:nvPr/>
-        </p:nvSpPr>
-        <p:spPr>
-          <a:xfrm>
-            <a:off x="4663440" y="5678424"/>
-            <a:ext cx="2971800" cy="384048"/>
-          </a:xfrm>
-          <a:prstGeom prst="roundRect">
-            <a:avLst>
-              <a:gd name="adj" fmla="val 23810"/>
-            </a:avLst>
-          </a:prstGeom>
-          <a:solidFill>
-            <a:srgbClr val="028090"/>
-          </a:solidFill>
-          <a:ln w="12700">
-            <a:solidFill>
-              <a:srgbClr val="028090"/>
-            </a:solidFill>
-            <a:prstDash val="solid"/>
-          </a:ln>
-        </p:spPr>
-      </p:sp>
-      <p:sp>
-        <p:nvSpPr>
-          <p:cNvPr id="44" name="Text 42"/>
-          <p:cNvSpPr txBox="1"/>
-          <p:nvPr/>
-        </p:nvSpPr>
-        <p:spPr>
-          <a:xfrm>
-            <a:off x="4809744" y="5678424"/>
-            <a:ext cx="2679192" cy="384048"/>
-          </a:xfrm>
-          <a:prstGeom prst="rect">
-            <a:avLst/>
-          </a:prstGeom>
-          <a:noFill/>
-          <a:ln/>
-        </p:spPr>
-        <p:txBody>
-          <a:bodyPr wrap="square" lIns="0" tIns="0" rIns="0" bIns="0" rtlCol="0" anchor="ctr"/>
-          <a:lstStyle/>
-          <a:p>
-            <a:pPr algn="l" indent="0" marL="0">
-              <a:lnSpc>
-                <a:spcPct val="105000"/>
-              </a:lnSpc>
-              <a:buNone/>
-            </a:pPr>
-            <a:r>
-              <a:rPr lang="en-US" sz="1000" dirty="0">
-                <a:solidFill>
-                  <a:srgbClr val="FFFFFF"/>
-                </a:solidFill>
-                <a:latin typeface="Calibri" pitchFamily="34" charset="0"/>
-                <a:ea typeface="Calibri" pitchFamily="34" charset="-122"/>
-                <a:cs typeface="Calibri" pitchFamily="34" charset="-120"/>
-              </a:rPr>
-              <a:t>Listo, cita reagendada.</a:t>
-            </a:r>
-            <a:endParaRPr lang="en-US" sz="1000" dirty="0"/>
-          </a:p>
-        </p:txBody>
-      </p:sp>
-      <p:sp>
-        <p:nvSpPr>
-          <p:cNvPr id="45" name="Text 43"/>
-          <p:cNvSpPr txBox="1"/>
-          <p:nvPr/>
-        </p:nvSpPr>
-        <p:spPr>
-          <a:xfrm>
-            <a:off x="4663440" y="5504688"/>
-            <a:ext cx="2971800" cy="155448"/>
-          </a:xfrm>
-          <a:prstGeom prst="rect">
-            <a:avLst/>
-          </a:prstGeom>
-          <a:noFill/>
-          <a:ln/>
-        </p:spPr>
-        <p:txBody>
-          <a:bodyPr wrap="square" lIns="0" tIns="0" rIns="0" bIns="0" rtlCol="0" anchor="ctr"/>
-          <a:lstStyle/>
-          <a:p>
-            <a:pPr algn="l" indent="0" marL="0">
-              <a:buNone/>
-            </a:pPr>
-            <a:r>
-              <a:rPr lang="en-US" sz="850" dirty="0">
-                <a:solidFill>
-                  <a:srgbClr val="5C6E70"/>
-                </a:solidFill>
-                <a:latin typeface="Calibri" pitchFamily="34" charset="0"/>
-                <a:ea typeface="Calibri" pitchFamily="34" charset="-122"/>
-                <a:cs typeface="Calibri" pitchFamily="34" charset="-120"/>
-              </a:rPr>
-              <a:t>Bot</a:t>
-            </a:r>
-            <a:endParaRPr lang="en-US" sz="850" dirty="0"/>
-          </a:p>
-        </p:txBody>
-      </p:sp>
-      <p:sp>
-        <p:nvSpPr>
-          <p:cNvPr id="46" name="Shape 44"/>
-          <p:cNvSpPr/>
-          <p:nvPr/>
-        </p:nvSpPr>
-        <p:spPr>
-          <a:xfrm>
-            <a:off x="8321040" y="1371600"/>
-            <a:ext cx="3429000" cy="384048"/>
-          </a:xfrm>
-          <a:prstGeom prst="roundRect">
-            <a:avLst>
-              <a:gd name="adj" fmla="val 19048"/>
-            </a:avLst>
-          </a:prstGeom>
-          <a:solidFill>
-            <a:srgbClr val="028090"/>
-          </a:solidFill>
-          <a:ln w="12700">
-            <a:solidFill>
-              <a:srgbClr val="028090"/>
-            </a:solidFill>
-            <a:prstDash val="solid"/>
-          </a:ln>
-        </p:spPr>
-      </p:sp>
-      <p:sp>
-        <p:nvSpPr>
-          <p:cNvPr id="47" name="Text 45"/>
-          <p:cNvSpPr txBox="1"/>
-          <p:nvPr/>
-        </p:nvSpPr>
-        <p:spPr>
-          <a:xfrm>
-            <a:off x="8321040" y="1371600"/>
-            <a:ext cx="3429000" cy="384048"/>
-          </a:xfrm>
-          <a:prstGeom prst="rect">
-            <a:avLst/>
-          </a:prstGeom>
-          <a:noFill/>
-          <a:ln/>
-        </p:spPr>
-        <p:txBody>
-          <a:bodyPr wrap="square" lIns="0" tIns="0" rIns="0" bIns="0" rtlCol="0" anchor="ctr"/>
-          <a:lstStyle/>
-          <a:p>
-            <a:pPr algn="ctr" indent="0" marL="0">
-              <a:buNone/>
-            </a:pPr>
-            <a:r>
-              <a:rPr lang="en-US" sz="1300" b="1" dirty="0">
-                <a:solidFill>
-                  <a:srgbClr val="FFFFFF"/>
-                </a:solidFill>
-                <a:latin typeface="Calibri" pitchFamily="34" charset="0"/>
-                <a:ea typeface="Calibri" pitchFamily="34" charset="-122"/>
-                <a:cs typeface="Calibri" pitchFamily="34" charset="-120"/>
-              </a:rPr>
-              <a:t>Cancelar cita</a:t>
-            </a:r>
-            <a:endParaRPr lang="en-US" sz="1300" dirty="0"/>
-          </a:p>
-        </p:txBody>
-      </p:sp>
-      <p:sp>
-        <p:nvSpPr>
-          <p:cNvPr id="48" name="Shape 46"/>
-          <p:cNvSpPr/>
-          <p:nvPr/>
-        </p:nvSpPr>
-        <p:spPr>
-          <a:xfrm>
-            <a:off x="8321040" y="1828800"/>
-            <a:ext cx="3429000" cy="4709160"/>
-          </a:xfrm>
-          <a:prstGeom prst="roundRect">
-            <a:avLst>
-              <a:gd name="adj" fmla="val 3733"/>
-            </a:avLst>
-          </a:prstGeom>
-          <a:solidFill>
-            <a:srgbClr val="F1F7F6"/>
-          </a:solidFill>
-          <a:ln w="12700">
-            <a:solidFill>
-              <a:srgbClr val="F1F7F6"/>
-            </a:solidFill>
-            <a:prstDash val="solid"/>
-          </a:ln>
-        </p:spPr>
-      </p:sp>
-      <p:sp>
-        <p:nvSpPr>
-          <p:cNvPr id="49" name="Shape 47"/>
-          <p:cNvSpPr/>
-          <p:nvPr/>
-        </p:nvSpPr>
-        <p:spPr>
-          <a:xfrm>
-            <a:off x="8549640" y="2157984"/>
-            <a:ext cx="2971800" cy="384048"/>
-          </a:xfrm>
-          <a:prstGeom prst="roundRect">
-            <a:avLst>
-              <a:gd name="adj" fmla="val 23810"/>
-            </a:avLst>
-          </a:prstGeom>
-          <a:solidFill>
-            <a:srgbClr val="F1F5F4"/>
-          </a:solidFill>
-          <a:ln w="9525">
-            <a:solidFill>
-              <a:srgbClr val="D7E1E0"/>
-            </a:solidFill>
-            <a:prstDash val="solid"/>
-          </a:ln>
-        </p:spPr>
-      </p:sp>
-      <p:sp>
-        <p:nvSpPr>
-          <p:cNvPr id="50" name="Text 48"/>
-          <p:cNvSpPr txBox="1"/>
-          <p:nvPr/>
-        </p:nvSpPr>
-        <p:spPr>
-          <a:xfrm>
-            <a:off x="8695944" y="2157984"/>
-            <a:ext cx="2679192" cy="384048"/>
-          </a:xfrm>
-          <a:prstGeom prst="rect">
-            <a:avLst/>
-          </a:prstGeom>
-          <a:noFill/>
-          <a:ln/>
-        </p:spPr>
-        <p:txBody>
-          <a:bodyPr wrap="square" lIns="0" tIns="0" rIns="0" bIns="0" rtlCol="0" anchor="ctr"/>
-          <a:lstStyle/>
-          <a:p>
-            <a:pPr algn="l" indent="0" marL="0">
-              <a:lnSpc>
-                <a:spcPct val="105000"/>
-              </a:lnSpc>
-              <a:buNone/>
-            </a:pPr>
-            <a:r>
-              <a:rPr lang="en-US" sz="1000" dirty="0">
-                <a:solidFill>
-                  <a:srgbClr val="1B2A2F"/>
-                </a:solidFill>
-                <a:latin typeface="Calibri" pitchFamily="34" charset="0"/>
-                <a:ea typeface="Calibri" pitchFamily="34" charset="-122"/>
-                <a:cs typeface="Calibri" pitchFamily="34" charset="-120"/>
-              </a:rPr>
-              <a:t>Quiero cancelar mi cita</a:t>
-            </a:r>
-            <a:endParaRPr lang="en-US" sz="1000" dirty="0"/>
-          </a:p>
-        </p:txBody>
-      </p:sp>
-      <p:sp>
-        <p:nvSpPr>
-          <p:cNvPr id="51" name="Text 49"/>
-          <p:cNvSpPr txBox="1"/>
-          <p:nvPr/>
-        </p:nvSpPr>
-        <p:spPr>
-          <a:xfrm>
-            <a:off x="8549640" y="1984248"/>
-            <a:ext cx="2971800" cy="155448"/>
-          </a:xfrm>
-          <a:prstGeom prst="rect">
-            <a:avLst/>
-          </a:prstGeom>
-          <a:noFill/>
-          <a:ln/>
-        </p:spPr>
-        <p:txBody>
-          <a:bodyPr wrap="square" lIns="0" tIns="0" rIns="0" bIns="0" rtlCol="0" anchor="ctr"/>
-          <a:lstStyle/>
-          <a:p>
-            <a:pPr algn="r" indent="0" marL="0">
-              <a:buNone/>
-            </a:pPr>
-            <a:r>
-              <a:rPr lang="en-US" sz="850" dirty="0">
-                <a:solidFill>
-                  <a:srgbClr val="5C6E70"/>
-                </a:solidFill>
-                <a:latin typeface="Calibri" pitchFamily="34" charset="0"/>
-                <a:ea typeface="Calibri" pitchFamily="34" charset="-122"/>
-                <a:cs typeface="Calibri" pitchFamily="34" charset="-120"/>
-              </a:rPr>
-              <a:t>Paciente</a:t>
-            </a:r>
-            <a:endParaRPr lang="en-US" sz="850" dirty="0"/>
-          </a:p>
-        </p:txBody>
-      </p:sp>
-      <p:sp>
-        <p:nvSpPr>
-          <p:cNvPr id="52" name="Shape 50"/>
-          <p:cNvSpPr/>
-          <p:nvPr/>
-        </p:nvSpPr>
-        <p:spPr>
-          <a:xfrm>
-            <a:off x="8549640" y="2788920"/>
-            <a:ext cx="2971800" cy="566928"/>
-          </a:xfrm>
-          <a:prstGeom prst="roundRect">
-            <a:avLst>
-              <a:gd name="adj" fmla="val 16129"/>
-            </a:avLst>
-          </a:prstGeom>
-          <a:solidFill>
-            <a:srgbClr val="028090"/>
-          </a:solidFill>
-          <a:ln w="12700">
-            <a:solidFill>
-              <a:srgbClr val="028090"/>
-            </a:solidFill>
-            <a:prstDash val="solid"/>
-          </a:ln>
-        </p:spPr>
-      </p:sp>
-      <p:sp>
-        <p:nvSpPr>
-          <p:cNvPr id="53" name="Text 51"/>
-          <p:cNvSpPr txBox="1"/>
-          <p:nvPr/>
-        </p:nvSpPr>
-        <p:spPr>
-          <a:xfrm>
-            <a:off x="8695944" y="2788920"/>
-            <a:ext cx="2679192" cy="566928"/>
-          </a:xfrm>
-          <a:prstGeom prst="rect">
-            <a:avLst/>
-          </a:prstGeom>
-          <a:noFill/>
-          <a:ln/>
-        </p:spPr>
-        <p:txBody>
-          <a:bodyPr wrap="square" lIns="0" tIns="0" rIns="0" bIns="0" rtlCol="0" anchor="ctr"/>
-          <a:lstStyle/>
-          <a:p>
-            <a:pPr algn="l" indent="0" marL="0">
-              <a:lnSpc>
-                <a:spcPct val="105000"/>
-              </a:lnSpc>
-              <a:buNone/>
-            </a:pPr>
-            <a:r>
-              <a:rPr lang="en-US" sz="1000" dirty="0">
-                <a:solidFill>
-                  <a:srgbClr val="FFFFFF"/>
-                </a:solidFill>
-                <a:latin typeface="Calibri" pitchFamily="34" charset="0"/>
-                <a:ea typeface="Calibri" pitchFamily="34" charset="-122"/>
-                <a:cs typeface="Calibri" pitchFamily="34" charset="-120"/>
-              </a:rPr>
-              <a:t>Tienes cita el jueves 15:00. ¿Confirmas la cancelación?</a:t>
-            </a:r>
-            <a:endParaRPr lang="en-US" sz="1000" dirty="0"/>
-          </a:p>
-        </p:txBody>
-      </p:sp>
-      <p:sp>
-        <p:nvSpPr>
-          <p:cNvPr id="54" name="Text 52"/>
-          <p:cNvSpPr txBox="1"/>
-          <p:nvPr/>
-        </p:nvSpPr>
-        <p:spPr>
-          <a:xfrm>
-            <a:off x="8549640" y="2615184"/>
-            <a:ext cx="2971800" cy="155448"/>
-          </a:xfrm>
-          <a:prstGeom prst="rect">
-            <a:avLst/>
-          </a:prstGeom>
-          <a:noFill/>
-          <a:ln/>
-        </p:spPr>
-        <p:txBody>
-          <a:bodyPr wrap="square" lIns="0" tIns="0" rIns="0" bIns="0" rtlCol="0" anchor="ctr"/>
-          <a:lstStyle/>
-          <a:p>
-            <a:pPr algn="l" indent="0" marL="0">
-              <a:buNone/>
-            </a:pPr>
-            <a:r>
-              <a:rPr lang="en-US" sz="850" dirty="0">
-                <a:solidFill>
-                  <a:srgbClr val="5C6E70"/>
-                </a:solidFill>
-                <a:latin typeface="Calibri" pitchFamily="34" charset="0"/>
-                <a:ea typeface="Calibri" pitchFamily="34" charset="-122"/>
-                <a:cs typeface="Calibri" pitchFamily="34" charset="-120"/>
-              </a:rPr>
-              <a:t>Bot</a:t>
-            </a:r>
-            <a:endParaRPr lang="en-US" sz="850" dirty="0"/>
-          </a:p>
-        </p:txBody>
-      </p:sp>
-      <p:sp>
-        <p:nvSpPr>
-          <p:cNvPr id="55" name="Shape 53"/>
-          <p:cNvSpPr/>
-          <p:nvPr/>
-        </p:nvSpPr>
-        <p:spPr>
-          <a:xfrm>
-            <a:off x="8549640" y="3602736"/>
-            <a:ext cx="2971800" cy="384048"/>
-          </a:xfrm>
-          <a:prstGeom prst="roundRect">
-            <a:avLst>
-              <a:gd name="adj" fmla="val 23810"/>
-            </a:avLst>
-          </a:prstGeom>
-          <a:solidFill>
-            <a:srgbClr val="F1F5F4"/>
-          </a:solidFill>
-          <a:ln w="9525">
-            <a:solidFill>
-              <a:srgbClr val="D7E1E0"/>
-            </a:solidFill>
-            <a:prstDash val="solid"/>
-          </a:ln>
-        </p:spPr>
-      </p:sp>
-      <p:sp>
-        <p:nvSpPr>
-          <p:cNvPr id="56" name="Text 54"/>
-          <p:cNvSpPr txBox="1"/>
-          <p:nvPr/>
-        </p:nvSpPr>
-        <p:spPr>
-          <a:xfrm>
-            <a:off x="8695944" y="3602736"/>
-            <a:ext cx="2679192" cy="384048"/>
-          </a:xfrm>
-          <a:prstGeom prst="rect">
-            <a:avLst/>
-          </a:prstGeom>
-          <a:noFill/>
-          <a:ln/>
-        </p:spPr>
-        <p:txBody>
-          <a:bodyPr wrap="square" lIns="0" tIns="0" rIns="0" bIns="0" rtlCol="0" anchor="ctr"/>
-          <a:lstStyle/>
-          <a:p>
-            <a:pPr algn="l" indent="0" marL="0">
-              <a:lnSpc>
-                <a:spcPct val="105000"/>
-              </a:lnSpc>
-              <a:buNone/>
-            </a:pPr>
-            <a:r>
-              <a:rPr lang="en-US" sz="1000" dirty="0">
-                <a:solidFill>
-                  <a:srgbClr val="1B2A2F"/>
-                </a:solidFill>
-                <a:latin typeface="Calibri" pitchFamily="34" charset="0"/>
-                <a:ea typeface="Calibri" pitchFamily="34" charset="-122"/>
-                <a:cs typeface="Calibri" pitchFamily="34" charset="-120"/>
-              </a:rPr>
-              <a:t>Sí</a:t>
-            </a:r>
-            <a:endParaRPr lang="en-US" sz="1000" dirty="0"/>
-          </a:p>
-        </p:txBody>
-      </p:sp>
-      <p:sp>
-        <p:nvSpPr>
-          <p:cNvPr id="57" name="Text 55"/>
-          <p:cNvSpPr txBox="1"/>
-          <p:nvPr/>
-        </p:nvSpPr>
-        <p:spPr>
-          <a:xfrm>
-            <a:off x="8549640" y="3429000"/>
-            <a:ext cx="2971800" cy="155448"/>
-          </a:xfrm>
-          <a:prstGeom prst="rect">
-            <a:avLst/>
-          </a:prstGeom>
-          <a:noFill/>
-          <a:ln/>
-        </p:spPr>
-        <p:txBody>
-          <a:bodyPr wrap="square" lIns="0" tIns="0" rIns="0" bIns="0" rtlCol="0" anchor="ctr"/>
-          <a:lstStyle/>
-          <a:p>
-            <a:pPr algn="r" indent="0" marL="0">
-              <a:buNone/>
-            </a:pPr>
-            <a:r>
-              <a:rPr lang="en-US" sz="850" dirty="0">
-                <a:solidFill>
-                  <a:srgbClr val="5C6E70"/>
-                </a:solidFill>
-                <a:latin typeface="Calibri" pitchFamily="34" charset="0"/>
-                <a:ea typeface="Calibri" pitchFamily="34" charset="-122"/>
-                <a:cs typeface="Calibri" pitchFamily="34" charset="-120"/>
-              </a:rPr>
-              <a:t>Paciente</a:t>
-            </a:r>
-            <a:endParaRPr lang="en-US" sz="850" dirty="0"/>
-          </a:p>
-        </p:txBody>
-      </p:sp>
-      <p:sp>
-        <p:nvSpPr>
-          <p:cNvPr id="58" name="Shape 56"/>
-          <p:cNvSpPr/>
-          <p:nvPr/>
-        </p:nvSpPr>
-        <p:spPr>
-          <a:xfrm>
-            <a:off x="8549640" y="4233672"/>
-            <a:ext cx="2971800" cy="384048"/>
-          </a:xfrm>
-          <a:prstGeom prst="roundRect">
-            <a:avLst>
-              <a:gd name="adj" fmla="val 23810"/>
-            </a:avLst>
-          </a:prstGeom>
-          <a:solidFill>
-            <a:srgbClr val="028090"/>
-          </a:solidFill>
-          <a:ln w="12700">
-            <a:solidFill>
-              <a:srgbClr val="028090"/>
-            </a:solidFill>
-            <a:prstDash val="solid"/>
-          </a:ln>
-        </p:spPr>
-      </p:sp>
-      <p:sp>
-        <p:nvSpPr>
-          <p:cNvPr id="59" name="Text 57"/>
-          <p:cNvSpPr txBox="1"/>
-          <p:nvPr/>
-        </p:nvSpPr>
-        <p:spPr>
-          <a:xfrm>
-            <a:off x="8695944" y="4233672"/>
-            <a:ext cx="2679192" cy="384048"/>
-          </a:xfrm>
-          <a:prstGeom prst="rect">
-            <a:avLst/>
-          </a:prstGeom>
-          <a:noFill/>
-          <a:ln/>
-        </p:spPr>
-        <p:txBody>
-          <a:bodyPr wrap="square" lIns="0" tIns="0" rIns="0" bIns="0" rtlCol="0" anchor="ctr"/>
-          <a:lstStyle/>
-          <a:p>
-            <a:pPr algn="l" indent="0" marL="0">
-              <a:lnSpc>
-                <a:spcPct val="105000"/>
-              </a:lnSpc>
-              <a:buNone/>
-            </a:pPr>
-            <a:r>
-              <a:rPr lang="en-US" sz="1000" dirty="0">
-                <a:solidFill>
-                  <a:srgbClr val="FFFFFF"/>
-                </a:solidFill>
-                <a:latin typeface="Calibri" pitchFamily="34" charset="0"/>
-                <a:ea typeface="Calibri" pitchFamily="34" charset="-122"/>
-                <a:cs typeface="Calibri" pitchFamily="34" charset="-120"/>
-              </a:rPr>
-              <a:t>Cita cancelada.</a:t>
-            </a:r>
-            <a:endParaRPr lang="en-US" sz="1000" dirty="0"/>
-          </a:p>
-        </p:txBody>
-      </p:sp>
-      <p:sp>
-        <p:nvSpPr>
-          <p:cNvPr id="60" name="Text 58"/>
-          <p:cNvSpPr txBox="1"/>
-          <p:nvPr/>
-        </p:nvSpPr>
-        <p:spPr>
-          <a:xfrm>
-            <a:off x="8549640" y="4059936"/>
-            <a:ext cx="2971800" cy="155448"/>
-          </a:xfrm>
-          <a:prstGeom prst="rect">
-            <a:avLst/>
-          </a:prstGeom>
-          <a:noFill/>
-          <a:ln/>
-        </p:spPr>
-        <p:txBody>
-          <a:bodyPr wrap="square" lIns="0" tIns="0" rIns="0" bIns="0" rtlCol="0" anchor="ctr"/>
-          <a:lstStyle/>
-          <a:p>
-            <a:pPr algn="l" indent="0" marL="0">
-              <a:buNone/>
-            </a:pPr>
-            <a:r>
-              <a:rPr lang="en-US" sz="850" dirty="0">
-                <a:solidFill>
-                  <a:srgbClr val="5C6E70"/>
-                </a:solidFill>
-                <a:latin typeface="Calibri" pitchFamily="34" charset="0"/>
-                <a:ea typeface="Calibri" pitchFamily="34" charset="-122"/>
-                <a:cs typeface="Calibri" pitchFamily="34" charset="-120"/>
-              </a:rPr>
-              <a:t>Bot</a:t>
-            </a:r>
-            <a:endParaRPr lang="en-US" sz="850" dirty="0"/>
+              <a:t>Fuente: activities-service, catálogo diagnóstico ↔ ejercicios</a:t>
+            </a:r>
+            <a:endParaRPr lang="en-US" sz="1050" dirty="0"/>
           </a:p>
         </p:txBody>
       </p:sp>
@@ -8088,13 +7169,13 @@
             <a:r>
               <a:rPr lang="en-US" sz="1200" b="1" spc="100" kern="0" dirty="0">
                 <a:solidFill>
-                  <a:srgbClr val="00A896"/>
-                </a:solidFill>
-                <a:latin typeface="Calibri" pitchFamily="34" charset="0"/>
-                <a:ea typeface="Calibri" pitchFamily="34" charset="-122"/>
-                <a:cs typeface="Calibri" pitchFamily="34" charset="-120"/>
-              </a:rPr>
-              <a:t>CONSULTAS</a:t>
+                  <a:srgbClr val="028090"/>
+                </a:solidFill>
+                <a:latin typeface="Calibri" pitchFamily="34" charset="0"/>
+                <a:ea typeface="Calibri" pitchFamily="34" charset="-122"/>
+                <a:cs typeface="Calibri" pitchFamily="34" charset="-120"/>
+              </a:rPr>
+              <a:t>AGENDA</a:t>
             </a:r>
             <a:endParaRPr lang="en-US" sz="1200" dirty="0"/>
           </a:p>
@@ -8109,7 +7190,7 @@
         <p:spPr>
           <a:xfrm>
             <a:off x="548640" y="640080"/>
-            <a:ext cx="6949440" cy="548640"/>
+            <a:ext cx="10058400" cy="548640"/>
           </a:xfrm>
           <a:prstGeom prst="rect">
             <a:avLst/>
@@ -8133,7 +7214,7 @@
                 <a:ea typeface="Cambria" pitchFamily="34" charset="-122"/>
                 <a:cs typeface="Cambria" pitchFamily="34" charset="-120"/>
               </a:rPr>
-              <a:t>Consultas generales</a:t>
+              <a:t>Agendar, reagendar y cancelar</a:t>
             </a:r>
             <a:endParaRPr lang="en-US" sz="2800" dirty="0"/>
           </a:p>
@@ -8147,12 +7228,78 @@
         </p:nvSpPr>
         <p:spPr>
           <a:xfrm>
-            <a:off x="6263640" y="384048"/>
-            <a:ext cx="5349240" cy="6309360"/>
+            <a:off x="548640" y="1371600"/>
+            <a:ext cx="3429000" cy="384048"/>
           </a:xfrm>
           <a:prstGeom prst="roundRect">
             <a:avLst>
-              <a:gd name="adj" fmla="val 2393"/>
+              <a:gd name="adj" fmla="val 19048"/>
+            </a:avLst>
+          </a:prstGeom>
+          <a:solidFill>
+            <a:srgbClr val="028090"/>
+          </a:solidFill>
+          <a:ln w="12700">
+            <a:solidFill>
+              <a:srgbClr val="028090"/>
+            </a:solidFill>
+            <a:prstDash val="solid"/>
+          </a:ln>
+        </p:spPr>
+      </p:sp>
+      <p:sp>
+        <p:nvSpPr>
+          <p:cNvPr id="5" name="Text 3"/>
+          <p:cNvSpPr txBox="1"/>
+          <p:nvPr/>
+        </p:nvSpPr>
+        <p:spPr>
+          <a:xfrm>
+            <a:off x="548640" y="1371600"/>
+            <a:ext cx="3429000" cy="384048"/>
+          </a:xfrm>
+          <a:prstGeom prst="rect">
+            <a:avLst/>
+          </a:prstGeom>
+          <a:noFill/>
+          <a:ln/>
+        </p:spPr>
+        <p:txBody>
+          <a:bodyPr wrap="square" lIns="0" tIns="0" rIns="0" bIns="0" rtlCol="0" anchor="ctr"/>
+          <a:lstStyle/>
+          <a:p>
+            <a:pPr algn="ctr" indent="0" marL="0">
+              <a:buNone/>
+            </a:pPr>
+            <a:r>
+              <a:rPr lang="en-US" sz="1300" b="1" dirty="0">
+                <a:solidFill>
+                  <a:srgbClr val="FFFFFF"/>
+                </a:solidFill>
+                <a:latin typeface="Calibri" pitchFamily="34" charset="0"/>
+                <a:ea typeface="Calibri" pitchFamily="34" charset="-122"/>
+                <a:cs typeface="Calibri" pitchFamily="34" charset="-120"/>
+              </a:rPr>
+              <a:t>Agendar hora</a:t>
+            </a:r>
+            <a:endParaRPr lang="en-US" sz="1300" dirty="0"/>
+          </a:p>
+        </p:txBody>
+      </p:sp>
+      <p:sp>
+        <p:nvSpPr>
+          <p:cNvPr id="6" name="Shape 4"/>
+          <p:cNvSpPr/>
+          <p:nvPr/>
+        </p:nvSpPr>
+        <p:spPr>
+          <a:xfrm>
+            <a:off x="548640" y="1828800"/>
+            <a:ext cx="3429000" cy="4709160"/>
+          </a:xfrm>
+          <a:prstGeom prst="roundRect">
+            <a:avLst>
+              <a:gd name="adj" fmla="val 3733"/>
             </a:avLst>
           </a:prstGeom>
           <a:solidFill>
@@ -8168,14 +7315,14 @@
       </p:sp>
       <p:sp>
         <p:nvSpPr>
-          <p:cNvPr id="5" name="Shape 3"/>
+          <p:cNvPr id="7" name="Shape 5"/>
           <p:cNvSpPr/>
           <p:nvPr/>
         </p:nvSpPr>
         <p:spPr>
           <a:xfrm>
-            <a:off x="6537960" y="786384"/>
-            <a:ext cx="4800600" cy="384048"/>
+            <a:off x="777240" y="2157984"/>
+            <a:ext cx="2971800" cy="384048"/>
           </a:xfrm>
           <a:prstGeom prst="roundRect">
             <a:avLst>
@@ -8195,14 +7342,14 @@
       </p:sp>
       <p:sp>
         <p:nvSpPr>
-          <p:cNvPr id="6" name="Text 4"/>
-          <p:cNvSpPr txBox="1"/>
-          <p:nvPr/>
-        </p:nvSpPr>
-        <p:spPr>
-          <a:xfrm>
-            <a:off x="6684264" y="786384"/>
-            <a:ext cx="4507992" cy="384048"/>
+          <p:cNvPr id="8" name="Text 6"/>
+          <p:cNvSpPr txBox="1"/>
+          <p:nvPr/>
+        </p:nvSpPr>
+        <p:spPr>
+          <a:xfrm>
+            <a:off x="923544" y="2157984"/>
+            <a:ext cx="2679192" cy="384048"/>
           </a:xfrm>
           <a:prstGeom prst="rect">
             <a:avLst/>
@@ -8221,7 +7368,7 @@
               <a:buNone/>
             </a:pPr>
             <a:r>
-              <a:rPr lang="en-US" sz="1150" dirty="0">
+              <a:rPr lang="en-US" sz="1000" dirty="0">
                 <a:solidFill>
                   <a:srgbClr val="1B2A2F"/>
                 </a:solidFill>
@@ -8229,22 +7376,22 @@
                 <a:ea typeface="Calibri" pitchFamily="34" charset="-122"/>
                 <a:cs typeface="Calibri" pitchFamily="34" charset="-120"/>
               </a:rPr>
-              <a:t>¿Cuánto vale la sesión?</a:t>
-            </a:r>
-            <a:endParaRPr lang="en-US" sz="1150" dirty="0"/>
-          </a:p>
-        </p:txBody>
-      </p:sp>
-      <p:sp>
-        <p:nvSpPr>
-          <p:cNvPr id="7" name="Text 5"/>
-          <p:cNvSpPr txBox="1"/>
-          <p:nvPr/>
-        </p:nvSpPr>
-        <p:spPr>
-          <a:xfrm>
-            <a:off x="6537960" y="612648"/>
-            <a:ext cx="4800600" cy="155448"/>
+              <a:t>Quiero agendar una hora</a:t>
+            </a:r>
+            <a:endParaRPr lang="en-US" sz="1000" dirty="0"/>
+          </a:p>
+        </p:txBody>
+      </p:sp>
+      <p:sp>
+        <p:nvSpPr>
+          <p:cNvPr id="9" name="Text 7"/>
+          <p:cNvSpPr txBox="1"/>
+          <p:nvPr/>
+        </p:nvSpPr>
+        <p:spPr>
+          <a:xfrm>
+            <a:off x="777240" y="1984248"/>
+            <a:ext cx="2971800" cy="155448"/>
           </a:xfrm>
           <a:prstGeom prst="rect">
             <a:avLst/>
@@ -8276,14 +7423,14 @@
       </p:sp>
       <p:sp>
         <p:nvSpPr>
-          <p:cNvPr id="8" name="Shape 6"/>
+          <p:cNvPr id="10" name="Shape 8"/>
           <p:cNvSpPr/>
           <p:nvPr/>
         </p:nvSpPr>
         <p:spPr>
           <a:xfrm>
-            <a:off x="6537960" y="1453896"/>
-            <a:ext cx="4800600" cy="384048"/>
+            <a:off x="777240" y="2788920"/>
+            <a:ext cx="2971800" cy="384048"/>
           </a:xfrm>
           <a:prstGeom prst="roundRect">
             <a:avLst>
@@ -8303,14 +7450,14 @@
       </p:sp>
       <p:sp>
         <p:nvSpPr>
-          <p:cNvPr id="9" name="Text 7"/>
-          <p:cNvSpPr txBox="1"/>
-          <p:nvPr/>
-        </p:nvSpPr>
-        <p:spPr>
-          <a:xfrm>
-            <a:off x="6684264" y="1453896"/>
-            <a:ext cx="4507992" cy="384048"/>
+          <p:cNvPr id="11" name="Text 9"/>
+          <p:cNvSpPr txBox="1"/>
+          <p:nvPr/>
+        </p:nvSpPr>
+        <p:spPr>
+          <a:xfrm>
+            <a:off x="923544" y="2788920"/>
+            <a:ext cx="2679192" cy="384048"/>
           </a:xfrm>
           <a:prstGeom prst="rect">
             <a:avLst/>
@@ -8329,7 +7476,7 @@
               <a:buNone/>
             </a:pPr>
             <a:r>
-              <a:rPr lang="en-US" sz="1150" dirty="0">
+              <a:rPr lang="en-US" sz="1000" dirty="0">
                 <a:solidFill>
                   <a:srgbClr val="FFFFFF"/>
                 </a:solidFill>
@@ -8337,22 +7484,22 @@
                 <a:ea typeface="Calibri" pitchFamily="34" charset="-122"/>
                 <a:cs typeface="Calibri" pitchFamily="34" charset="-120"/>
               </a:rPr>
-              <a:t>¿Por fonasa? Así te paso los precios.</a:t>
-            </a:r>
-            <a:endParaRPr lang="en-US" sz="1150" dirty="0"/>
-          </a:p>
-        </p:txBody>
-      </p:sp>
-      <p:sp>
-        <p:nvSpPr>
-          <p:cNvPr id="10" name="Text 8"/>
-          <p:cNvSpPr txBox="1"/>
-          <p:nvPr/>
-        </p:nvSpPr>
-        <p:spPr>
-          <a:xfrm>
-            <a:off x="6537960" y="1280160"/>
-            <a:ext cx="4800600" cy="155448"/>
+              <a:t>¿Qué día y hora te acomoda?</a:t>
+            </a:r>
+            <a:endParaRPr lang="en-US" sz="1000" dirty="0"/>
+          </a:p>
+        </p:txBody>
+      </p:sp>
+      <p:sp>
+        <p:nvSpPr>
+          <p:cNvPr id="12" name="Text 10"/>
+          <p:cNvSpPr txBox="1"/>
+          <p:nvPr/>
+        </p:nvSpPr>
+        <p:spPr>
+          <a:xfrm>
+            <a:off x="777240" y="2615184"/>
+            <a:ext cx="2971800" cy="155448"/>
           </a:xfrm>
           <a:prstGeom prst="rect">
             <a:avLst/>
@@ -8384,14 +7531,14 @@
       </p:sp>
       <p:sp>
         <p:nvSpPr>
-          <p:cNvPr id="11" name="Shape 9"/>
+          <p:cNvPr id="13" name="Shape 11"/>
           <p:cNvSpPr/>
           <p:nvPr/>
         </p:nvSpPr>
         <p:spPr>
           <a:xfrm>
-            <a:off x="6537960" y="2121408"/>
-            <a:ext cx="4800600" cy="384048"/>
+            <a:off x="777240" y="3419856"/>
+            <a:ext cx="2971800" cy="384048"/>
           </a:xfrm>
           <a:prstGeom prst="roundRect">
             <a:avLst>
@@ -8411,14 +7558,14 @@
       </p:sp>
       <p:sp>
         <p:nvSpPr>
-          <p:cNvPr id="12" name="Text 10"/>
-          <p:cNvSpPr txBox="1"/>
-          <p:nvPr/>
-        </p:nvSpPr>
-        <p:spPr>
-          <a:xfrm>
-            <a:off x="6684264" y="2121408"/>
-            <a:ext cx="4507992" cy="384048"/>
+          <p:cNvPr id="14" name="Text 12"/>
+          <p:cNvSpPr txBox="1"/>
+          <p:nvPr/>
+        </p:nvSpPr>
+        <p:spPr>
+          <a:xfrm>
+            <a:off x="923544" y="3419856"/>
+            <a:ext cx="2679192" cy="384048"/>
           </a:xfrm>
           <a:prstGeom prst="rect">
             <a:avLst/>
@@ -8437,7 +7584,7 @@
               <a:buNone/>
             </a:pPr>
             <a:r>
-              <a:rPr lang="en-US" sz="1150" dirty="0">
+              <a:rPr lang="en-US" sz="1000" dirty="0">
                 <a:solidFill>
                   <a:srgbClr val="1B2A2F"/>
                 </a:solidFill>
@@ -8445,22 +7592,22 @@
                 <a:ea typeface="Calibri" pitchFamily="34" charset="-122"/>
                 <a:cs typeface="Calibri" pitchFamily="34" charset="-120"/>
               </a:rPr>
-              <a:t>Sí</a:t>
-            </a:r>
-            <a:endParaRPr lang="en-US" sz="1150" dirty="0"/>
-          </a:p>
-        </p:txBody>
-      </p:sp>
-      <p:sp>
-        <p:nvSpPr>
-          <p:cNvPr id="13" name="Text 11"/>
-          <p:cNvSpPr txBox="1"/>
-          <p:nvPr/>
-        </p:nvSpPr>
-        <p:spPr>
-          <a:xfrm>
-            <a:off x="6537960" y="1947672"/>
-            <a:ext cx="4800600" cy="155448"/>
+              <a:t>Lunes a las 10am</a:t>
+            </a:r>
+            <a:endParaRPr lang="en-US" sz="1000" dirty="0"/>
+          </a:p>
+        </p:txBody>
+      </p:sp>
+      <p:sp>
+        <p:nvSpPr>
+          <p:cNvPr id="15" name="Text 13"/>
+          <p:cNvSpPr txBox="1"/>
+          <p:nvPr/>
+        </p:nvSpPr>
+        <p:spPr>
+          <a:xfrm>
+            <a:off x="777240" y="3246120"/>
+            <a:ext cx="2971800" cy="155448"/>
           </a:xfrm>
           <a:prstGeom prst="rect">
             <a:avLst/>
@@ -8492,14 +7639,14 @@
       </p:sp>
       <p:sp>
         <p:nvSpPr>
-          <p:cNvPr id="14" name="Shape 12"/>
+          <p:cNvPr id="16" name="Shape 14"/>
           <p:cNvSpPr/>
           <p:nvPr/>
         </p:nvSpPr>
         <p:spPr>
           <a:xfrm>
-            <a:off x="6537960" y="2788920"/>
-            <a:ext cx="4800600" cy="384048"/>
+            <a:off x="777240" y="4050792"/>
+            <a:ext cx="2971800" cy="384048"/>
           </a:xfrm>
           <a:prstGeom prst="roundRect">
             <a:avLst>
@@ -8519,14 +7666,14 @@
       </p:sp>
       <p:sp>
         <p:nvSpPr>
-          <p:cNvPr id="15" name="Text 13"/>
-          <p:cNvSpPr txBox="1"/>
-          <p:nvPr/>
-        </p:nvSpPr>
-        <p:spPr>
-          <a:xfrm>
-            <a:off x="6684264" y="2788920"/>
-            <a:ext cx="4507992" cy="384048"/>
+          <p:cNvPr id="17" name="Text 15"/>
+          <p:cNvSpPr txBox="1"/>
+          <p:nvPr/>
+        </p:nvSpPr>
+        <p:spPr>
+          <a:xfrm>
+            <a:off x="923544" y="4050792"/>
+            <a:ext cx="2679192" cy="384048"/>
           </a:xfrm>
           <a:prstGeom prst="rect">
             <a:avLst/>
@@ -8545,7 +7692,7 @@
               <a:buNone/>
             </a:pPr>
             <a:r>
-              <a:rPr lang="en-US" sz="1150" dirty="0">
+              <a:rPr lang="en-US" sz="1000" dirty="0">
                 <a:solidFill>
                   <a:srgbClr val="FFFFFF"/>
                 </a:solidFill>
@@ -8553,22 +7700,22 @@
                 <a:ea typeface="Calibri" pitchFamily="34" charset="-122"/>
                 <a:cs typeface="Calibri" pitchFamily="34" charset="-120"/>
               </a:rPr>
-              <a:t>¿Tramo A, B, C o D?</a:t>
-            </a:r>
-            <a:endParaRPr lang="en-US" sz="1150" dirty="0"/>
-          </a:p>
-        </p:txBody>
-      </p:sp>
-      <p:sp>
-        <p:nvSpPr>
-          <p:cNvPr id="16" name="Text 14"/>
-          <p:cNvSpPr txBox="1"/>
-          <p:nvPr/>
-        </p:nvSpPr>
-        <p:spPr>
-          <a:xfrm>
-            <a:off x="6537960" y="2615184"/>
-            <a:ext cx="4800600" cy="155448"/>
+              <a:t>Confirmo: lunes 10:00. ¿Está bien?</a:t>
+            </a:r>
+            <a:endParaRPr lang="en-US" sz="1000" dirty="0"/>
+          </a:p>
+        </p:txBody>
+      </p:sp>
+      <p:sp>
+        <p:nvSpPr>
+          <p:cNvPr id="18" name="Text 16"/>
+          <p:cNvSpPr txBox="1"/>
+          <p:nvPr/>
+        </p:nvSpPr>
+        <p:spPr>
+          <a:xfrm>
+            <a:off x="777240" y="3877056"/>
+            <a:ext cx="2971800" cy="155448"/>
           </a:xfrm>
           <a:prstGeom prst="rect">
             <a:avLst/>
@@ -8600,14 +7747,14 @@
       </p:sp>
       <p:sp>
         <p:nvSpPr>
-          <p:cNvPr id="17" name="Shape 15"/>
+          <p:cNvPr id="19" name="Shape 17"/>
           <p:cNvSpPr/>
           <p:nvPr/>
         </p:nvSpPr>
         <p:spPr>
           <a:xfrm>
-            <a:off x="6537960" y="3456432"/>
-            <a:ext cx="4800600" cy="384048"/>
+            <a:off x="777240" y="4681728"/>
+            <a:ext cx="2971800" cy="384048"/>
           </a:xfrm>
           <a:prstGeom prst="roundRect">
             <a:avLst>
@@ -8627,14 +7774,14 @@
       </p:sp>
       <p:sp>
         <p:nvSpPr>
-          <p:cNvPr id="18" name="Text 16"/>
-          <p:cNvSpPr txBox="1"/>
-          <p:nvPr/>
-        </p:nvSpPr>
-        <p:spPr>
-          <a:xfrm>
-            <a:off x="6684264" y="3456432"/>
-            <a:ext cx="4507992" cy="384048"/>
+          <p:cNvPr id="20" name="Text 18"/>
+          <p:cNvSpPr txBox="1"/>
+          <p:nvPr/>
+        </p:nvSpPr>
+        <p:spPr>
+          <a:xfrm>
+            <a:off x="923544" y="4681728"/>
+            <a:ext cx="2679192" cy="384048"/>
           </a:xfrm>
           <a:prstGeom prst="rect">
             <a:avLst/>
@@ -8653,7 +7800,7 @@
               <a:buNone/>
             </a:pPr>
             <a:r>
-              <a:rPr lang="en-US" sz="1150" dirty="0">
+              <a:rPr lang="en-US" sz="1000" dirty="0">
                 <a:solidFill>
                   <a:srgbClr val="1B2A2F"/>
                 </a:solidFill>
@@ -8661,22 +7808,22 @@
                 <a:ea typeface="Calibri" pitchFamily="34" charset="-122"/>
                 <a:cs typeface="Calibri" pitchFamily="34" charset="-120"/>
               </a:rPr>
-              <a:t>C</a:t>
-            </a:r>
-            <a:endParaRPr lang="en-US" sz="1150" dirty="0"/>
-          </a:p>
-        </p:txBody>
-      </p:sp>
-      <p:sp>
-        <p:nvSpPr>
-          <p:cNvPr id="19" name="Text 17"/>
-          <p:cNvSpPr txBox="1"/>
-          <p:nvPr/>
-        </p:nvSpPr>
-        <p:spPr>
-          <a:xfrm>
-            <a:off x="6537960" y="3282696"/>
-            <a:ext cx="4800600" cy="155448"/>
+              <a:t>Sí</a:t>
+            </a:r>
+            <a:endParaRPr lang="en-US" sz="1000" dirty="0"/>
+          </a:p>
+        </p:txBody>
+      </p:sp>
+      <p:sp>
+        <p:nvSpPr>
+          <p:cNvPr id="21" name="Text 19"/>
+          <p:cNvSpPr txBox="1"/>
+          <p:nvPr/>
+        </p:nvSpPr>
+        <p:spPr>
+          <a:xfrm>
+            <a:off x="777240" y="4507992"/>
+            <a:ext cx="2971800" cy="155448"/>
           </a:xfrm>
           <a:prstGeom prst="rect">
             <a:avLst/>
@@ -8708,18 +7855,18 @@
       </p:sp>
       <p:sp>
         <p:nvSpPr>
-          <p:cNvPr id="20" name="Shape 18"/>
+          <p:cNvPr id="22" name="Shape 20"/>
           <p:cNvSpPr/>
           <p:nvPr/>
         </p:nvSpPr>
         <p:spPr>
           <a:xfrm>
-            <a:off x="6537960" y="4123944"/>
-            <a:ext cx="4800600" cy="566928"/>
+            <a:off x="777240" y="5312664"/>
+            <a:ext cx="2971800" cy="384048"/>
           </a:xfrm>
           <a:prstGeom prst="roundRect">
             <a:avLst>
-              <a:gd name="adj" fmla="val 16129"/>
+              <a:gd name="adj" fmla="val 23810"/>
             </a:avLst>
           </a:prstGeom>
           <a:solidFill>
@@ -8735,14 +7882,14 @@
       </p:sp>
       <p:sp>
         <p:nvSpPr>
-          <p:cNvPr id="21" name="Text 19"/>
-          <p:cNvSpPr txBox="1"/>
-          <p:nvPr/>
-        </p:nvSpPr>
-        <p:spPr>
-          <a:xfrm>
-            <a:off x="6684264" y="4123944"/>
-            <a:ext cx="4507992" cy="566928"/>
+          <p:cNvPr id="23" name="Text 21"/>
+          <p:cNvSpPr txBox="1"/>
+          <p:nvPr/>
+        </p:nvSpPr>
+        <p:spPr>
+          <a:xfrm>
+            <a:off x="923544" y="5312664"/>
+            <a:ext cx="2679192" cy="384048"/>
           </a:xfrm>
           <a:prstGeom prst="rect">
             <a:avLst/>
@@ -8761,7 +7908,7 @@
               <a:buNone/>
             </a:pPr>
             <a:r>
-              <a:rPr lang="en-US" sz="1150" dirty="0">
+              <a:rPr lang="en-US" sz="1000" dirty="0">
                 <a:solidFill>
                   <a:srgbClr val="FFFFFF"/>
                 </a:solidFill>
@@ -8769,10 +7916,191 @@
                 <a:ea typeface="Calibri" pitchFamily="34" charset="-122"/>
                 <a:cs typeface="Calibri" pitchFamily="34" charset="-120"/>
               </a:rPr>
-              <a:t>Las 10 sesiones por fonasa valen alrededor de $38.000...</a:t>
-            </a:r>
-            <a:endParaRPr lang="en-US" sz="1150" dirty="0"/>
-          </a:p>
+              <a:t>Listo, quedas agendado/a.</a:t>
+            </a:r>
+            <a:endParaRPr lang="en-US" sz="1000" dirty="0"/>
+          </a:p>
+        </p:txBody>
+      </p:sp>
+      <p:sp>
+        <p:nvSpPr>
+          <p:cNvPr id="24" name="Text 22"/>
+          <p:cNvSpPr txBox="1"/>
+          <p:nvPr/>
+        </p:nvSpPr>
+        <p:spPr>
+          <a:xfrm>
+            <a:off x="777240" y="5138928"/>
+            <a:ext cx="2971800" cy="155448"/>
+          </a:xfrm>
+          <a:prstGeom prst="rect">
+            <a:avLst/>
+          </a:prstGeom>
+          <a:noFill/>
+          <a:ln/>
+        </p:spPr>
+        <p:txBody>
+          <a:bodyPr wrap="square" lIns="0" tIns="0" rIns="0" bIns="0" rtlCol="0" anchor="ctr"/>
+          <a:lstStyle/>
+          <a:p>
+            <a:pPr algn="l" indent="0" marL="0">
+              <a:buNone/>
+            </a:pPr>
+            <a:r>
+              <a:rPr lang="en-US" sz="850" dirty="0">
+                <a:solidFill>
+                  <a:srgbClr val="5C6E70"/>
+                </a:solidFill>
+                <a:latin typeface="Calibri" pitchFamily="34" charset="0"/>
+                <a:ea typeface="Calibri" pitchFamily="34" charset="-122"/>
+                <a:cs typeface="Calibri" pitchFamily="34" charset="-120"/>
+              </a:rPr>
+              <a:t>Bot</a:t>
+            </a:r>
+            <a:endParaRPr lang="en-US" sz="850" dirty="0"/>
+          </a:p>
+        </p:txBody>
+      </p:sp>
+      <p:sp>
+        <p:nvSpPr>
+          <p:cNvPr id="25" name="Shape 23"/>
+          <p:cNvSpPr/>
+          <p:nvPr/>
+        </p:nvSpPr>
+        <p:spPr>
+          <a:xfrm>
+            <a:off x="4434840" y="1371600"/>
+            <a:ext cx="3429000" cy="384048"/>
+          </a:xfrm>
+          <a:prstGeom prst="roundRect">
+            <a:avLst>
+              <a:gd name="adj" fmla="val 19048"/>
+            </a:avLst>
+          </a:prstGeom>
+          <a:solidFill>
+            <a:srgbClr val="028090"/>
+          </a:solidFill>
+          <a:ln w="12700">
+            <a:solidFill>
+              <a:srgbClr val="028090"/>
+            </a:solidFill>
+            <a:prstDash val="solid"/>
+          </a:ln>
+        </p:spPr>
+      </p:sp>
+      <p:sp>
+        <p:nvSpPr>
+          <p:cNvPr id="26" name="Text 24"/>
+          <p:cNvSpPr txBox="1"/>
+          <p:nvPr/>
+        </p:nvSpPr>
+        <p:spPr>
+          <a:xfrm>
+            <a:off x="4434840" y="1371600"/>
+            <a:ext cx="3429000" cy="384048"/>
+          </a:xfrm>
+          <a:prstGeom prst="rect">
+            <a:avLst/>
+          </a:prstGeom>
+          <a:noFill/>
+          <a:ln/>
+        </p:spPr>
+        <p:txBody>
+          <a:bodyPr wrap="square" lIns="0" tIns="0" rIns="0" bIns="0" rtlCol="0" anchor="ctr"/>
+          <a:lstStyle/>
+          <a:p>
+            <a:pPr algn="ctr" indent="0" marL="0">
+              <a:buNone/>
+            </a:pPr>
+            <a:r>
+              <a:rPr lang="en-US" sz="1300" b="1" dirty="0">
+                <a:solidFill>
+                  <a:srgbClr val="FFFFFF"/>
+                </a:solidFill>
+                <a:latin typeface="Calibri" pitchFamily="34" charset="0"/>
+                <a:ea typeface="Calibri" pitchFamily="34" charset="-122"/>
+                <a:cs typeface="Calibri" pitchFamily="34" charset="-120"/>
+              </a:rPr>
+              <a:t>Reagendar</a:t>
+            </a:r>
+            <a:endParaRPr lang="en-US" sz="1300" dirty="0"/>
+          </a:p>
+        </p:txBody>
+      </p:sp>
+      <p:sp>
+        <p:nvSpPr>
+          <p:cNvPr id="27" name="Shape 25"/>
+          <p:cNvSpPr/>
+          <p:nvPr/>
+        </p:nvSpPr>
+        <p:spPr>
+          <a:xfrm>
+            <a:off x="4434840" y="1828800"/>
+            <a:ext cx="3429000" cy="4709160"/>
+          </a:xfrm>
+          <a:prstGeom prst="roundRect">
+            <a:avLst>
+              <a:gd name="adj" fmla="val 3733"/>
+            </a:avLst>
+          </a:prstGeom>
+          <a:solidFill>
+            <a:srgbClr val="F1F7F6"/>
+          </a:solidFill>
+          <a:ln w="12700">
+            <a:solidFill>
+              <a:srgbClr val="F1F7F6"/>
+            </a:solidFill>
+            <a:prstDash val="solid"/>
+          </a:ln>
+        </p:spPr>
+      </p:sp>
+      <p:sp>
+        <p:nvSpPr>
+          <p:cNvPr id="28" name="Shape 26"/>
+          <p:cNvSpPr/>
+          <p:nvPr/>
+        </p:nvSpPr>
+        <p:spPr>
+          <a:xfrm>
+            <a:off x="4663440" y="2157984"/>
+            <a:ext cx="2971800" cy="384048"/>
+          </a:xfrm>
+          <a:prstGeom prst="roundRect">
+            <a:avLst>
+              <a:gd name="adj" fmla="val 23810"/>
+            </a:avLst>
+          </a:prstGeom>
+          <a:solidFill>
+            <a:srgbClr val="F1F5F4"/>
+          </a:solidFill>
+          <a:ln w="9525">
+            <a:solidFill>
+              <a:srgbClr val="D7E1E0"/>
+            </a:solidFill>
+            <a:prstDash val="solid"/>
+          </a:ln>
+        </p:spPr>
+      </p:sp>
+      <p:sp>
+        <p:nvSpPr>
+          <p:cNvPr id="29" name="Text 27"/>
+          <p:cNvSpPr txBox="1"/>
+          <p:nvPr/>
+        </p:nvSpPr>
+        <p:spPr>
+          <a:xfrm>
+            <a:off x="4809744" y="2157984"/>
+            <a:ext cx="2679192" cy="384048"/>
+          </a:xfrm>
+          <a:prstGeom prst="rect">
+            <a:avLst/>
+          </a:prstGeom>
+          <a:noFill/>
+          <a:ln/>
+        </p:spPr>
+        <p:txBody>
+          <a:bodyPr wrap="square" lIns="0" tIns="0" rIns="0" bIns="0" rtlCol="0" anchor="ctr"/>
+          <a:lstStyle/>
           <a:p>
             <a:pPr algn="l" indent="0" marL="0">
               <a:lnSpc>
@@ -8781,42 +8109,42 @@
               <a:buNone/>
             </a:pPr>
             <a:r>
-              <a:rPr lang="en-US" sz="1150" dirty="0">
-                <a:solidFill>
-                  <a:srgbClr val="FFFFFF"/>
-                </a:solidFill>
-                <a:latin typeface="Calibri" pitchFamily="34" charset="0"/>
-                <a:ea typeface="Calibri" pitchFamily="34" charset="-122"/>
-                <a:cs typeface="Calibri" pitchFamily="34" charset="-120"/>
-              </a:rPr>
-              <a:t>[precio, dirección y códigos FONASA exactos]</a:t>
-            </a:r>
-            <a:endParaRPr lang="en-US" sz="1150" dirty="0"/>
-          </a:p>
-        </p:txBody>
-      </p:sp>
-      <p:sp>
-        <p:nvSpPr>
-          <p:cNvPr id="22" name="Text 20"/>
-          <p:cNvSpPr txBox="1"/>
-          <p:nvPr/>
-        </p:nvSpPr>
-        <p:spPr>
-          <a:xfrm>
-            <a:off x="6537960" y="3950208"/>
-            <a:ext cx="4800600" cy="155448"/>
-          </a:xfrm>
-          <a:prstGeom prst="rect">
-            <a:avLst/>
-          </a:prstGeom>
-          <a:noFill/>
-          <a:ln/>
-        </p:spPr>
-        <p:txBody>
-          <a:bodyPr wrap="square" lIns="0" tIns="0" rIns="0" bIns="0" rtlCol="0" anchor="ctr"/>
-          <a:lstStyle/>
-          <a:p>
-            <a:pPr algn="l" indent="0" marL="0">
+              <a:rPr lang="en-US" sz="1000" dirty="0">
+                <a:solidFill>
+                  <a:srgbClr val="1B2A2F"/>
+                </a:solidFill>
+                <a:latin typeface="Calibri" pitchFamily="34" charset="0"/>
+                <a:ea typeface="Calibri" pitchFamily="34" charset="-122"/>
+                <a:cs typeface="Calibri" pitchFamily="34" charset="-120"/>
+              </a:rPr>
+              <a:t>Necesito cambiar mi hora</a:t>
+            </a:r>
+            <a:endParaRPr lang="en-US" sz="1000" dirty="0"/>
+          </a:p>
+        </p:txBody>
+      </p:sp>
+      <p:sp>
+        <p:nvSpPr>
+          <p:cNvPr id="30" name="Text 28"/>
+          <p:cNvSpPr txBox="1"/>
+          <p:nvPr/>
+        </p:nvSpPr>
+        <p:spPr>
+          <a:xfrm>
+            <a:off x="4663440" y="1984248"/>
+            <a:ext cx="2971800" cy="155448"/>
+          </a:xfrm>
+          <a:prstGeom prst="rect">
+            <a:avLst/>
+          </a:prstGeom>
+          <a:noFill/>
+          <a:ln/>
+        </p:spPr>
+        <p:txBody>
+          <a:bodyPr wrap="square" lIns="0" tIns="0" rIns="0" bIns="0" rtlCol="0" anchor="ctr"/>
+          <a:lstStyle/>
+          <a:p>
+            <a:pPr algn="r" indent="0" marL="0">
               <a:buNone/>
             </a:pPr>
             <a:r>
@@ -8828,7 +8156,7 @@
                 <a:ea typeface="Calibri" pitchFamily="34" charset="-122"/>
                 <a:cs typeface="Calibri" pitchFamily="34" charset="-120"/>
               </a:rPr>
-              <a:t>Bot</a:t>
+              <a:t>Paciente</a:t>
             </a:r>
             <a:endParaRPr lang="en-US" sz="850" dirty="0"/>
           </a:p>
@@ -8836,33 +8164,99 @@
       </p:sp>
       <p:sp>
         <p:nvSpPr>
-          <p:cNvPr id="23" name="Text 21"/>
-          <p:cNvSpPr txBox="1"/>
-          <p:nvPr/>
-        </p:nvSpPr>
-        <p:spPr>
-          <a:xfrm>
-            <a:off x="548640" y="1417320"/>
-            <a:ext cx="5394960" cy="4206240"/>
-          </a:xfrm>
-          <a:prstGeom prst="rect">
-            <a:avLst/>
-          </a:prstGeom>
-          <a:noFill/>
-          <a:ln/>
-        </p:spPr>
-        <p:txBody>
-          <a:bodyPr wrap="square" lIns="0" tIns="0" rIns="0" bIns="0" rtlCol="0" anchor="t"/>
+          <p:cNvPr id="31" name="Shape 29"/>
+          <p:cNvSpPr/>
+          <p:nvPr/>
+        </p:nvSpPr>
+        <p:spPr>
+          <a:xfrm>
+            <a:off x="4663440" y="2788920"/>
+            <a:ext cx="2971800" cy="566928"/>
+          </a:xfrm>
+          <a:prstGeom prst="roundRect">
+            <a:avLst>
+              <a:gd name="adj" fmla="val 16129"/>
+            </a:avLst>
+          </a:prstGeom>
+          <a:solidFill>
+            <a:srgbClr val="028090"/>
+          </a:solidFill>
+          <a:ln w="12700">
+            <a:solidFill>
+              <a:srgbClr val="028090"/>
+            </a:solidFill>
+            <a:prstDash val="solid"/>
+          </a:ln>
+        </p:spPr>
+      </p:sp>
+      <p:sp>
+        <p:nvSpPr>
+          <p:cNvPr id="32" name="Text 30"/>
+          <p:cNvSpPr txBox="1"/>
+          <p:nvPr/>
+        </p:nvSpPr>
+        <p:spPr>
+          <a:xfrm>
+            <a:off x="4809744" y="2788920"/>
+            <a:ext cx="2679192" cy="566928"/>
+          </a:xfrm>
+          <a:prstGeom prst="rect">
+            <a:avLst/>
+          </a:prstGeom>
+          <a:noFill/>
+          <a:ln/>
+        </p:spPr>
+        <p:txBody>
+          <a:bodyPr wrap="square" lIns="0" tIns="0" rIns="0" bIns="0" rtlCol="0" anchor="ctr"/>
           <a:lstStyle/>
           <a:p>
             <a:pPr algn="l" indent="0" marL="0">
               <a:lnSpc>
-                <a:spcPct val="135000"/>
+                <a:spcPct val="105000"/>
               </a:lnSpc>
               <a:buNone/>
             </a:pPr>
             <a:r>
-              <a:rPr lang="en-US" sz="1400" dirty="0">
+              <a:rPr lang="en-US" sz="1000" dirty="0">
+                <a:solidFill>
+                  <a:srgbClr val="FFFFFF"/>
+                </a:solidFill>
+                <a:latin typeface="Calibri" pitchFamily="34" charset="0"/>
+                <a:ea typeface="Calibri" pitchFamily="34" charset="-122"/>
+                <a:cs typeface="Calibri" pitchFamily="34" charset="-120"/>
+              </a:rPr>
+              <a:t>Tienes cita el jueves 15:00. ¿Para cuándo la cambio?</a:t>
+            </a:r>
+            <a:endParaRPr lang="en-US" sz="1000" dirty="0"/>
+          </a:p>
+        </p:txBody>
+      </p:sp>
+      <p:sp>
+        <p:nvSpPr>
+          <p:cNvPr id="33" name="Text 31"/>
+          <p:cNvSpPr txBox="1"/>
+          <p:nvPr/>
+        </p:nvSpPr>
+        <p:spPr>
+          <a:xfrm>
+            <a:off x="4663440" y="2615184"/>
+            <a:ext cx="2971800" cy="155448"/>
+          </a:xfrm>
+          <a:prstGeom prst="rect">
+            <a:avLst/>
+          </a:prstGeom>
+          <a:noFill/>
+          <a:ln/>
+        </p:spPr>
+        <p:txBody>
+          <a:bodyPr wrap="square" lIns="0" tIns="0" rIns="0" bIns="0" rtlCol="0" anchor="ctr"/>
+          <a:lstStyle/>
+          <a:p>
+            <a:pPr algn="l" indent="0" marL="0">
+              <a:buNone/>
+            </a:pPr>
+            <a:r>
+              <a:rPr lang="en-US" sz="850" dirty="0">
                 <a:solidFill>
                   <a:srgbClr val="5C6E70"/>
                 </a:solidFill>
@@ -8870,38 +8264,107 @@
                 <a:ea typeface="Calibri" pitchFamily="34" charset="-122"/>
                 <a:cs typeface="Calibri" pitchFamily="34" charset="-120"/>
               </a:rPr>
-              <a:t>Horarios, precios y previsión vienen directo del documento de fine-tuning de Felipe. El bot mantiene el estado de la conversación (esperando_fonasa, esperando_tramo) para no perder el hilo entre mensajes.</a:t>
-            </a:r>
-            <a:endParaRPr lang="en-US" sz="1400" dirty="0"/>
-          </a:p>
-        </p:txBody>
-      </p:sp>
-      <p:sp>
-        <p:nvSpPr>
-          <p:cNvPr id="24" name="Text 22"/>
-          <p:cNvSpPr txBox="1"/>
-          <p:nvPr/>
-        </p:nvSpPr>
-        <p:spPr>
-          <a:xfrm>
-            <a:off x="548640" y="6355080"/>
-            <a:ext cx="5394960" cy="320040"/>
-          </a:xfrm>
-          <a:prstGeom prst="rect">
-            <a:avLst/>
-          </a:prstGeom>
-          <a:noFill/>
-          <a:ln/>
-        </p:spPr>
-        <p:txBody>
-          <a:bodyPr wrap="square" lIns="0" tIns="0" rIns="0" bIns="0" rtlCol="0" anchor="ctr"/>
-          <a:lstStyle/>
-          <a:p>
-            <a:pPr indent="0" marL="0">
-              <a:buNone/>
-            </a:pPr>
-            <a:r>
-              <a:rPr lang="en-US" sz="1050" i="1" dirty="0">
+              <a:t>Bot</a:t>
+            </a:r>
+            <a:endParaRPr lang="en-US" sz="850" dirty="0"/>
+          </a:p>
+        </p:txBody>
+      </p:sp>
+      <p:sp>
+        <p:nvSpPr>
+          <p:cNvPr id="34" name="Shape 32"/>
+          <p:cNvSpPr/>
+          <p:nvPr/>
+        </p:nvSpPr>
+        <p:spPr>
+          <a:xfrm>
+            <a:off x="4663440" y="3602736"/>
+            <a:ext cx="2971800" cy="384048"/>
+          </a:xfrm>
+          <a:prstGeom prst="roundRect">
+            <a:avLst>
+              <a:gd name="adj" fmla="val 23810"/>
+            </a:avLst>
+          </a:prstGeom>
+          <a:solidFill>
+            <a:srgbClr val="F1F5F4"/>
+          </a:solidFill>
+          <a:ln w="9525">
+            <a:solidFill>
+              <a:srgbClr val="D7E1E0"/>
+            </a:solidFill>
+            <a:prstDash val="solid"/>
+          </a:ln>
+        </p:spPr>
+      </p:sp>
+      <p:sp>
+        <p:nvSpPr>
+          <p:cNvPr id="35" name="Text 33"/>
+          <p:cNvSpPr txBox="1"/>
+          <p:nvPr/>
+        </p:nvSpPr>
+        <p:spPr>
+          <a:xfrm>
+            <a:off x="4809744" y="3602736"/>
+            <a:ext cx="2679192" cy="384048"/>
+          </a:xfrm>
+          <a:prstGeom prst="rect">
+            <a:avLst/>
+          </a:prstGeom>
+          <a:noFill/>
+          <a:ln/>
+        </p:spPr>
+        <p:txBody>
+          <a:bodyPr wrap="square" lIns="0" tIns="0" rIns="0" bIns="0" rtlCol="0" anchor="ctr"/>
+          <a:lstStyle/>
+          <a:p>
+            <a:pPr algn="l" indent="0" marL="0">
+              <a:lnSpc>
+                <a:spcPct val="105000"/>
+              </a:lnSpc>
+              <a:buNone/>
+            </a:pPr>
+            <a:r>
+              <a:rPr lang="en-US" sz="1000" dirty="0">
+                <a:solidFill>
+                  <a:srgbClr val="1B2A2F"/>
+                </a:solidFill>
+                <a:latin typeface="Calibri" pitchFamily="34" charset="0"/>
+                <a:ea typeface="Calibri" pitchFamily="34" charset="-122"/>
+                <a:cs typeface="Calibri" pitchFamily="34" charset="-120"/>
+              </a:rPr>
+              <a:t>Miércoles 11am</a:t>
+            </a:r>
+            <a:endParaRPr lang="en-US" sz="1000" dirty="0"/>
+          </a:p>
+        </p:txBody>
+      </p:sp>
+      <p:sp>
+        <p:nvSpPr>
+          <p:cNvPr id="36" name="Text 34"/>
+          <p:cNvSpPr txBox="1"/>
+          <p:nvPr/>
+        </p:nvSpPr>
+        <p:spPr>
+          <a:xfrm>
+            <a:off x="4663440" y="3429000"/>
+            <a:ext cx="2971800" cy="155448"/>
+          </a:xfrm>
+          <a:prstGeom prst="rect">
+            <a:avLst/>
+          </a:prstGeom>
+          <a:noFill/>
+          <a:ln/>
+        </p:spPr>
+        <p:txBody>
+          <a:bodyPr wrap="square" lIns="0" tIns="0" rIns="0" bIns="0" rtlCol="0" anchor="ctr"/>
+          <a:lstStyle/>
+          <a:p>
+            <a:pPr algn="r" indent="0" marL="0">
+              <a:buNone/>
+            </a:pPr>
+            <a:r>
+              <a:rPr lang="en-US" sz="850" dirty="0">
                 <a:solidFill>
                   <a:srgbClr val="5C6E70"/>
                 </a:solidFill>
@@ -8909,9 +8372,858 @@
                 <a:ea typeface="Calibri" pitchFamily="34" charset="-122"/>
                 <a:cs typeface="Calibri" pitchFamily="34" charset="-120"/>
               </a:rPr>
-              <a:t>Fuente: finetuning_compact_v3_felipe.md</a:t>
-            </a:r>
-            <a:endParaRPr lang="en-US" sz="1050" dirty="0"/>
+              <a:t>Paciente</a:t>
+            </a:r>
+            <a:endParaRPr lang="en-US" sz="850" dirty="0"/>
+          </a:p>
+        </p:txBody>
+      </p:sp>
+      <p:sp>
+        <p:nvSpPr>
+          <p:cNvPr id="37" name="Shape 35"/>
+          <p:cNvSpPr/>
+          <p:nvPr/>
+        </p:nvSpPr>
+        <p:spPr>
+          <a:xfrm>
+            <a:off x="4663440" y="4233672"/>
+            <a:ext cx="2971800" cy="566928"/>
+          </a:xfrm>
+          <a:prstGeom prst="roundRect">
+            <a:avLst>
+              <a:gd name="adj" fmla="val 16129"/>
+            </a:avLst>
+          </a:prstGeom>
+          <a:solidFill>
+            <a:srgbClr val="028090"/>
+          </a:solidFill>
+          <a:ln w="12700">
+            <a:solidFill>
+              <a:srgbClr val="028090"/>
+            </a:solidFill>
+            <a:prstDash val="solid"/>
+          </a:ln>
+        </p:spPr>
+      </p:sp>
+      <p:sp>
+        <p:nvSpPr>
+          <p:cNvPr id="38" name="Text 36"/>
+          <p:cNvSpPr txBox="1"/>
+          <p:nvPr/>
+        </p:nvSpPr>
+        <p:spPr>
+          <a:xfrm>
+            <a:off x="4809744" y="4233672"/>
+            <a:ext cx="2679192" cy="566928"/>
+          </a:xfrm>
+          <a:prstGeom prst="rect">
+            <a:avLst/>
+          </a:prstGeom>
+          <a:noFill/>
+          <a:ln/>
+        </p:spPr>
+        <p:txBody>
+          <a:bodyPr wrap="square" lIns="0" tIns="0" rIns="0" bIns="0" rtlCol="0" anchor="ctr"/>
+          <a:lstStyle/>
+          <a:p>
+            <a:pPr algn="l" indent="0" marL="0">
+              <a:lnSpc>
+                <a:spcPct val="105000"/>
+              </a:lnSpc>
+              <a:buNone/>
+            </a:pPr>
+            <a:r>
+              <a:rPr lang="en-US" sz="1000" dirty="0">
+                <a:solidFill>
+                  <a:srgbClr val="FFFFFF"/>
+                </a:solidFill>
+                <a:latin typeface="Calibri" pitchFamily="34" charset="0"/>
+                <a:ea typeface="Calibri" pitchFamily="34" charset="-122"/>
+                <a:cs typeface="Calibri" pitchFamily="34" charset="-120"/>
+              </a:rPr>
+              <a:t>Confirmo el cambio a miércoles 11:00. ¿Correcto?</a:t>
+            </a:r>
+            <a:endParaRPr lang="en-US" sz="1000" dirty="0"/>
+          </a:p>
+        </p:txBody>
+      </p:sp>
+      <p:sp>
+        <p:nvSpPr>
+          <p:cNvPr id="39" name="Text 37"/>
+          <p:cNvSpPr txBox="1"/>
+          <p:nvPr/>
+        </p:nvSpPr>
+        <p:spPr>
+          <a:xfrm>
+            <a:off x="4663440" y="4059936"/>
+            <a:ext cx="2971800" cy="155448"/>
+          </a:xfrm>
+          <a:prstGeom prst="rect">
+            <a:avLst/>
+          </a:prstGeom>
+          <a:noFill/>
+          <a:ln/>
+        </p:spPr>
+        <p:txBody>
+          <a:bodyPr wrap="square" lIns="0" tIns="0" rIns="0" bIns="0" rtlCol="0" anchor="ctr"/>
+          <a:lstStyle/>
+          <a:p>
+            <a:pPr algn="l" indent="0" marL="0">
+              <a:buNone/>
+            </a:pPr>
+            <a:r>
+              <a:rPr lang="en-US" sz="850" dirty="0">
+                <a:solidFill>
+                  <a:srgbClr val="5C6E70"/>
+                </a:solidFill>
+                <a:latin typeface="Calibri" pitchFamily="34" charset="0"/>
+                <a:ea typeface="Calibri" pitchFamily="34" charset="-122"/>
+                <a:cs typeface="Calibri" pitchFamily="34" charset="-120"/>
+              </a:rPr>
+              <a:t>Bot</a:t>
+            </a:r>
+            <a:endParaRPr lang="en-US" sz="850" dirty="0"/>
+          </a:p>
+        </p:txBody>
+      </p:sp>
+      <p:sp>
+        <p:nvSpPr>
+          <p:cNvPr id="40" name="Shape 38"/>
+          <p:cNvSpPr/>
+          <p:nvPr/>
+        </p:nvSpPr>
+        <p:spPr>
+          <a:xfrm>
+            <a:off x="4663440" y="5047488"/>
+            <a:ext cx="2971800" cy="384048"/>
+          </a:xfrm>
+          <a:prstGeom prst="roundRect">
+            <a:avLst>
+              <a:gd name="adj" fmla="val 23810"/>
+            </a:avLst>
+          </a:prstGeom>
+          <a:solidFill>
+            <a:srgbClr val="F1F5F4"/>
+          </a:solidFill>
+          <a:ln w="9525">
+            <a:solidFill>
+              <a:srgbClr val="D7E1E0"/>
+            </a:solidFill>
+            <a:prstDash val="solid"/>
+          </a:ln>
+        </p:spPr>
+      </p:sp>
+      <p:sp>
+        <p:nvSpPr>
+          <p:cNvPr id="41" name="Text 39"/>
+          <p:cNvSpPr txBox="1"/>
+          <p:nvPr/>
+        </p:nvSpPr>
+        <p:spPr>
+          <a:xfrm>
+            <a:off x="4809744" y="5047488"/>
+            <a:ext cx="2679192" cy="384048"/>
+          </a:xfrm>
+          <a:prstGeom prst="rect">
+            <a:avLst/>
+          </a:prstGeom>
+          <a:noFill/>
+          <a:ln/>
+        </p:spPr>
+        <p:txBody>
+          <a:bodyPr wrap="square" lIns="0" tIns="0" rIns="0" bIns="0" rtlCol="0" anchor="ctr"/>
+          <a:lstStyle/>
+          <a:p>
+            <a:pPr algn="l" indent="0" marL="0">
+              <a:lnSpc>
+                <a:spcPct val="105000"/>
+              </a:lnSpc>
+              <a:buNone/>
+            </a:pPr>
+            <a:r>
+              <a:rPr lang="en-US" sz="1000" dirty="0">
+                <a:solidFill>
+                  <a:srgbClr val="1B2A2F"/>
+                </a:solidFill>
+                <a:latin typeface="Calibri" pitchFamily="34" charset="0"/>
+                <a:ea typeface="Calibri" pitchFamily="34" charset="-122"/>
+                <a:cs typeface="Calibri" pitchFamily="34" charset="-120"/>
+              </a:rPr>
+              <a:t>Sí</a:t>
+            </a:r>
+            <a:endParaRPr lang="en-US" sz="1000" dirty="0"/>
+          </a:p>
+        </p:txBody>
+      </p:sp>
+      <p:sp>
+        <p:nvSpPr>
+          <p:cNvPr id="42" name="Text 40"/>
+          <p:cNvSpPr txBox="1"/>
+          <p:nvPr/>
+        </p:nvSpPr>
+        <p:spPr>
+          <a:xfrm>
+            <a:off x="4663440" y="4873752"/>
+            <a:ext cx="2971800" cy="155448"/>
+          </a:xfrm>
+          <a:prstGeom prst="rect">
+            <a:avLst/>
+          </a:prstGeom>
+          <a:noFill/>
+          <a:ln/>
+        </p:spPr>
+        <p:txBody>
+          <a:bodyPr wrap="square" lIns="0" tIns="0" rIns="0" bIns="0" rtlCol="0" anchor="ctr"/>
+          <a:lstStyle/>
+          <a:p>
+            <a:pPr algn="r" indent="0" marL="0">
+              <a:buNone/>
+            </a:pPr>
+            <a:r>
+              <a:rPr lang="en-US" sz="850" dirty="0">
+                <a:solidFill>
+                  <a:srgbClr val="5C6E70"/>
+                </a:solidFill>
+                <a:latin typeface="Calibri" pitchFamily="34" charset="0"/>
+                <a:ea typeface="Calibri" pitchFamily="34" charset="-122"/>
+                <a:cs typeface="Calibri" pitchFamily="34" charset="-120"/>
+              </a:rPr>
+              <a:t>Paciente</a:t>
+            </a:r>
+            <a:endParaRPr lang="en-US" sz="850" dirty="0"/>
+          </a:p>
+        </p:txBody>
+      </p:sp>
+      <p:sp>
+        <p:nvSpPr>
+          <p:cNvPr id="43" name="Shape 41"/>
+          <p:cNvSpPr/>
+          <p:nvPr/>
+        </p:nvSpPr>
+        <p:spPr>
+          <a:xfrm>
+            <a:off x="4663440" y="5678424"/>
+            <a:ext cx="2971800" cy="384048"/>
+          </a:xfrm>
+          <a:prstGeom prst="roundRect">
+            <a:avLst>
+              <a:gd name="adj" fmla="val 23810"/>
+            </a:avLst>
+          </a:prstGeom>
+          <a:solidFill>
+            <a:srgbClr val="028090"/>
+          </a:solidFill>
+          <a:ln w="12700">
+            <a:solidFill>
+              <a:srgbClr val="028090"/>
+            </a:solidFill>
+            <a:prstDash val="solid"/>
+          </a:ln>
+        </p:spPr>
+      </p:sp>
+      <p:sp>
+        <p:nvSpPr>
+          <p:cNvPr id="44" name="Text 42"/>
+          <p:cNvSpPr txBox="1"/>
+          <p:nvPr/>
+        </p:nvSpPr>
+        <p:spPr>
+          <a:xfrm>
+            <a:off x="4809744" y="5678424"/>
+            <a:ext cx="2679192" cy="384048"/>
+          </a:xfrm>
+          <a:prstGeom prst="rect">
+            <a:avLst/>
+          </a:prstGeom>
+          <a:noFill/>
+          <a:ln/>
+        </p:spPr>
+        <p:txBody>
+          <a:bodyPr wrap="square" lIns="0" tIns="0" rIns="0" bIns="0" rtlCol="0" anchor="ctr"/>
+          <a:lstStyle/>
+          <a:p>
+            <a:pPr algn="l" indent="0" marL="0">
+              <a:lnSpc>
+                <a:spcPct val="105000"/>
+              </a:lnSpc>
+              <a:buNone/>
+            </a:pPr>
+            <a:r>
+              <a:rPr lang="en-US" sz="1000" dirty="0">
+                <a:solidFill>
+                  <a:srgbClr val="FFFFFF"/>
+                </a:solidFill>
+                <a:latin typeface="Calibri" pitchFamily="34" charset="0"/>
+                <a:ea typeface="Calibri" pitchFamily="34" charset="-122"/>
+                <a:cs typeface="Calibri" pitchFamily="34" charset="-120"/>
+              </a:rPr>
+              <a:t>Listo, cita reagendada.</a:t>
+            </a:r>
+            <a:endParaRPr lang="en-US" sz="1000" dirty="0"/>
+          </a:p>
+        </p:txBody>
+      </p:sp>
+      <p:sp>
+        <p:nvSpPr>
+          <p:cNvPr id="45" name="Text 43"/>
+          <p:cNvSpPr txBox="1"/>
+          <p:nvPr/>
+        </p:nvSpPr>
+        <p:spPr>
+          <a:xfrm>
+            <a:off x="4663440" y="5504688"/>
+            <a:ext cx="2971800" cy="155448"/>
+          </a:xfrm>
+          <a:prstGeom prst="rect">
+            <a:avLst/>
+          </a:prstGeom>
+          <a:noFill/>
+          <a:ln/>
+        </p:spPr>
+        <p:txBody>
+          <a:bodyPr wrap="square" lIns="0" tIns="0" rIns="0" bIns="0" rtlCol="0" anchor="ctr"/>
+          <a:lstStyle/>
+          <a:p>
+            <a:pPr algn="l" indent="0" marL="0">
+              <a:buNone/>
+            </a:pPr>
+            <a:r>
+              <a:rPr lang="en-US" sz="850" dirty="0">
+                <a:solidFill>
+                  <a:srgbClr val="5C6E70"/>
+                </a:solidFill>
+                <a:latin typeface="Calibri" pitchFamily="34" charset="0"/>
+                <a:ea typeface="Calibri" pitchFamily="34" charset="-122"/>
+                <a:cs typeface="Calibri" pitchFamily="34" charset="-120"/>
+              </a:rPr>
+              <a:t>Bot</a:t>
+            </a:r>
+            <a:endParaRPr lang="en-US" sz="850" dirty="0"/>
+          </a:p>
+        </p:txBody>
+      </p:sp>
+      <p:sp>
+        <p:nvSpPr>
+          <p:cNvPr id="46" name="Shape 44"/>
+          <p:cNvSpPr/>
+          <p:nvPr/>
+        </p:nvSpPr>
+        <p:spPr>
+          <a:xfrm>
+            <a:off x="8321040" y="1371600"/>
+            <a:ext cx="3429000" cy="384048"/>
+          </a:xfrm>
+          <a:prstGeom prst="roundRect">
+            <a:avLst>
+              <a:gd name="adj" fmla="val 19048"/>
+            </a:avLst>
+          </a:prstGeom>
+          <a:solidFill>
+            <a:srgbClr val="028090"/>
+          </a:solidFill>
+          <a:ln w="12700">
+            <a:solidFill>
+              <a:srgbClr val="028090"/>
+            </a:solidFill>
+            <a:prstDash val="solid"/>
+          </a:ln>
+        </p:spPr>
+      </p:sp>
+      <p:sp>
+        <p:nvSpPr>
+          <p:cNvPr id="47" name="Text 45"/>
+          <p:cNvSpPr txBox="1"/>
+          <p:nvPr/>
+        </p:nvSpPr>
+        <p:spPr>
+          <a:xfrm>
+            <a:off x="8321040" y="1371600"/>
+            <a:ext cx="3429000" cy="384048"/>
+          </a:xfrm>
+          <a:prstGeom prst="rect">
+            <a:avLst/>
+          </a:prstGeom>
+          <a:noFill/>
+          <a:ln/>
+        </p:spPr>
+        <p:txBody>
+          <a:bodyPr wrap="square" lIns="0" tIns="0" rIns="0" bIns="0" rtlCol="0" anchor="ctr"/>
+          <a:lstStyle/>
+          <a:p>
+            <a:pPr algn="ctr" indent="0" marL="0">
+              <a:buNone/>
+            </a:pPr>
+            <a:r>
+              <a:rPr lang="en-US" sz="1300" b="1" dirty="0">
+                <a:solidFill>
+                  <a:srgbClr val="FFFFFF"/>
+                </a:solidFill>
+                <a:latin typeface="Calibri" pitchFamily="34" charset="0"/>
+                <a:ea typeface="Calibri" pitchFamily="34" charset="-122"/>
+                <a:cs typeface="Calibri" pitchFamily="34" charset="-120"/>
+              </a:rPr>
+              <a:t>Cancelar cita</a:t>
+            </a:r>
+            <a:endParaRPr lang="en-US" sz="1300" dirty="0"/>
+          </a:p>
+        </p:txBody>
+      </p:sp>
+      <p:sp>
+        <p:nvSpPr>
+          <p:cNvPr id="48" name="Shape 46"/>
+          <p:cNvSpPr/>
+          <p:nvPr/>
+        </p:nvSpPr>
+        <p:spPr>
+          <a:xfrm>
+            <a:off x="8321040" y="1828800"/>
+            <a:ext cx="3429000" cy="4709160"/>
+          </a:xfrm>
+          <a:prstGeom prst="roundRect">
+            <a:avLst>
+              <a:gd name="adj" fmla="val 3733"/>
+            </a:avLst>
+          </a:prstGeom>
+          <a:solidFill>
+            <a:srgbClr val="F1F7F6"/>
+          </a:solidFill>
+          <a:ln w="12700">
+            <a:solidFill>
+              <a:srgbClr val="F1F7F6"/>
+            </a:solidFill>
+            <a:prstDash val="solid"/>
+          </a:ln>
+        </p:spPr>
+      </p:sp>
+      <p:sp>
+        <p:nvSpPr>
+          <p:cNvPr id="49" name="Shape 47"/>
+          <p:cNvSpPr/>
+          <p:nvPr/>
+        </p:nvSpPr>
+        <p:spPr>
+          <a:xfrm>
+            <a:off x="8549640" y="2157984"/>
+            <a:ext cx="2971800" cy="384048"/>
+          </a:xfrm>
+          <a:prstGeom prst="roundRect">
+            <a:avLst>
+              <a:gd name="adj" fmla="val 23810"/>
+            </a:avLst>
+          </a:prstGeom>
+          <a:solidFill>
+            <a:srgbClr val="F1F5F4"/>
+          </a:solidFill>
+          <a:ln w="9525">
+            <a:solidFill>
+              <a:srgbClr val="D7E1E0"/>
+            </a:solidFill>
+            <a:prstDash val="solid"/>
+          </a:ln>
+        </p:spPr>
+      </p:sp>
+      <p:sp>
+        <p:nvSpPr>
+          <p:cNvPr id="50" name="Text 48"/>
+          <p:cNvSpPr txBox="1"/>
+          <p:nvPr/>
+        </p:nvSpPr>
+        <p:spPr>
+          <a:xfrm>
+            <a:off x="8695944" y="2157984"/>
+            <a:ext cx="2679192" cy="384048"/>
+          </a:xfrm>
+          <a:prstGeom prst="rect">
+            <a:avLst/>
+          </a:prstGeom>
+          <a:noFill/>
+          <a:ln/>
+        </p:spPr>
+        <p:txBody>
+          <a:bodyPr wrap="square" lIns="0" tIns="0" rIns="0" bIns="0" rtlCol="0" anchor="ctr"/>
+          <a:lstStyle/>
+          <a:p>
+            <a:pPr algn="l" indent="0" marL="0">
+              <a:lnSpc>
+                <a:spcPct val="105000"/>
+              </a:lnSpc>
+              <a:buNone/>
+            </a:pPr>
+            <a:r>
+              <a:rPr lang="en-US" sz="1000" dirty="0">
+                <a:solidFill>
+                  <a:srgbClr val="1B2A2F"/>
+                </a:solidFill>
+                <a:latin typeface="Calibri" pitchFamily="34" charset="0"/>
+                <a:ea typeface="Calibri" pitchFamily="34" charset="-122"/>
+                <a:cs typeface="Calibri" pitchFamily="34" charset="-120"/>
+              </a:rPr>
+              <a:t>Quiero cancelar mi cita</a:t>
+            </a:r>
+            <a:endParaRPr lang="en-US" sz="1000" dirty="0"/>
+          </a:p>
+        </p:txBody>
+      </p:sp>
+      <p:sp>
+        <p:nvSpPr>
+          <p:cNvPr id="51" name="Text 49"/>
+          <p:cNvSpPr txBox="1"/>
+          <p:nvPr/>
+        </p:nvSpPr>
+        <p:spPr>
+          <a:xfrm>
+            <a:off x="8549640" y="1984248"/>
+            <a:ext cx="2971800" cy="155448"/>
+          </a:xfrm>
+          <a:prstGeom prst="rect">
+            <a:avLst/>
+          </a:prstGeom>
+          <a:noFill/>
+          <a:ln/>
+        </p:spPr>
+        <p:txBody>
+          <a:bodyPr wrap="square" lIns="0" tIns="0" rIns="0" bIns="0" rtlCol="0" anchor="ctr"/>
+          <a:lstStyle/>
+          <a:p>
+            <a:pPr algn="r" indent="0" marL="0">
+              <a:buNone/>
+            </a:pPr>
+            <a:r>
+              <a:rPr lang="en-US" sz="850" dirty="0">
+                <a:solidFill>
+                  <a:srgbClr val="5C6E70"/>
+                </a:solidFill>
+                <a:latin typeface="Calibri" pitchFamily="34" charset="0"/>
+                <a:ea typeface="Calibri" pitchFamily="34" charset="-122"/>
+                <a:cs typeface="Calibri" pitchFamily="34" charset="-120"/>
+              </a:rPr>
+              <a:t>Paciente</a:t>
+            </a:r>
+            <a:endParaRPr lang="en-US" sz="850" dirty="0"/>
+          </a:p>
+        </p:txBody>
+      </p:sp>
+      <p:sp>
+        <p:nvSpPr>
+          <p:cNvPr id="52" name="Shape 50"/>
+          <p:cNvSpPr/>
+          <p:nvPr/>
+        </p:nvSpPr>
+        <p:spPr>
+          <a:xfrm>
+            <a:off x="8549640" y="2788920"/>
+            <a:ext cx="2971800" cy="566928"/>
+          </a:xfrm>
+          <a:prstGeom prst="roundRect">
+            <a:avLst>
+              <a:gd name="adj" fmla="val 16129"/>
+            </a:avLst>
+          </a:prstGeom>
+          <a:solidFill>
+            <a:srgbClr val="028090"/>
+          </a:solidFill>
+          <a:ln w="12700">
+            <a:solidFill>
+              <a:srgbClr val="028090"/>
+            </a:solidFill>
+            <a:prstDash val="solid"/>
+          </a:ln>
+        </p:spPr>
+      </p:sp>
+      <p:sp>
+        <p:nvSpPr>
+          <p:cNvPr id="53" name="Text 51"/>
+          <p:cNvSpPr txBox="1"/>
+          <p:nvPr/>
+        </p:nvSpPr>
+        <p:spPr>
+          <a:xfrm>
+            <a:off x="8695944" y="2788920"/>
+            <a:ext cx="2679192" cy="566928"/>
+          </a:xfrm>
+          <a:prstGeom prst="rect">
+            <a:avLst/>
+          </a:prstGeom>
+          <a:noFill/>
+          <a:ln/>
+        </p:spPr>
+        <p:txBody>
+          <a:bodyPr wrap="square" lIns="0" tIns="0" rIns="0" bIns="0" rtlCol="0" anchor="ctr"/>
+          <a:lstStyle/>
+          <a:p>
+            <a:pPr algn="l" indent="0" marL="0">
+              <a:lnSpc>
+                <a:spcPct val="105000"/>
+              </a:lnSpc>
+              <a:buNone/>
+            </a:pPr>
+            <a:r>
+              <a:rPr lang="en-US" sz="1000" dirty="0">
+                <a:solidFill>
+                  <a:srgbClr val="FFFFFF"/>
+                </a:solidFill>
+                <a:latin typeface="Calibri" pitchFamily="34" charset="0"/>
+                <a:ea typeface="Calibri" pitchFamily="34" charset="-122"/>
+                <a:cs typeface="Calibri" pitchFamily="34" charset="-120"/>
+              </a:rPr>
+              <a:t>Tienes cita el jueves 15:00. ¿Confirmas la cancelación?</a:t>
+            </a:r>
+            <a:endParaRPr lang="en-US" sz="1000" dirty="0"/>
+          </a:p>
+        </p:txBody>
+      </p:sp>
+      <p:sp>
+        <p:nvSpPr>
+          <p:cNvPr id="54" name="Text 52"/>
+          <p:cNvSpPr txBox="1"/>
+          <p:nvPr/>
+        </p:nvSpPr>
+        <p:spPr>
+          <a:xfrm>
+            <a:off x="8549640" y="2615184"/>
+            <a:ext cx="2971800" cy="155448"/>
+          </a:xfrm>
+          <a:prstGeom prst="rect">
+            <a:avLst/>
+          </a:prstGeom>
+          <a:noFill/>
+          <a:ln/>
+        </p:spPr>
+        <p:txBody>
+          <a:bodyPr wrap="square" lIns="0" tIns="0" rIns="0" bIns="0" rtlCol="0" anchor="ctr"/>
+          <a:lstStyle/>
+          <a:p>
+            <a:pPr algn="l" indent="0" marL="0">
+              <a:buNone/>
+            </a:pPr>
+            <a:r>
+              <a:rPr lang="en-US" sz="850" dirty="0">
+                <a:solidFill>
+                  <a:srgbClr val="5C6E70"/>
+                </a:solidFill>
+                <a:latin typeface="Calibri" pitchFamily="34" charset="0"/>
+                <a:ea typeface="Calibri" pitchFamily="34" charset="-122"/>
+                <a:cs typeface="Calibri" pitchFamily="34" charset="-120"/>
+              </a:rPr>
+              <a:t>Bot</a:t>
+            </a:r>
+            <a:endParaRPr lang="en-US" sz="850" dirty="0"/>
+          </a:p>
+        </p:txBody>
+      </p:sp>
+      <p:sp>
+        <p:nvSpPr>
+          <p:cNvPr id="55" name="Shape 53"/>
+          <p:cNvSpPr/>
+          <p:nvPr/>
+        </p:nvSpPr>
+        <p:spPr>
+          <a:xfrm>
+            <a:off x="8549640" y="3602736"/>
+            <a:ext cx="2971800" cy="384048"/>
+          </a:xfrm>
+          <a:prstGeom prst="roundRect">
+            <a:avLst>
+              <a:gd name="adj" fmla="val 23810"/>
+            </a:avLst>
+          </a:prstGeom>
+          <a:solidFill>
+            <a:srgbClr val="F1F5F4"/>
+          </a:solidFill>
+          <a:ln w="9525">
+            <a:solidFill>
+              <a:srgbClr val="D7E1E0"/>
+            </a:solidFill>
+            <a:prstDash val="solid"/>
+          </a:ln>
+        </p:spPr>
+      </p:sp>
+      <p:sp>
+        <p:nvSpPr>
+          <p:cNvPr id="56" name="Text 54"/>
+          <p:cNvSpPr txBox="1"/>
+          <p:nvPr/>
+        </p:nvSpPr>
+        <p:spPr>
+          <a:xfrm>
+            <a:off x="8695944" y="3602736"/>
+            <a:ext cx="2679192" cy="384048"/>
+          </a:xfrm>
+          <a:prstGeom prst="rect">
+            <a:avLst/>
+          </a:prstGeom>
+          <a:noFill/>
+          <a:ln/>
+        </p:spPr>
+        <p:txBody>
+          <a:bodyPr wrap="square" lIns="0" tIns="0" rIns="0" bIns="0" rtlCol="0" anchor="ctr"/>
+          <a:lstStyle/>
+          <a:p>
+            <a:pPr algn="l" indent="0" marL="0">
+              <a:lnSpc>
+                <a:spcPct val="105000"/>
+              </a:lnSpc>
+              <a:buNone/>
+            </a:pPr>
+            <a:r>
+              <a:rPr lang="en-US" sz="1000" dirty="0">
+                <a:solidFill>
+                  <a:srgbClr val="1B2A2F"/>
+                </a:solidFill>
+                <a:latin typeface="Calibri" pitchFamily="34" charset="0"/>
+                <a:ea typeface="Calibri" pitchFamily="34" charset="-122"/>
+                <a:cs typeface="Calibri" pitchFamily="34" charset="-120"/>
+              </a:rPr>
+              <a:t>Sí</a:t>
+            </a:r>
+            <a:endParaRPr lang="en-US" sz="1000" dirty="0"/>
+          </a:p>
+        </p:txBody>
+      </p:sp>
+      <p:sp>
+        <p:nvSpPr>
+          <p:cNvPr id="57" name="Text 55"/>
+          <p:cNvSpPr txBox="1"/>
+          <p:nvPr/>
+        </p:nvSpPr>
+        <p:spPr>
+          <a:xfrm>
+            <a:off x="8549640" y="3429000"/>
+            <a:ext cx="2971800" cy="155448"/>
+          </a:xfrm>
+          <a:prstGeom prst="rect">
+            <a:avLst/>
+          </a:prstGeom>
+          <a:noFill/>
+          <a:ln/>
+        </p:spPr>
+        <p:txBody>
+          <a:bodyPr wrap="square" lIns="0" tIns="0" rIns="0" bIns="0" rtlCol="0" anchor="ctr"/>
+          <a:lstStyle/>
+          <a:p>
+            <a:pPr algn="r" indent="0" marL="0">
+              <a:buNone/>
+            </a:pPr>
+            <a:r>
+              <a:rPr lang="en-US" sz="850" dirty="0">
+                <a:solidFill>
+                  <a:srgbClr val="5C6E70"/>
+                </a:solidFill>
+                <a:latin typeface="Calibri" pitchFamily="34" charset="0"/>
+                <a:ea typeface="Calibri" pitchFamily="34" charset="-122"/>
+                <a:cs typeface="Calibri" pitchFamily="34" charset="-120"/>
+              </a:rPr>
+              <a:t>Paciente</a:t>
+            </a:r>
+            <a:endParaRPr lang="en-US" sz="850" dirty="0"/>
+          </a:p>
+        </p:txBody>
+      </p:sp>
+      <p:sp>
+        <p:nvSpPr>
+          <p:cNvPr id="58" name="Shape 56"/>
+          <p:cNvSpPr/>
+          <p:nvPr/>
+        </p:nvSpPr>
+        <p:spPr>
+          <a:xfrm>
+            <a:off x="8549640" y="4233672"/>
+            <a:ext cx="2971800" cy="384048"/>
+          </a:xfrm>
+          <a:prstGeom prst="roundRect">
+            <a:avLst>
+              <a:gd name="adj" fmla="val 23810"/>
+            </a:avLst>
+          </a:prstGeom>
+          <a:solidFill>
+            <a:srgbClr val="028090"/>
+          </a:solidFill>
+          <a:ln w="12700">
+            <a:solidFill>
+              <a:srgbClr val="028090"/>
+            </a:solidFill>
+            <a:prstDash val="solid"/>
+          </a:ln>
+        </p:spPr>
+      </p:sp>
+      <p:sp>
+        <p:nvSpPr>
+          <p:cNvPr id="59" name="Text 57"/>
+          <p:cNvSpPr txBox="1"/>
+          <p:nvPr/>
+        </p:nvSpPr>
+        <p:spPr>
+          <a:xfrm>
+            <a:off x="8695944" y="4233672"/>
+            <a:ext cx="2679192" cy="384048"/>
+          </a:xfrm>
+          <a:prstGeom prst="rect">
+            <a:avLst/>
+          </a:prstGeom>
+          <a:noFill/>
+          <a:ln/>
+        </p:spPr>
+        <p:txBody>
+          <a:bodyPr wrap="square" lIns="0" tIns="0" rIns="0" bIns="0" rtlCol="0" anchor="ctr"/>
+          <a:lstStyle/>
+          <a:p>
+            <a:pPr algn="l" indent="0" marL="0">
+              <a:lnSpc>
+                <a:spcPct val="105000"/>
+              </a:lnSpc>
+              <a:buNone/>
+            </a:pPr>
+            <a:r>
+              <a:rPr lang="en-US" sz="1000" dirty="0">
+                <a:solidFill>
+                  <a:srgbClr val="FFFFFF"/>
+                </a:solidFill>
+                <a:latin typeface="Calibri" pitchFamily="34" charset="0"/>
+                <a:ea typeface="Calibri" pitchFamily="34" charset="-122"/>
+                <a:cs typeface="Calibri" pitchFamily="34" charset="-120"/>
+              </a:rPr>
+              <a:t>Cita cancelada.</a:t>
+            </a:r>
+            <a:endParaRPr lang="en-US" sz="1000" dirty="0"/>
+          </a:p>
+        </p:txBody>
+      </p:sp>
+      <p:sp>
+        <p:nvSpPr>
+          <p:cNvPr id="60" name="Text 58"/>
+          <p:cNvSpPr txBox="1"/>
+          <p:nvPr/>
+        </p:nvSpPr>
+        <p:spPr>
+          <a:xfrm>
+            <a:off x="8549640" y="4059936"/>
+            <a:ext cx="2971800" cy="155448"/>
+          </a:xfrm>
+          <a:prstGeom prst="rect">
+            <a:avLst/>
+          </a:prstGeom>
+          <a:noFill/>
+          <a:ln/>
+        </p:spPr>
+        <p:txBody>
+          <a:bodyPr wrap="square" lIns="0" tIns="0" rIns="0" bIns="0" rtlCol="0" anchor="ctr"/>
+          <a:lstStyle/>
+          <a:p>
+            <a:pPr algn="l" indent="0" marL="0">
+              <a:buNone/>
+            </a:pPr>
+            <a:r>
+              <a:rPr lang="en-US" sz="850" dirty="0">
+                <a:solidFill>
+                  <a:srgbClr val="5C6E70"/>
+                </a:solidFill>
+                <a:latin typeface="Calibri" pitchFamily="34" charset="0"/>
+                <a:ea typeface="Calibri" pitchFamily="34" charset="-122"/>
+                <a:cs typeface="Calibri" pitchFamily="34" charset="-120"/>
+              </a:rPr>
+              <a:t>Bot</a:t>
+            </a:r>
+            <a:endParaRPr lang="en-US" sz="850" dirty="0"/>
           </a:p>
         </p:txBody>
       </p:sp>
@@ -9019,7 +9331,7 @@
                 <a:ea typeface="Cambria" pitchFamily="34" charset="-122"/>
                 <a:cs typeface="Cambria" pitchFamily="34" charset="-120"/>
               </a:rPr>
-              <a:t>Derivación a Felipe</a:t>
+              <a:t>Consultas generales</a:t>
             </a:r>
             <a:endParaRPr lang="en-US" sz="2800" dirty="0"/>
           </a:p>
@@ -9033,8 +9345,8 @@
         </p:nvSpPr>
         <p:spPr>
           <a:xfrm>
-            <a:off x="6263640" y="384048"/>
-            <a:ext cx="5349240" cy="6309360"/>
+            <a:off x="6263640" y="365760"/>
+            <a:ext cx="5349240" cy="6355080"/>
           </a:xfrm>
           <a:prstGeom prst="roundRect">
             <a:avLst>
@@ -9060,7 +9372,7 @@
         </p:nvSpPr>
         <p:spPr>
           <a:xfrm>
-            <a:off x="6537960" y="786384"/>
+            <a:off x="6537960" y="694944"/>
             <a:ext cx="4800600" cy="384048"/>
           </a:xfrm>
           <a:prstGeom prst="roundRect">
@@ -9087,7 +9399,7 @@
         </p:nvSpPr>
         <p:spPr>
           <a:xfrm>
-            <a:off x="6684264" y="786384"/>
+            <a:off x="6684264" y="694944"/>
             <a:ext cx="4507992" cy="384048"/>
           </a:xfrm>
           <a:prstGeom prst="rect">
@@ -9115,7 +9427,7 @@
                 <a:ea typeface="Calibri" pitchFamily="34" charset="-122"/>
                 <a:cs typeface="Calibri" pitchFamily="34" charset="-120"/>
               </a:rPr>
-              <a:t>Tengo dolor en ambas rodillas</a:t>
+              <a:t>¿Cuánto vale la sesión?</a:t>
             </a:r>
             <a:endParaRPr lang="en-US" sz="1150" dirty="0"/>
           </a:p>
@@ -9129,7 +9441,7 @@
         </p:nvSpPr>
         <p:spPr>
           <a:xfrm>
-            <a:off x="6537960" y="612648"/>
+            <a:off x="6537960" y="521208"/>
             <a:ext cx="4800600" cy="155448"/>
           </a:xfrm>
           <a:prstGeom prst="rect">
@@ -9168,12 +9480,12 @@
         </p:nvSpPr>
         <p:spPr>
           <a:xfrm>
-            <a:off x="6537960" y="1453896"/>
-            <a:ext cx="4800600" cy="566928"/>
+            <a:off x="6537960" y="1298448"/>
+            <a:ext cx="4800600" cy="384048"/>
           </a:xfrm>
           <a:prstGeom prst="roundRect">
             <a:avLst>
-              <a:gd name="adj" fmla="val 16129"/>
+              <a:gd name="adj" fmla="val 23810"/>
             </a:avLst>
           </a:prstGeom>
           <a:solidFill>
@@ -9195,8 +9507,8 @@
         </p:nvSpPr>
         <p:spPr>
           <a:xfrm>
-            <a:off x="6684264" y="1453896"/>
-            <a:ext cx="4507992" cy="566928"/>
+            <a:off x="6684264" y="1298448"/>
+            <a:ext cx="4507992" cy="384048"/>
           </a:xfrm>
           <a:prstGeom prst="rect">
             <a:avLst/>
@@ -9223,7 +9535,7 @@
                 <a:ea typeface="Calibri" pitchFamily="34" charset="-122"/>
                 <a:cs typeface="Calibri" pitchFamily="34" charset="-120"/>
               </a:rPr>
-              <a:t>Gracias por la información, en un momento Felipe te contacta personalmente para coordinar tu tratamiento.</a:t>
+              <a:t>¿Por fonasa? Así te paso los precios.</a:t>
             </a:r>
             <a:endParaRPr lang="en-US" sz="1150" dirty="0"/>
           </a:p>
@@ -9237,7 +9549,7 @@
         </p:nvSpPr>
         <p:spPr>
           <a:xfrm>
-            <a:off x="6537960" y="1280160"/>
+            <a:off x="6537960" y="1124712"/>
             <a:ext cx="4800600" cy="155448"/>
           </a:xfrm>
           <a:prstGeom prst="rect">
@@ -9270,7 +9582,488 @@
       </p:sp>
       <p:sp>
         <p:nvSpPr>
-          <p:cNvPr id="11" name="Text 9"/>
+          <p:cNvPr id="11" name="Shape 9"/>
+          <p:cNvSpPr/>
+          <p:nvPr/>
+        </p:nvSpPr>
+        <p:spPr>
+          <a:xfrm>
+            <a:off x="6537960" y="1901952"/>
+            <a:ext cx="4800600" cy="384048"/>
+          </a:xfrm>
+          <a:prstGeom prst="roundRect">
+            <a:avLst>
+              <a:gd name="adj" fmla="val 23810"/>
+            </a:avLst>
+          </a:prstGeom>
+          <a:solidFill>
+            <a:srgbClr val="F1F5F4"/>
+          </a:solidFill>
+          <a:ln w="9525">
+            <a:solidFill>
+              <a:srgbClr val="D7E1E0"/>
+            </a:solidFill>
+            <a:prstDash val="solid"/>
+          </a:ln>
+        </p:spPr>
+      </p:sp>
+      <p:sp>
+        <p:nvSpPr>
+          <p:cNvPr id="12" name="Text 10"/>
+          <p:cNvSpPr txBox="1"/>
+          <p:nvPr/>
+        </p:nvSpPr>
+        <p:spPr>
+          <a:xfrm>
+            <a:off x="6684264" y="1901952"/>
+            <a:ext cx="4507992" cy="384048"/>
+          </a:xfrm>
+          <a:prstGeom prst="rect">
+            <a:avLst/>
+          </a:prstGeom>
+          <a:noFill/>
+          <a:ln/>
+        </p:spPr>
+        <p:txBody>
+          <a:bodyPr wrap="square" lIns="0" tIns="0" rIns="0" bIns="0" rtlCol="0" anchor="ctr"/>
+          <a:lstStyle/>
+          <a:p>
+            <a:pPr algn="l" indent="0" marL="0">
+              <a:lnSpc>
+                <a:spcPct val="105000"/>
+              </a:lnSpc>
+              <a:buNone/>
+            </a:pPr>
+            <a:r>
+              <a:rPr lang="en-US" sz="1150" dirty="0">
+                <a:solidFill>
+                  <a:srgbClr val="1B2A2F"/>
+                </a:solidFill>
+                <a:latin typeface="Calibri" pitchFamily="34" charset="0"/>
+                <a:ea typeface="Calibri" pitchFamily="34" charset="-122"/>
+                <a:cs typeface="Calibri" pitchFamily="34" charset="-120"/>
+              </a:rPr>
+              <a:t>Sí</a:t>
+            </a:r>
+            <a:endParaRPr lang="en-US" sz="1150" dirty="0"/>
+          </a:p>
+        </p:txBody>
+      </p:sp>
+      <p:sp>
+        <p:nvSpPr>
+          <p:cNvPr id="13" name="Text 11"/>
+          <p:cNvSpPr txBox="1"/>
+          <p:nvPr/>
+        </p:nvSpPr>
+        <p:spPr>
+          <a:xfrm>
+            <a:off x="6537960" y="1728216"/>
+            <a:ext cx="4800600" cy="155448"/>
+          </a:xfrm>
+          <a:prstGeom prst="rect">
+            <a:avLst/>
+          </a:prstGeom>
+          <a:noFill/>
+          <a:ln/>
+        </p:spPr>
+        <p:txBody>
+          <a:bodyPr wrap="square" lIns="0" tIns="0" rIns="0" bIns="0" rtlCol="0" anchor="ctr"/>
+          <a:lstStyle/>
+          <a:p>
+            <a:pPr algn="r" indent="0" marL="0">
+              <a:buNone/>
+            </a:pPr>
+            <a:r>
+              <a:rPr lang="en-US" sz="850" dirty="0">
+                <a:solidFill>
+                  <a:srgbClr val="5C6E70"/>
+                </a:solidFill>
+                <a:latin typeface="Calibri" pitchFamily="34" charset="0"/>
+                <a:ea typeface="Calibri" pitchFamily="34" charset="-122"/>
+                <a:cs typeface="Calibri" pitchFamily="34" charset="-120"/>
+              </a:rPr>
+              <a:t>Paciente</a:t>
+            </a:r>
+            <a:endParaRPr lang="en-US" sz="850" dirty="0"/>
+          </a:p>
+        </p:txBody>
+      </p:sp>
+      <p:sp>
+        <p:nvSpPr>
+          <p:cNvPr id="14" name="Shape 12"/>
+          <p:cNvSpPr/>
+          <p:nvPr/>
+        </p:nvSpPr>
+        <p:spPr>
+          <a:xfrm>
+            <a:off x="6537960" y="2505456"/>
+            <a:ext cx="4800600" cy="384048"/>
+          </a:xfrm>
+          <a:prstGeom prst="roundRect">
+            <a:avLst>
+              <a:gd name="adj" fmla="val 23810"/>
+            </a:avLst>
+          </a:prstGeom>
+          <a:solidFill>
+            <a:srgbClr val="028090"/>
+          </a:solidFill>
+          <a:ln w="12700">
+            <a:solidFill>
+              <a:srgbClr val="028090"/>
+            </a:solidFill>
+            <a:prstDash val="solid"/>
+          </a:ln>
+        </p:spPr>
+      </p:sp>
+      <p:sp>
+        <p:nvSpPr>
+          <p:cNvPr id="15" name="Text 13"/>
+          <p:cNvSpPr txBox="1"/>
+          <p:nvPr/>
+        </p:nvSpPr>
+        <p:spPr>
+          <a:xfrm>
+            <a:off x="6684264" y="2505456"/>
+            <a:ext cx="4507992" cy="384048"/>
+          </a:xfrm>
+          <a:prstGeom prst="rect">
+            <a:avLst/>
+          </a:prstGeom>
+          <a:noFill/>
+          <a:ln/>
+        </p:spPr>
+        <p:txBody>
+          <a:bodyPr wrap="square" lIns="0" tIns="0" rIns="0" bIns="0" rtlCol="0" anchor="ctr"/>
+          <a:lstStyle/>
+          <a:p>
+            <a:pPr algn="l" indent="0" marL="0">
+              <a:lnSpc>
+                <a:spcPct val="105000"/>
+              </a:lnSpc>
+              <a:buNone/>
+            </a:pPr>
+            <a:r>
+              <a:rPr lang="en-US" sz="1150" dirty="0">
+                <a:solidFill>
+                  <a:srgbClr val="FFFFFF"/>
+                </a:solidFill>
+                <a:latin typeface="Calibri" pitchFamily="34" charset="0"/>
+                <a:ea typeface="Calibri" pitchFamily="34" charset="-122"/>
+                <a:cs typeface="Calibri" pitchFamily="34" charset="-120"/>
+              </a:rPr>
+              <a:t>¿Tramo A, B, C o D?</a:t>
+            </a:r>
+            <a:endParaRPr lang="en-US" sz="1150" dirty="0"/>
+          </a:p>
+        </p:txBody>
+      </p:sp>
+      <p:sp>
+        <p:nvSpPr>
+          <p:cNvPr id="16" name="Text 14"/>
+          <p:cNvSpPr txBox="1"/>
+          <p:nvPr/>
+        </p:nvSpPr>
+        <p:spPr>
+          <a:xfrm>
+            <a:off x="6537960" y="2331720"/>
+            <a:ext cx="4800600" cy="155448"/>
+          </a:xfrm>
+          <a:prstGeom prst="rect">
+            <a:avLst/>
+          </a:prstGeom>
+          <a:noFill/>
+          <a:ln/>
+        </p:spPr>
+        <p:txBody>
+          <a:bodyPr wrap="square" lIns="0" tIns="0" rIns="0" bIns="0" rtlCol="0" anchor="ctr"/>
+          <a:lstStyle/>
+          <a:p>
+            <a:pPr algn="l" indent="0" marL="0">
+              <a:buNone/>
+            </a:pPr>
+            <a:r>
+              <a:rPr lang="en-US" sz="850" dirty="0">
+                <a:solidFill>
+                  <a:srgbClr val="5C6E70"/>
+                </a:solidFill>
+                <a:latin typeface="Calibri" pitchFamily="34" charset="0"/>
+                <a:ea typeface="Calibri" pitchFamily="34" charset="-122"/>
+                <a:cs typeface="Calibri" pitchFamily="34" charset="-120"/>
+              </a:rPr>
+              <a:t>Bot</a:t>
+            </a:r>
+            <a:endParaRPr lang="en-US" sz="850" dirty="0"/>
+          </a:p>
+        </p:txBody>
+      </p:sp>
+      <p:sp>
+        <p:nvSpPr>
+          <p:cNvPr id="17" name="Shape 15"/>
+          <p:cNvSpPr/>
+          <p:nvPr/>
+        </p:nvSpPr>
+        <p:spPr>
+          <a:xfrm>
+            <a:off x="6537960" y="3108960"/>
+            <a:ext cx="4800600" cy="384048"/>
+          </a:xfrm>
+          <a:prstGeom prst="roundRect">
+            <a:avLst>
+              <a:gd name="adj" fmla="val 23810"/>
+            </a:avLst>
+          </a:prstGeom>
+          <a:solidFill>
+            <a:srgbClr val="F1F5F4"/>
+          </a:solidFill>
+          <a:ln w="9525">
+            <a:solidFill>
+              <a:srgbClr val="D7E1E0"/>
+            </a:solidFill>
+            <a:prstDash val="solid"/>
+          </a:ln>
+        </p:spPr>
+      </p:sp>
+      <p:sp>
+        <p:nvSpPr>
+          <p:cNvPr id="18" name="Text 16"/>
+          <p:cNvSpPr txBox="1"/>
+          <p:nvPr/>
+        </p:nvSpPr>
+        <p:spPr>
+          <a:xfrm>
+            <a:off x="6684264" y="3108960"/>
+            <a:ext cx="4507992" cy="384048"/>
+          </a:xfrm>
+          <a:prstGeom prst="rect">
+            <a:avLst/>
+          </a:prstGeom>
+          <a:noFill/>
+          <a:ln/>
+        </p:spPr>
+        <p:txBody>
+          <a:bodyPr wrap="square" lIns="0" tIns="0" rIns="0" bIns="0" rtlCol="0" anchor="ctr"/>
+          <a:lstStyle/>
+          <a:p>
+            <a:pPr algn="l" indent="0" marL="0">
+              <a:lnSpc>
+                <a:spcPct val="105000"/>
+              </a:lnSpc>
+              <a:buNone/>
+            </a:pPr>
+            <a:r>
+              <a:rPr lang="en-US" sz="1150" dirty="0">
+                <a:solidFill>
+                  <a:srgbClr val="1B2A2F"/>
+                </a:solidFill>
+                <a:latin typeface="Calibri" pitchFamily="34" charset="0"/>
+                <a:ea typeface="Calibri" pitchFamily="34" charset="-122"/>
+                <a:cs typeface="Calibri" pitchFamily="34" charset="-120"/>
+              </a:rPr>
+              <a:t>C</a:t>
+            </a:r>
+            <a:endParaRPr lang="en-US" sz="1150" dirty="0"/>
+          </a:p>
+        </p:txBody>
+      </p:sp>
+      <p:sp>
+        <p:nvSpPr>
+          <p:cNvPr id="19" name="Text 17"/>
+          <p:cNvSpPr txBox="1"/>
+          <p:nvPr/>
+        </p:nvSpPr>
+        <p:spPr>
+          <a:xfrm>
+            <a:off x="6537960" y="2935224"/>
+            <a:ext cx="4800600" cy="155448"/>
+          </a:xfrm>
+          <a:prstGeom prst="rect">
+            <a:avLst/>
+          </a:prstGeom>
+          <a:noFill/>
+          <a:ln/>
+        </p:spPr>
+        <p:txBody>
+          <a:bodyPr wrap="square" lIns="0" tIns="0" rIns="0" bIns="0" rtlCol="0" anchor="ctr"/>
+          <a:lstStyle/>
+          <a:p>
+            <a:pPr algn="r" indent="0" marL="0">
+              <a:buNone/>
+            </a:pPr>
+            <a:r>
+              <a:rPr lang="en-US" sz="850" dirty="0">
+                <a:solidFill>
+                  <a:srgbClr val="5C6E70"/>
+                </a:solidFill>
+                <a:latin typeface="Calibri" pitchFamily="34" charset="0"/>
+                <a:ea typeface="Calibri" pitchFamily="34" charset="-122"/>
+                <a:cs typeface="Calibri" pitchFamily="34" charset="-120"/>
+              </a:rPr>
+              <a:t>Paciente</a:t>
+            </a:r>
+            <a:endParaRPr lang="en-US" sz="850" dirty="0"/>
+          </a:p>
+        </p:txBody>
+      </p:sp>
+      <p:sp>
+        <p:nvSpPr>
+          <p:cNvPr id="20" name="Shape 18"/>
+          <p:cNvSpPr/>
+          <p:nvPr/>
+        </p:nvSpPr>
+        <p:spPr>
+          <a:xfrm>
+            <a:off x="6537960" y="3712464"/>
+            <a:ext cx="4800600" cy="932688"/>
+          </a:xfrm>
+          <a:prstGeom prst="roundRect">
+            <a:avLst>
+              <a:gd name="adj" fmla="val 9804"/>
+            </a:avLst>
+          </a:prstGeom>
+          <a:solidFill>
+            <a:srgbClr val="028090"/>
+          </a:solidFill>
+          <a:ln w="12700">
+            <a:solidFill>
+              <a:srgbClr val="028090"/>
+            </a:solidFill>
+            <a:prstDash val="solid"/>
+          </a:ln>
+        </p:spPr>
+      </p:sp>
+      <p:sp>
+        <p:nvSpPr>
+          <p:cNvPr id="21" name="Text 19"/>
+          <p:cNvSpPr txBox="1"/>
+          <p:nvPr/>
+        </p:nvSpPr>
+        <p:spPr>
+          <a:xfrm>
+            <a:off x="6684264" y="3712464"/>
+            <a:ext cx="4507992" cy="932688"/>
+          </a:xfrm>
+          <a:prstGeom prst="rect">
+            <a:avLst/>
+          </a:prstGeom>
+          <a:noFill/>
+          <a:ln/>
+        </p:spPr>
+        <p:txBody>
+          <a:bodyPr wrap="square" lIns="0" tIns="0" rIns="0" bIns="0" rtlCol="0" anchor="ctr"/>
+          <a:lstStyle/>
+          <a:p>
+            <a:pPr algn="l" indent="0" marL="0">
+              <a:lnSpc>
+                <a:spcPct val="105000"/>
+              </a:lnSpc>
+              <a:buNone/>
+            </a:pPr>
+            <a:r>
+              <a:rPr lang="en-US" sz="1150" dirty="0">
+                <a:solidFill>
+                  <a:srgbClr val="FFFFFF"/>
+                </a:solidFill>
+                <a:latin typeface="Calibri" pitchFamily="34" charset="0"/>
+                <a:ea typeface="Calibri" pitchFamily="34" charset="-122"/>
+                <a:cs typeface="Calibri" pitchFamily="34" charset="-120"/>
+              </a:rPr>
+              <a:t>Las 10 sesiones por fonasa valen alrededor de $38.000...</a:t>
+            </a:r>
+            <a:endParaRPr lang="en-US" sz="1150" dirty="0"/>
+          </a:p>
+          <a:p>
+            <a:pPr algn="l" indent="0" marL="0">
+              <a:lnSpc>
+                <a:spcPct val="105000"/>
+              </a:lnSpc>
+              <a:buNone/>
+            </a:pPr>
+            <a:r>
+              <a:rPr lang="en-US" sz="1150" dirty="0">
+                <a:solidFill>
+                  <a:srgbClr val="FFFFFF"/>
+                </a:solidFill>
+                <a:latin typeface="Calibri" pitchFamily="34" charset="0"/>
+                <a:ea typeface="Calibri" pitchFamily="34" charset="-122"/>
+                <a:cs typeface="Calibri" pitchFamily="34" charset="-120"/>
+              </a:rPr>
+              <a:t>[precio, dirección y códigos FONASA exactos]</a:t>
+            </a:r>
+            <a:endParaRPr lang="en-US" sz="1150" dirty="0"/>
+          </a:p>
+          <a:p>
+            <a:pPr algn="l" indent="0" marL="0">
+              <a:lnSpc>
+                <a:spcPct val="105000"/>
+              </a:lnSpc>
+              <a:buNone/>
+            </a:pPr>
+            <a:endParaRPr lang="en-US" sz="1150" dirty="0"/>
+          </a:p>
+          <a:p>
+            <a:pPr algn="l" indent="0" marL="0">
+              <a:lnSpc>
+                <a:spcPct val="105000"/>
+              </a:lnSpc>
+              <a:buNone/>
+            </a:pPr>
+            <a:r>
+              <a:rPr lang="en-US" sz="1150" dirty="0">
+                <a:solidFill>
+                  <a:srgbClr val="FFFFFF"/>
+                </a:solidFill>
+                <a:latin typeface="Calibri" pitchFamily="34" charset="0"/>
+                <a:ea typeface="Calibri" pitchFamily="34" charset="-122"/>
+                <a:cs typeface="Calibri" pitchFamily="34" charset="-120"/>
+              </a:rPr>
+              <a:t>¿Quieres agendar tu hora ahora?</a:t>
+            </a:r>
+            <a:endParaRPr lang="en-US" sz="1150" dirty="0"/>
+          </a:p>
+        </p:txBody>
+      </p:sp>
+      <p:sp>
+        <p:nvSpPr>
+          <p:cNvPr id="22" name="Text 20"/>
+          <p:cNvSpPr txBox="1"/>
+          <p:nvPr/>
+        </p:nvSpPr>
+        <p:spPr>
+          <a:xfrm>
+            <a:off x="6537960" y="3538728"/>
+            <a:ext cx="4800600" cy="155448"/>
+          </a:xfrm>
+          <a:prstGeom prst="rect">
+            <a:avLst/>
+          </a:prstGeom>
+          <a:noFill/>
+          <a:ln/>
+        </p:spPr>
+        <p:txBody>
+          <a:bodyPr wrap="square" lIns="0" tIns="0" rIns="0" bIns="0" rtlCol="0" anchor="ctr"/>
+          <a:lstStyle/>
+          <a:p>
+            <a:pPr algn="l" indent="0" marL="0">
+              <a:buNone/>
+            </a:pPr>
+            <a:r>
+              <a:rPr lang="en-US" sz="850" dirty="0">
+                <a:solidFill>
+                  <a:srgbClr val="5C6E70"/>
+                </a:solidFill>
+                <a:latin typeface="Calibri" pitchFamily="34" charset="0"/>
+                <a:ea typeface="Calibri" pitchFamily="34" charset="-122"/>
+                <a:cs typeface="Calibri" pitchFamily="34" charset="-120"/>
+              </a:rPr>
+              <a:t>Bot</a:t>
+            </a:r>
+            <a:endParaRPr lang="en-US" sz="850" dirty="0"/>
+          </a:p>
+        </p:txBody>
+      </p:sp>
+      <p:sp>
+        <p:nvSpPr>
+          <p:cNvPr id="23" name="Text 21"/>
           <p:cNvSpPr txBox="1"/>
           <p:nvPr/>
         </p:nvSpPr>
@@ -9304,15 +10097,44 @@
                 <a:ea typeface="Calibri" pitchFamily="34" charset="-122"/>
                 <a:cs typeface="Calibri" pitchFamily="34" charset="-120"/>
               </a:rPr>
-              <a:t>Cuando el diagnóstico menciona dos zonas distintas (bilateral) o el caso es ambiguo, el bot no crea una ficha automática: deriva la conversación a Felipe directamente.</a:t>
+              <a:t>Horarios, precios y previsión vienen directo del documento de fine-tuning de Felipe. El bot mantiene el estado de la conversación (esperando_fonasa, esperando_tramo) para no perder el hilo entre mensajes.</a:t>
             </a:r>
             <a:endParaRPr lang="en-US" sz="1400" dirty="0"/>
           </a:p>
-        </p:txBody>
-      </p:sp>
-      <p:sp>
-        <p:nvSpPr>
-          <p:cNvPr id="12" name="Text 10"/>
+          <a:p>
+            <a:pPr algn="l" indent="0" marL="0">
+              <a:lnSpc>
+                <a:spcPct val="135000"/>
+              </a:lnSpc>
+              <a:buNone/>
+            </a:pPr>
+            <a:endParaRPr lang="en-US" sz="1400" dirty="0"/>
+          </a:p>
+          <a:p>
+            <a:pPr algn="l" indent="0" marL="0">
+              <a:lnSpc>
+                <a:spcPct val="135000"/>
+              </a:lnSpc>
+              <a:buNone/>
+            </a:pPr>
+            <a:r>
+              <a:rPr lang="en-US" sz="1400" dirty="0">
+                <a:solidFill>
+                  <a:srgbClr val="5C6E70"/>
+                </a:solidFill>
+                <a:latin typeface="Calibri" pitchFamily="34" charset="0"/>
+                <a:ea typeface="Calibri" pitchFamily="34" charset="-122"/>
+                <a:cs typeface="Calibri" pitchFamily="34" charset="-120"/>
+              </a:rPr>
+              <a:t>Al terminar de mostrar el precio, siempre ofrece agendar la hora ahí mismo.</a:t>
+            </a:r>
+            <a:endParaRPr lang="en-US" sz="1400" dirty="0"/>
+          </a:p>
+        </p:txBody>
+      </p:sp>
+      <p:sp>
+        <p:nvSpPr>
+          <p:cNvPr id="24" name="Text 22"/>
           <p:cNvSpPr txBox="1"/>
           <p:nvPr/>
         </p:nvSpPr>
@@ -9343,7 +10165,7 @@
                 <a:ea typeface="Calibri" pitchFamily="34" charset="-122"/>
                 <a:cs typeface="Calibri" pitchFamily="34" charset="-120"/>
               </a:rPr>
-              <a:t>Regla: esBilateral(diagnostico) en actions.go</a:t>
+              <a:t>Fuente: finetuning_compact_v3_felipe.md</a:t>
             </a:r>
             <a:endParaRPr lang="en-US" sz="1050" dirty="0"/>
           </a:p>
@@ -9363,7 +10185,7 @@
     <p:bg>
       <p:bgPr>
         <a:solidFill>
-          <a:srgbClr val="0B3438"/>
+          <a:srgbClr val="FFFFFF"/>
         </a:solidFill>
       </p:bgPr>
     </p:bg>
@@ -9389,7 +10211,7 @@
         </p:nvSpPr>
         <p:spPr>
           <a:xfrm>
-            <a:off x="548640" y="548640"/>
+            <a:off x="548640" y="384048"/>
             <a:ext cx="7315200" cy="274320"/>
           </a:xfrm>
           <a:prstGeom prst="rect">
@@ -9408,13 +10230,13 @@
             <a:r>
               <a:rPr lang="en-US" sz="1200" b="1" spc="100" kern="0" dirty="0">
                 <a:solidFill>
-                  <a:srgbClr val="02C39A"/>
-                </a:solidFill>
-                <a:latin typeface="Calibri" pitchFamily="34" charset="0"/>
-                <a:ea typeface="Calibri" pitchFamily="34" charset="-122"/>
-                <a:cs typeface="Calibri" pitchFamily="34" charset="-120"/>
-              </a:rPr>
-              <a:t>PARA REVISAR JUNTOS</a:t>
+                  <a:srgbClr val="00A896"/>
+                </a:solidFill>
+                <a:latin typeface="Calibri" pitchFamily="34" charset="0"/>
+                <a:ea typeface="Calibri" pitchFamily="34" charset="-122"/>
+                <a:cs typeface="Calibri" pitchFamily="34" charset="-120"/>
+              </a:rPr>
+              <a:t>CONSULTAS</a:t>
             </a:r>
             <a:endParaRPr lang="en-US" sz="1200" dirty="0"/>
           </a:p>
@@ -9428,8 +10250,8 @@
         </p:nvSpPr>
         <p:spPr>
           <a:xfrm>
-            <a:off x="548640" y="822960"/>
-            <a:ext cx="9144000" cy="640080"/>
+            <a:off x="548640" y="640080"/>
+            <a:ext cx="6949440" cy="548640"/>
           </a:xfrm>
           <a:prstGeom prst="rect">
             <a:avLst/>
@@ -9445,17 +10267,17 @@
               <a:buNone/>
             </a:pPr>
             <a:r>
-              <a:rPr lang="en-US" sz="3200" b="1" dirty="0">
-                <a:solidFill>
-                  <a:srgbClr val="FFFFFF"/>
+              <a:rPr lang="en-US" sz="2800" b="1" dirty="0">
+                <a:solidFill>
+                  <a:srgbClr val="1B2A2F"/>
                 </a:solidFill>
                 <a:latin typeface="Cambria" pitchFamily="34" charset="0"/>
                 <a:ea typeface="Cambria" pitchFamily="34" charset="-122"/>
                 <a:cs typeface="Cambria" pitchFamily="34" charset="-120"/>
               </a:rPr>
-              <a:t>Próximos pasos</a:t>
-            </a:r>
-            <a:endParaRPr lang="en-US" sz="3200" dirty="0"/>
+              <a:t>Derivación a Felipe</a:t>
+            </a:r>
+            <a:endParaRPr lang="en-US" sz="2800" dirty="0"/>
           </a:p>
         </p:txBody>
       </p:sp>
@@ -9467,12 +10289,147 @@
         </p:nvSpPr>
         <p:spPr>
           <a:xfrm>
-            <a:off x="548640" y="1920240"/>
-            <a:ext cx="457200" cy="457200"/>
+            <a:off x="6263640" y="365760"/>
+            <a:ext cx="5349240" cy="6355080"/>
           </a:xfrm>
           <a:prstGeom prst="roundRect">
             <a:avLst>
-              <a:gd name="adj" fmla="val 20000"/>
+              <a:gd name="adj" fmla="val 2393"/>
+            </a:avLst>
+          </a:prstGeom>
+          <a:solidFill>
+            <a:srgbClr val="F1F7F6"/>
+          </a:solidFill>
+          <a:ln w="12700">
+            <a:solidFill>
+              <a:srgbClr val="F1F7F6"/>
+            </a:solidFill>
+            <a:prstDash val="solid"/>
+          </a:ln>
+        </p:spPr>
+      </p:sp>
+      <p:sp>
+        <p:nvSpPr>
+          <p:cNvPr id="5" name="Shape 3"/>
+          <p:cNvSpPr/>
+          <p:nvPr/>
+        </p:nvSpPr>
+        <p:spPr>
+          <a:xfrm>
+            <a:off x="6537960" y="694944"/>
+            <a:ext cx="4800600" cy="384048"/>
+          </a:xfrm>
+          <a:prstGeom prst="roundRect">
+            <a:avLst>
+              <a:gd name="adj" fmla="val 23810"/>
+            </a:avLst>
+          </a:prstGeom>
+          <a:solidFill>
+            <a:srgbClr val="F1F5F4"/>
+          </a:solidFill>
+          <a:ln w="9525">
+            <a:solidFill>
+              <a:srgbClr val="D7E1E0"/>
+            </a:solidFill>
+            <a:prstDash val="solid"/>
+          </a:ln>
+        </p:spPr>
+      </p:sp>
+      <p:sp>
+        <p:nvSpPr>
+          <p:cNvPr id="6" name="Text 4"/>
+          <p:cNvSpPr txBox="1"/>
+          <p:nvPr/>
+        </p:nvSpPr>
+        <p:spPr>
+          <a:xfrm>
+            <a:off x="6684264" y="694944"/>
+            <a:ext cx="4507992" cy="384048"/>
+          </a:xfrm>
+          <a:prstGeom prst="rect">
+            <a:avLst/>
+          </a:prstGeom>
+          <a:noFill/>
+          <a:ln/>
+        </p:spPr>
+        <p:txBody>
+          <a:bodyPr wrap="square" lIns="0" tIns="0" rIns="0" bIns="0" rtlCol="0" anchor="ctr"/>
+          <a:lstStyle/>
+          <a:p>
+            <a:pPr algn="l" indent="0" marL="0">
+              <a:lnSpc>
+                <a:spcPct val="105000"/>
+              </a:lnSpc>
+              <a:buNone/>
+            </a:pPr>
+            <a:r>
+              <a:rPr lang="en-US" sz="1150" dirty="0">
+                <a:solidFill>
+                  <a:srgbClr val="1B2A2F"/>
+                </a:solidFill>
+                <a:latin typeface="Calibri" pitchFamily="34" charset="0"/>
+                <a:ea typeface="Calibri" pitchFamily="34" charset="-122"/>
+                <a:cs typeface="Calibri" pitchFamily="34" charset="-120"/>
+              </a:rPr>
+              <a:t>Tengo dolor en ambas rodillas</a:t>
+            </a:r>
+            <a:endParaRPr lang="en-US" sz="1150" dirty="0"/>
+          </a:p>
+        </p:txBody>
+      </p:sp>
+      <p:sp>
+        <p:nvSpPr>
+          <p:cNvPr id="7" name="Text 5"/>
+          <p:cNvSpPr txBox="1"/>
+          <p:nvPr/>
+        </p:nvSpPr>
+        <p:spPr>
+          <a:xfrm>
+            <a:off x="6537960" y="521208"/>
+            <a:ext cx="4800600" cy="155448"/>
+          </a:xfrm>
+          <a:prstGeom prst="rect">
+            <a:avLst/>
+          </a:prstGeom>
+          <a:noFill/>
+          <a:ln/>
+        </p:spPr>
+        <p:txBody>
+          <a:bodyPr wrap="square" lIns="0" tIns="0" rIns="0" bIns="0" rtlCol="0" anchor="ctr"/>
+          <a:lstStyle/>
+          <a:p>
+            <a:pPr algn="r" indent="0" marL="0">
+              <a:buNone/>
+            </a:pPr>
+            <a:r>
+              <a:rPr lang="en-US" sz="850" dirty="0">
+                <a:solidFill>
+                  <a:srgbClr val="5C6E70"/>
+                </a:solidFill>
+                <a:latin typeface="Calibri" pitchFamily="34" charset="0"/>
+                <a:ea typeface="Calibri" pitchFamily="34" charset="-122"/>
+                <a:cs typeface="Calibri" pitchFamily="34" charset="-120"/>
+              </a:rPr>
+              <a:t>Paciente</a:t>
+            </a:r>
+            <a:endParaRPr lang="en-US" sz="850" dirty="0"/>
+          </a:p>
+        </p:txBody>
+      </p:sp>
+      <p:sp>
+        <p:nvSpPr>
+          <p:cNvPr id="8" name="Shape 6"/>
+          <p:cNvSpPr/>
+          <p:nvPr/>
+        </p:nvSpPr>
+        <p:spPr>
+          <a:xfrm>
+            <a:off x="6537960" y="1298448"/>
+            <a:ext cx="4800600" cy="566928"/>
+          </a:xfrm>
+          <a:prstGeom prst="roundRect">
+            <a:avLst>
+              <a:gd name="adj" fmla="val 16129"/>
             </a:avLst>
           </a:prstGeom>
           <a:solidFill>
@@ -9488,14 +10445,137 @@
       </p:sp>
       <p:sp>
         <p:nvSpPr>
-          <p:cNvPr id="5" name="Text 3"/>
-          <p:cNvSpPr txBox="1"/>
-          <p:nvPr/>
-        </p:nvSpPr>
-        <p:spPr>
-          <a:xfrm>
-            <a:off x="1234440" y="1865376"/>
-            <a:ext cx="9601200" cy="365760"/>
+          <p:cNvPr id="9" name="Text 7"/>
+          <p:cNvSpPr txBox="1"/>
+          <p:nvPr/>
+        </p:nvSpPr>
+        <p:spPr>
+          <a:xfrm>
+            <a:off x="6684264" y="1298448"/>
+            <a:ext cx="4507992" cy="566928"/>
+          </a:xfrm>
+          <a:prstGeom prst="rect">
+            <a:avLst/>
+          </a:prstGeom>
+          <a:noFill/>
+          <a:ln/>
+        </p:spPr>
+        <p:txBody>
+          <a:bodyPr wrap="square" lIns="0" tIns="0" rIns="0" bIns="0" rtlCol="0" anchor="ctr"/>
+          <a:lstStyle/>
+          <a:p>
+            <a:pPr algn="l" indent="0" marL="0">
+              <a:lnSpc>
+                <a:spcPct val="105000"/>
+              </a:lnSpc>
+              <a:buNone/>
+            </a:pPr>
+            <a:r>
+              <a:rPr lang="en-US" sz="1150" dirty="0">
+                <a:solidFill>
+                  <a:srgbClr val="FFFFFF"/>
+                </a:solidFill>
+                <a:latin typeface="Calibri" pitchFamily="34" charset="0"/>
+                <a:ea typeface="Calibri" pitchFamily="34" charset="-122"/>
+                <a:cs typeface="Calibri" pitchFamily="34" charset="-120"/>
+              </a:rPr>
+              <a:t>Gracias por la información, en un momento Felipe te contacta personalmente para coordinar tu tratamiento.</a:t>
+            </a:r>
+            <a:endParaRPr lang="en-US" sz="1150" dirty="0"/>
+          </a:p>
+        </p:txBody>
+      </p:sp>
+      <p:sp>
+        <p:nvSpPr>
+          <p:cNvPr id="10" name="Text 8"/>
+          <p:cNvSpPr txBox="1"/>
+          <p:nvPr/>
+        </p:nvSpPr>
+        <p:spPr>
+          <a:xfrm>
+            <a:off x="6537960" y="1124712"/>
+            <a:ext cx="4800600" cy="155448"/>
+          </a:xfrm>
+          <a:prstGeom prst="rect">
+            <a:avLst/>
+          </a:prstGeom>
+          <a:noFill/>
+          <a:ln/>
+        </p:spPr>
+        <p:txBody>
+          <a:bodyPr wrap="square" lIns="0" tIns="0" rIns="0" bIns="0" rtlCol="0" anchor="ctr"/>
+          <a:lstStyle/>
+          <a:p>
+            <a:pPr algn="l" indent="0" marL="0">
+              <a:buNone/>
+            </a:pPr>
+            <a:r>
+              <a:rPr lang="en-US" sz="850" dirty="0">
+                <a:solidFill>
+                  <a:srgbClr val="5C6E70"/>
+                </a:solidFill>
+                <a:latin typeface="Calibri" pitchFamily="34" charset="0"/>
+                <a:ea typeface="Calibri" pitchFamily="34" charset="-122"/>
+                <a:cs typeface="Calibri" pitchFamily="34" charset="-120"/>
+              </a:rPr>
+              <a:t>Bot</a:t>
+            </a:r>
+            <a:endParaRPr lang="en-US" sz="850" dirty="0"/>
+          </a:p>
+        </p:txBody>
+      </p:sp>
+      <p:sp>
+        <p:nvSpPr>
+          <p:cNvPr id="11" name="Text 9"/>
+          <p:cNvSpPr txBox="1"/>
+          <p:nvPr/>
+        </p:nvSpPr>
+        <p:spPr>
+          <a:xfrm>
+            <a:off x="548640" y="1417320"/>
+            <a:ext cx="5394960" cy="4206240"/>
+          </a:xfrm>
+          <a:prstGeom prst="rect">
+            <a:avLst/>
+          </a:prstGeom>
+          <a:noFill/>
+          <a:ln/>
+        </p:spPr>
+        <p:txBody>
+          <a:bodyPr wrap="square" lIns="0" tIns="0" rIns="0" bIns="0" rtlCol="0" anchor="t"/>
+          <a:lstStyle/>
+          <a:p>
+            <a:pPr algn="l" indent="0" marL="0">
+              <a:lnSpc>
+                <a:spcPct val="135000"/>
+              </a:lnSpc>
+              <a:buNone/>
+            </a:pPr>
+            <a:r>
+              <a:rPr lang="en-US" sz="1400" dirty="0">
+                <a:solidFill>
+                  <a:srgbClr val="5C6E70"/>
+                </a:solidFill>
+                <a:latin typeface="Calibri" pitchFamily="34" charset="0"/>
+                <a:ea typeface="Calibri" pitchFamily="34" charset="-122"/>
+                <a:cs typeface="Calibri" pitchFamily="34" charset="-120"/>
+              </a:rPr>
+              <a:t>Cuando el diagnóstico menciona dos zonas distintas (bilateral) o el caso es ambiguo, el bot no crea una ficha automática: deriva la conversación a Felipe directamente.</a:t>
+            </a:r>
+            <a:endParaRPr lang="en-US" sz="1400" dirty="0"/>
+          </a:p>
+        </p:txBody>
+      </p:sp>
+      <p:sp>
+        <p:nvSpPr>
+          <p:cNvPr id="12" name="Text 10"/>
+          <p:cNvSpPr txBox="1"/>
+          <p:nvPr/>
+        </p:nvSpPr>
+        <p:spPr>
+          <a:xfrm>
+            <a:off x="548640" y="6355080"/>
+            <a:ext cx="5394960" cy="320040"/>
           </a:xfrm>
           <a:prstGeom prst="rect">
             <a:avLst/>
@@ -9511,371 +10591,17 @@
               <a:buNone/>
             </a:pPr>
             <a:r>
-              <a:rPr lang="en-US" sz="1700" b="1" dirty="0">
-                <a:solidFill>
-                  <a:srgbClr val="FFFFFF"/>
-                </a:solidFill>
-                <a:latin typeface="Calibri" pitchFamily="34" charset="0"/>
-                <a:ea typeface="Calibri" pitchFamily="34" charset="-122"/>
-                <a:cs typeface="Calibri" pitchFamily="34" charset="-120"/>
-              </a:rPr>
-              <a:t>Textos exactos</a:t>
-            </a:r>
-            <a:endParaRPr lang="en-US" sz="1700" dirty="0"/>
-          </a:p>
-        </p:txBody>
-      </p:sp>
-      <p:sp>
-        <p:nvSpPr>
-          <p:cNvPr id="6" name="Text 4"/>
-          <p:cNvSpPr txBox="1"/>
-          <p:nvPr/>
-        </p:nvSpPr>
-        <p:spPr>
-          <a:xfrm>
-            <a:off x="1234440" y="2212848"/>
-            <a:ext cx="9601200" cy="365760"/>
-          </a:xfrm>
-          <a:prstGeom prst="rect">
-            <a:avLst/>
-          </a:prstGeom>
-          <a:noFill/>
-          <a:ln/>
-        </p:spPr>
-        <p:txBody>
-          <a:bodyPr wrap="square" lIns="0" tIns="0" rIns="0" bIns="0" rtlCol="0" anchor="ctr"/>
-          <a:lstStyle/>
-          <a:p>
-            <a:pPr indent="0" marL="0">
-              <a:buNone/>
-            </a:pPr>
-            <a:r>
-              <a:rPr lang="en-US" sz="1300" dirty="0">
-                <a:solidFill>
-                  <a:srgbClr val="9FC9C8"/>
-                </a:solidFill>
-                <a:latin typeface="Calibri" pitchFamily="34" charset="0"/>
-                <a:ea typeface="Calibri" pitchFamily="34" charset="-122"/>
-                <a:cs typeface="Calibri" pitchFamily="34" charset="-120"/>
-              </a:rPr>
-              <a:t>Ajustar redacción de cada pregunta y mensaje de confirmación</a:t>
-            </a:r>
-            <a:endParaRPr lang="en-US" sz="1300" dirty="0"/>
-          </a:p>
-        </p:txBody>
-      </p:sp>
-      <p:sp>
-        <p:nvSpPr>
-          <p:cNvPr id="7" name="Shape 5"/>
-          <p:cNvSpPr/>
-          <p:nvPr/>
-        </p:nvSpPr>
-        <p:spPr>
-          <a:xfrm>
-            <a:off x="548640" y="2971800"/>
-            <a:ext cx="457200" cy="457200"/>
-          </a:xfrm>
-          <a:prstGeom prst="roundRect">
-            <a:avLst>
-              <a:gd name="adj" fmla="val 20000"/>
-            </a:avLst>
-          </a:prstGeom>
-          <a:solidFill>
-            <a:srgbClr val="028090"/>
-          </a:solidFill>
-          <a:ln w="12700">
-            <a:solidFill>
-              <a:srgbClr val="028090"/>
-            </a:solidFill>
-            <a:prstDash val="solid"/>
-          </a:ln>
-        </p:spPr>
-      </p:sp>
-      <p:sp>
-        <p:nvSpPr>
-          <p:cNvPr id="8" name="Text 6"/>
-          <p:cNvSpPr txBox="1"/>
-          <p:nvPr/>
-        </p:nvSpPr>
-        <p:spPr>
-          <a:xfrm>
-            <a:off x="1234440" y="2916936"/>
-            <a:ext cx="9601200" cy="365760"/>
-          </a:xfrm>
-          <a:prstGeom prst="rect">
-            <a:avLst/>
-          </a:prstGeom>
-          <a:noFill/>
-          <a:ln/>
-        </p:spPr>
-        <p:txBody>
-          <a:bodyPr wrap="square" lIns="0" tIns="0" rIns="0" bIns="0" rtlCol="0" anchor="ctr"/>
-          <a:lstStyle/>
-          <a:p>
-            <a:pPr indent="0" marL="0">
-              <a:buNone/>
-            </a:pPr>
-            <a:r>
-              <a:rPr lang="en-US" sz="1700" b="1" dirty="0">
-                <a:solidFill>
-                  <a:srgbClr val="FFFFFF"/>
-                </a:solidFill>
-                <a:latin typeface="Calibri" pitchFamily="34" charset="0"/>
-                <a:ea typeface="Calibri" pitchFamily="34" charset="-122"/>
-                <a:cs typeface="Calibri" pitchFamily="34" charset="-120"/>
-              </a:rPr>
-              <a:t>Orden de preguntas</a:t>
-            </a:r>
-            <a:endParaRPr lang="en-US" sz="1700" dirty="0"/>
-          </a:p>
-        </p:txBody>
-      </p:sp>
-      <p:sp>
-        <p:nvSpPr>
-          <p:cNvPr id="9" name="Text 7"/>
-          <p:cNvSpPr txBox="1"/>
-          <p:nvPr/>
-        </p:nvSpPr>
-        <p:spPr>
-          <a:xfrm>
-            <a:off x="1234440" y="3264408"/>
-            <a:ext cx="9601200" cy="365760"/>
-          </a:xfrm>
-          <a:prstGeom prst="rect">
-            <a:avLst/>
-          </a:prstGeom>
-          <a:noFill/>
-          <a:ln/>
-        </p:spPr>
-        <p:txBody>
-          <a:bodyPr wrap="square" lIns="0" tIns="0" rIns="0" bIns="0" rtlCol="0" anchor="ctr"/>
-          <a:lstStyle/>
-          <a:p>
-            <a:pPr indent="0" marL="0">
-              <a:buNone/>
-            </a:pPr>
-            <a:r>
-              <a:rPr lang="en-US" sz="1300" dirty="0">
-                <a:solidFill>
-                  <a:srgbClr val="9FC9C8"/>
-                </a:solidFill>
-                <a:latin typeface="Calibri" pitchFamily="34" charset="0"/>
-                <a:ea typeface="Calibri" pitchFamily="34" charset="-122"/>
-                <a:cs typeface="Calibri" pitchFamily="34" charset="-120"/>
-              </a:rPr>
-              <a:t>Confirmar si peso/altura deberían ir antes que la zona</a:t>
-            </a:r>
-            <a:endParaRPr lang="en-US" sz="1300" dirty="0"/>
-          </a:p>
-        </p:txBody>
-      </p:sp>
-      <p:sp>
-        <p:nvSpPr>
-          <p:cNvPr id="10" name="Shape 8"/>
-          <p:cNvSpPr/>
-          <p:nvPr/>
-        </p:nvSpPr>
-        <p:spPr>
-          <a:xfrm>
-            <a:off x="548640" y="4023360"/>
-            <a:ext cx="457200" cy="457200"/>
-          </a:xfrm>
-          <a:prstGeom prst="roundRect">
-            <a:avLst>
-              <a:gd name="adj" fmla="val 20000"/>
-            </a:avLst>
-          </a:prstGeom>
-          <a:solidFill>
-            <a:srgbClr val="028090"/>
-          </a:solidFill>
-          <a:ln w="12700">
-            <a:solidFill>
-              <a:srgbClr val="028090"/>
-            </a:solidFill>
-            <a:prstDash val="solid"/>
-          </a:ln>
-        </p:spPr>
-      </p:sp>
-      <p:sp>
-        <p:nvSpPr>
-          <p:cNvPr id="11" name="Text 9"/>
-          <p:cNvSpPr txBox="1"/>
-          <p:nvPr/>
-        </p:nvSpPr>
-        <p:spPr>
-          <a:xfrm>
-            <a:off x="1234440" y="3968496"/>
-            <a:ext cx="9601200" cy="365760"/>
-          </a:xfrm>
-          <a:prstGeom prst="rect">
-            <a:avLst/>
-          </a:prstGeom>
-          <a:noFill/>
-          <a:ln/>
-        </p:spPr>
-        <p:txBody>
-          <a:bodyPr wrap="square" lIns="0" tIns="0" rIns="0" bIns="0" rtlCol="0" anchor="ctr"/>
-          <a:lstStyle/>
-          <a:p>
-            <a:pPr indent="0" marL="0">
-              <a:buNone/>
-            </a:pPr>
-            <a:r>
-              <a:rPr lang="en-US" sz="1700" b="1" dirty="0">
-                <a:solidFill>
-                  <a:srgbClr val="FFFFFF"/>
-                </a:solidFill>
-                <a:latin typeface="Calibri" pitchFamily="34" charset="0"/>
-                <a:ea typeface="Calibri" pitchFamily="34" charset="-122"/>
-                <a:cs typeface="Calibri" pitchFamily="34" charset="-120"/>
-              </a:rPr>
-              <a:t>Casos límite</a:t>
-            </a:r>
-            <a:endParaRPr lang="en-US" sz="1700" dirty="0"/>
-          </a:p>
-        </p:txBody>
-      </p:sp>
-      <p:sp>
-        <p:nvSpPr>
-          <p:cNvPr id="12" name="Text 10"/>
-          <p:cNvSpPr txBox="1"/>
-          <p:nvPr/>
-        </p:nvSpPr>
-        <p:spPr>
-          <a:xfrm>
-            <a:off x="1234440" y="4315968"/>
-            <a:ext cx="9601200" cy="365760"/>
-          </a:xfrm>
-          <a:prstGeom prst="rect">
-            <a:avLst/>
-          </a:prstGeom>
-          <a:noFill/>
-          <a:ln/>
-        </p:spPr>
-        <p:txBody>
-          <a:bodyPr wrap="square" lIns="0" tIns="0" rIns="0" bIns="0" rtlCol="0" anchor="ctr"/>
-          <a:lstStyle/>
-          <a:p>
-            <a:pPr indent="0" marL="0">
-              <a:buNone/>
-            </a:pPr>
-            <a:r>
-              <a:rPr lang="en-US" sz="1300" dirty="0">
-                <a:solidFill>
-                  <a:srgbClr val="9FC9C8"/>
-                </a:solidFill>
-                <a:latin typeface="Calibri" pitchFamily="34" charset="0"/>
-                <a:ea typeface="Calibri" pitchFamily="34" charset="-122"/>
-                <a:cs typeface="Calibri" pitchFamily="34" charset="-120"/>
-              </a:rPr>
-              <a:t>Qué hacer si el paciente no reconoce ninguna zona ni diagnóstico</a:t>
-            </a:r>
-            <a:endParaRPr lang="en-US" sz="1300" dirty="0"/>
-          </a:p>
-        </p:txBody>
-      </p:sp>
-      <p:sp>
-        <p:nvSpPr>
-          <p:cNvPr id="13" name="Shape 11"/>
-          <p:cNvSpPr/>
-          <p:nvPr/>
-        </p:nvSpPr>
-        <p:spPr>
-          <a:xfrm>
-            <a:off x="548640" y="5074920"/>
-            <a:ext cx="457200" cy="457200"/>
-          </a:xfrm>
-          <a:prstGeom prst="roundRect">
-            <a:avLst>
-              <a:gd name="adj" fmla="val 20000"/>
-            </a:avLst>
-          </a:prstGeom>
-          <a:solidFill>
-            <a:srgbClr val="028090"/>
-          </a:solidFill>
-          <a:ln w="12700">
-            <a:solidFill>
-              <a:srgbClr val="028090"/>
-            </a:solidFill>
-            <a:prstDash val="solid"/>
-          </a:ln>
-        </p:spPr>
-      </p:sp>
-      <p:sp>
-        <p:nvSpPr>
-          <p:cNvPr id="14" name="Text 12"/>
-          <p:cNvSpPr txBox="1"/>
-          <p:nvPr/>
-        </p:nvSpPr>
-        <p:spPr>
-          <a:xfrm>
-            <a:off x="1234440" y="5020056"/>
-            <a:ext cx="9601200" cy="365760"/>
-          </a:xfrm>
-          <a:prstGeom prst="rect">
-            <a:avLst/>
-          </a:prstGeom>
-          <a:noFill/>
-          <a:ln/>
-        </p:spPr>
-        <p:txBody>
-          <a:bodyPr wrap="square" lIns="0" tIns="0" rIns="0" bIns="0" rtlCol="0" anchor="ctr"/>
-          <a:lstStyle/>
-          <a:p>
-            <a:pPr indent="0" marL="0">
-              <a:buNone/>
-            </a:pPr>
-            <a:r>
-              <a:rPr lang="en-US" sz="1700" b="1" dirty="0">
-                <a:solidFill>
-                  <a:srgbClr val="FFFFFF"/>
-                </a:solidFill>
-                <a:latin typeface="Calibri" pitchFamily="34" charset="0"/>
-                <a:ea typeface="Calibri" pitchFamily="34" charset="-122"/>
-                <a:cs typeface="Calibri" pitchFamily="34" charset="-120"/>
-              </a:rPr>
-              <a:t>Prueba en vivo</a:t>
-            </a:r>
-            <a:endParaRPr lang="en-US" sz="1700" dirty="0"/>
-          </a:p>
-        </p:txBody>
-      </p:sp>
-      <p:sp>
-        <p:nvSpPr>
-          <p:cNvPr id="15" name="Text 13"/>
-          <p:cNvSpPr txBox="1"/>
-          <p:nvPr/>
-        </p:nvSpPr>
-        <p:spPr>
-          <a:xfrm>
-            <a:off x="1234440" y="5367528"/>
-            <a:ext cx="9601200" cy="365760"/>
-          </a:xfrm>
-          <a:prstGeom prst="rect">
-            <a:avLst/>
-          </a:prstGeom>
-          <a:noFill/>
-          <a:ln/>
-        </p:spPr>
-        <p:txBody>
-          <a:bodyPr wrap="square" lIns="0" tIns="0" rIns="0" bIns="0" rtlCol="0" anchor="ctr"/>
-          <a:lstStyle/>
-          <a:p>
-            <a:pPr indent="0" marL="0">
-              <a:buNone/>
-            </a:pPr>
-            <a:r>
-              <a:rPr lang="en-US" sz="1300" dirty="0">
-                <a:solidFill>
-                  <a:srgbClr val="9FC9C8"/>
-                </a:solidFill>
-                <a:latin typeface="Calibri" pitchFamily="34" charset="0"/>
-                <a:ea typeface="Calibri" pitchFamily="34" charset="-122"/>
-                <a:cs typeface="Calibri" pitchFamily="34" charset="-120"/>
-              </a:rPr>
-              <a:t>Correr el flujo completo por WhatsApp con un número nuevo</a:t>
-            </a:r>
-            <a:endParaRPr lang="en-US" sz="1300" dirty="0"/>
+              <a:rPr lang="en-US" sz="1050" i="1" dirty="0">
+                <a:solidFill>
+                  <a:srgbClr val="5C6E70"/>
+                </a:solidFill>
+                <a:latin typeface="Calibri" pitchFamily="34" charset="0"/>
+                <a:ea typeface="Calibri" pitchFamily="34" charset="-122"/>
+                <a:cs typeface="Calibri" pitchFamily="34" charset="-120"/>
+              </a:rPr>
+              <a:t>Regla: esBilateral(diagnostico) en actions.go</a:t>
+            </a:r>
+            <a:endParaRPr lang="en-US" sz="1050" dirty="0"/>
           </a:p>
         </p:txBody>
       </p:sp>
